--- a/backend/templates/pptx/gradient_modern.pptx
+++ b/backend/templates/pptx/gradient_modern.pptx
@@ -14,9 +14,19 @@
     <p:sldId id="262" r:id="rId8"/>
     <p:sldId id="263" r:id="rId9"/>
     <p:sldId id="264" r:id="rId10"/>
+    <p:sldId id="265" r:id="rId11"/>
+    <p:sldId id="266" r:id="rId12"/>
+    <p:sldId id="267" r:id="rId13"/>
+    <p:sldId id="268" r:id="rId14"/>
+    <p:sldId id="269" r:id="rId15"/>
+    <p:sldId id="270" r:id="rId16"/>
+    <p:sldId id="271" r:id="rId17"/>
+    <p:sldId id="272" r:id="rId18"/>
+    <p:sldId id="273" r:id="rId19"/>
+    <p:sldId id="274" r:id="rId20"/>
   </p:sldIdLst>
   <p:notesMasterIdLst>
-    <p:notesMasterId r:id="rId11"/>
+    <p:notesMasterId r:id="rId21"/>
   </p:notesMasterIdLst>
   <p:sldSz cx="12192000" cy="6858000"/>
   <p:notesSz cx="6858000" cy="12192000"/>
@@ -552,6 +562,886 @@
 </p:notes>
 </file>
 
+<file path=ppt/notesSlides/notesSlide10.xml><?xml version="1.0" encoding="utf-8"?>
+<p:notes xmlns:a="http://schemas.openxmlformats.org/drawingml/2006/main" xmlns:r="http://schemas.openxmlformats.org/officeDocument/2006/relationships" xmlns:p="http://schemas.openxmlformats.org/presentationml/2006/main">
+  <p:cSld>
+    <p:spTree>
+      <p:nvGrpSpPr>
+        <p:cNvPr id="1" name=""/>
+        <p:cNvGrpSpPr/>
+        <p:nvPr/>
+      </p:nvGrpSpPr>
+      <p:grpSpPr>
+        <a:xfrm>
+          <a:off x="0" y="0"/>
+          <a:ext cx="0" cy="0"/>
+          <a:chOff x="0" y="0"/>
+          <a:chExt cx="0" cy="0"/>
+        </a:xfrm>
+      </p:grpSpPr>
+      <p:sp>
+        <p:nvSpPr>
+          <p:cNvPr id="2" name="Slide Image Placeholder 1"/>
+          <p:cNvSpPr>
+            <a:spLocks noGrp="1" noRot="1" noChangeAspect="1"/>
+          </p:cNvSpPr>
+          <p:nvPr>
+            <p:ph type="sldImg"/>
+          </p:nvPr>
+        </p:nvSpPr>
+        <p:spPr/>
+      </p:sp>
+      <p:sp>
+        <p:nvSpPr>
+          <p:cNvPr id="3" name="Notes Placeholder 2"/>
+          <p:cNvSpPr>
+            <a:spLocks noGrp="1"/>
+          </p:cNvSpPr>
+          <p:nvPr>
+            <p:ph type="body" idx="1"/>
+          </p:nvPr>
+        </p:nvSpPr>
+        <p:spPr/>
+        <p:txBody>
+          <a:bodyPr/>
+          <a:lstStyle/>
+          <a:p>
+            <a:r>
+              <a:rPr lang="en-US" dirty="0"/>
+              <a:t/>
+            </a:r>
+            <a:endParaRPr lang="en-US" dirty="0"/>
+          </a:p>
+        </p:txBody>
+      </p:sp>
+      <p:sp>
+        <p:nvSpPr>
+          <p:cNvPr id="4" name="Slide Number Placeholder 3"/>
+          <p:cNvSpPr>
+            <a:spLocks noGrp="1"/>
+          </p:cNvSpPr>
+          <p:nvPr>
+            <p:ph type="sldNum" sz="quarter" idx="10"/>
+          </p:nvPr>
+        </p:nvSpPr>
+        <p:spPr/>
+        <p:txBody>
+          <a:bodyPr/>
+          <a:lstStyle/>
+          <a:p>
+            <a:fld id="{F7021451-1387-4CA6-816F-3879F97B5CBC}" type="slidenum">
+              <a:rPr lang="en-US"/>
+              <a:t>10</a:t>
+            </a:fld>
+            <a:endParaRPr lang="en-US"/>
+          </a:p>
+        </p:txBody>
+      </p:sp>
+    </p:spTree>
+    <p:extLst>
+      <p:ext uri="{BB962C8B-B14F-4D97-AF65-F5344CB8AC3E}">
+        <p14:creationId xmlns:p14="http://schemas.microsoft.com/office/powerpoint/2010/main" val="1024086991"/>
+      </p:ext>
+    </p:extLst>
+  </p:cSld>
+  <p:clrMapOvr>
+    <a:masterClrMapping/>
+  </p:clrMapOvr>
+</p:notes>
+</file>
+
+<file path=ppt/notesSlides/notesSlide11.xml><?xml version="1.0" encoding="utf-8"?>
+<p:notes xmlns:a="http://schemas.openxmlformats.org/drawingml/2006/main" xmlns:r="http://schemas.openxmlformats.org/officeDocument/2006/relationships" xmlns:p="http://schemas.openxmlformats.org/presentationml/2006/main">
+  <p:cSld>
+    <p:spTree>
+      <p:nvGrpSpPr>
+        <p:cNvPr id="1" name=""/>
+        <p:cNvGrpSpPr/>
+        <p:nvPr/>
+      </p:nvGrpSpPr>
+      <p:grpSpPr>
+        <a:xfrm>
+          <a:off x="0" y="0"/>
+          <a:ext cx="0" cy="0"/>
+          <a:chOff x="0" y="0"/>
+          <a:chExt cx="0" cy="0"/>
+        </a:xfrm>
+      </p:grpSpPr>
+      <p:sp>
+        <p:nvSpPr>
+          <p:cNvPr id="2" name="Slide Image Placeholder 1"/>
+          <p:cNvSpPr>
+            <a:spLocks noGrp="1" noRot="1" noChangeAspect="1"/>
+          </p:cNvSpPr>
+          <p:nvPr>
+            <p:ph type="sldImg"/>
+          </p:nvPr>
+        </p:nvSpPr>
+        <p:spPr/>
+      </p:sp>
+      <p:sp>
+        <p:nvSpPr>
+          <p:cNvPr id="3" name="Notes Placeholder 2"/>
+          <p:cNvSpPr>
+            <a:spLocks noGrp="1"/>
+          </p:cNvSpPr>
+          <p:nvPr>
+            <p:ph type="body" idx="1"/>
+          </p:nvPr>
+        </p:nvSpPr>
+        <p:spPr/>
+        <p:txBody>
+          <a:bodyPr/>
+          <a:lstStyle/>
+          <a:p>
+            <a:r>
+              <a:rPr lang="en-US" dirty="0"/>
+              <a:t/>
+            </a:r>
+            <a:endParaRPr lang="en-US" dirty="0"/>
+          </a:p>
+        </p:txBody>
+      </p:sp>
+      <p:sp>
+        <p:nvSpPr>
+          <p:cNvPr id="4" name="Slide Number Placeholder 3"/>
+          <p:cNvSpPr>
+            <a:spLocks noGrp="1"/>
+          </p:cNvSpPr>
+          <p:nvPr>
+            <p:ph type="sldNum" sz="quarter" idx="10"/>
+          </p:nvPr>
+        </p:nvSpPr>
+        <p:spPr/>
+        <p:txBody>
+          <a:bodyPr/>
+          <a:lstStyle/>
+          <a:p>
+            <a:fld id="{F7021451-1387-4CA6-816F-3879F97B5CBC}" type="slidenum">
+              <a:rPr lang="en-US"/>
+              <a:t>11</a:t>
+            </a:fld>
+            <a:endParaRPr lang="en-US"/>
+          </a:p>
+        </p:txBody>
+      </p:sp>
+    </p:spTree>
+    <p:extLst>
+      <p:ext uri="{BB962C8B-B14F-4D97-AF65-F5344CB8AC3E}">
+        <p14:creationId xmlns:p14="http://schemas.microsoft.com/office/powerpoint/2010/main" val="1024086991"/>
+      </p:ext>
+    </p:extLst>
+  </p:cSld>
+  <p:clrMapOvr>
+    <a:masterClrMapping/>
+  </p:clrMapOvr>
+</p:notes>
+</file>
+
+<file path=ppt/notesSlides/notesSlide12.xml><?xml version="1.0" encoding="utf-8"?>
+<p:notes xmlns:a="http://schemas.openxmlformats.org/drawingml/2006/main" xmlns:r="http://schemas.openxmlformats.org/officeDocument/2006/relationships" xmlns:p="http://schemas.openxmlformats.org/presentationml/2006/main">
+  <p:cSld>
+    <p:spTree>
+      <p:nvGrpSpPr>
+        <p:cNvPr id="1" name=""/>
+        <p:cNvGrpSpPr/>
+        <p:nvPr/>
+      </p:nvGrpSpPr>
+      <p:grpSpPr>
+        <a:xfrm>
+          <a:off x="0" y="0"/>
+          <a:ext cx="0" cy="0"/>
+          <a:chOff x="0" y="0"/>
+          <a:chExt cx="0" cy="0"/>
+        </a:xfrm>
+      </p:grpSpPr>
+      <p:sp>
+        <p:nvSpPr>
+          <p:cNvPr id="2" name="Slide Image Placeholder 1"/>
+          <p:cNvSpPr>
+            <a:spLocks noGrp="1" noRot="1" noChangeAspect="1"/>
+          </p:cNvSpPr>
+          <p:nvPr>
+            <p:ph type="sldImg"/>
+          </p:nvPr>
+        </p:nvSpPr>
+        <p:spPr/>
+      </p:sp>
+      <p:sp>
+        <p:nvSpPr>
+          <p:cNvPr id="3" name="Notes Placeholder 2"/>
+          <p:cNvSpPr>
+            <a:spLocks noGrp="1"/>
+          </p:cNvSpPr>
+          <p:nvPr>
+            <p:ph type="body" idx="1"/>
+          </p:nvPr>
+        </p:nvSpPr>
+        <p:spPr/>
+        <p:txBody>
+          <a:bodyPr/>
+          <a:lstStyle/>
+          <a:p>
+            <a:r>
+              <a:rPr lang="en-US" dirty="0"/>
+              <a:t/>
+            </a:r>
+            <a:endParaRPr lang="en-US" dirty="0"/>
+          </a:p>
+        </p:txBody>
+      </p:sp>
+      <p:sp>
+        <p:nvSpPr>
+          <p:cNvPr id="4" name="Slide Number Placeholder 3"/>
+          <p:cNvSpPr>
+            <a:spLocks noGrp="1"/>
+          </p:cNvSpPr>
+          <p:nvPr>
+            <p:ph type="sldNum" sz="quarter" idx="10"/>
+          </p:nvPr>
+        </p:nvSpPr>
+        <p:spPr/>
+        <p:txBody>
+          <a:bodyPr/>
+          <a:lstStyle/>
+          <a:p>
+            <a:fld id="{F7021451-1387-4CA6-816F-3879F97B5CBC}" type="slidenum">
+              <a:rPr lang="en-US"/>
+              <a:t>12</a:t>
+            </a:fld>
+            <a:endParaRPr lang="en-US"/>
+          </a:p>
+        </p:txBody>
+      </p:sp>
+    </p:spTree>
+    <p:extLst>
+      <p:ext uri="{BB962C8B-B14F-4D97-AF65-F5344CB8AC3E}">
+        <p14:creationId xmlns:p14="http://schemas.microsoft.com/office/powerpoint/2010/main" val="1024086991"/>
+      </p:ext>
+    </p:extLst>
+  </p:cSld>
+  <p:clrMapOvr>
+    <a:masterClrMapping/>
+  </p:clrMapOvr>
+</p:notes>
+</file>
+
+<file path=ppt/notesSlides/notesSlide13.xml><?xml version="1.0" encoding="utf-8"?>
+<p:notes xmlns:a="http://schemas.openxmlformats.org/drawingml/2006/main" xmlns:r="http://schemas.openxmlformats.org/officeDocument/2006/relationships" xmlns:p="http://schemas.openxmlformats.org/presentationml/2006/main">
+  <p:cSld>
+    <p:spTree>
+      <p:nvGrpSpPr>
+        <p:cNvPr id="1" name=""/>
+        <p:cNvGrpSpPr/>
+        <p:nvPr/>
+      </p:nvGrpSpPr>
+      <p:grpSpPr>
+        <a:xfrm>
+          <a:off x="0" y="0"/>
+          <a:ext cx="0" cy="0"/>
+          <a:chOff x="0" y="0"/>
+          <a:chExt cx="0" cy="0"/>
+        </a:xfrm>
+      </p:grpSpPr>
+      <p:sp>
+        <p:nvSpPr>
+          <p:cNvPr id="2" name="Slide Image Placeholder 1"/>
+          <p:cNvSpPr>
+            <a:spLocks noGrp="1" noRot="1" noChangeAspect="1"/>
+          </p:cNvSpPr>
+          <p:nvPr>
+            <p:ph type="sldImg"/>
+          </p:nvPr>
+        </p:nvSpPr>
+        <p:spPr/>
+      </p:sp>
+      <p:sp>
+        <p:nvSpPr>
+          <p:cNvPr id="3" name="Notes Placeholder 2"/>
+          <p:cNvSpPr>
+            <a:spLocks noGrp="1"/>
+          </p:cNvSpPr>
+          <p:nvPr>
+            <p:ph type="body" idx="1"/>
+          </p:nvPr>
+        </p:nvSpPr>
+        <p:spPr/>
+        <p:txBody>
+          <a:bodyPr/>
+          <a:lstStyle/>
+          <a:p>
+            <a:r>
+              <a:rPr lang="en-US" dirty="0"/>
+              <a:t/>
+            </a:r>
+            <a:endParaRPr lang="en-US" dirty="0"/>
+          </a:p>
+        </p:txBody>
+      </p:sp>
+      <p:sp>
+        <p:nvSpPr>
+          <p:cNvPr id="4" name="Slide Number Placeholder 3"/>
+          <p:cNvSpPr>
+            <a:spLocks noGrp="1"/>
+          </p:cNvSpPr>
+          <p:nvPr>
+            <p:ph type="sldNum" sz="quarter" idx="10"/>
+          </p:nvPr>
+        </p:nvSpPr>
+        <p:spPr/>
+        <p:txBody>
+          <a:bodyPr/>
+          <a:lstStyle/>
+          <a:p>
+            <a:fld id="{F7021451-1387-4CA6-816F-3879F97B5CBC}" type="slidenum">
+              <a:rPr lang="en-US"/>
+              <a:t>13</a:t>
+            </a:fld>
+            <a:endParaRPr lang="en-US"/>
+          </a:p>
+        </p:txBody>
+      </p:sp>
+    </p:spTree>
+    <p:extLst>
+      <p:ext uri="{BB962C8B-B14F-4D97-AF65-F5344CB8AC3E}">
+        <p14:creationId xmlns:p14="http://schemas.microsoft.com/office/powerpoint/2010/main" val="1024086991"/>
+      </p:ext>
+    </p:extLst>
+  </p:cSld>
+  <p:clrMapOvr>
+    <a:masterClrMapping/>
+  </p:clrMapOvr>
+</p:notes>
+</file>
+
+<file path=ppt/notesSlides/notesSlide14.xml><?xml version="1.0" encoding="utf-8"?>
+<p:notes xmlns:a="http://schemas.openxmlformats.org/drawingml/2006/main" xmlns:r="http://schemas.openxmlformats.org/officeDocument/2006/relationships" xmlns:p="http://schemas.openxmlformats.org/presentationml/2006/main">
+  <p:cSld>
+    <p:spTree>
+      <p:nvGrpSpPr>
+        <p:cNvPr id="1" name=""/>
+        <p:cNvGrpSpPr/>
+        <p:nvPr/>
+      </p:nvGrpSpPr>
+      <p:grpSpPr>
+        <a:xfrm>
+          <a:off x="0" y="0"/>
+          <a:ext cx="0" cy="0"/>
+          <a:chOff x="0" y="0"/>
+          <a:chExt cx="0" cy="0"/>
+        </a:xfrm>
+      </p:grpSpPr>
+      <p:sp>
+        <p:nvSpPr>
+          <p:cNvPr id="2" name="Slide Image Placeholder 1"/>
+          <p:cNvSpPr>
+            <a:spLocks noGrp="1" noRot="1" noChangeAspect="1"/>
+          </p:cNvSpPr>
+          <p:nvPr>
+            <p:ph type="sldImg"/>
+          </p:nvPr>
+        </p:nvSpPr>
+        <p:spPr/>
+      </p:sp>
+      <p:sp>
+        <p:nvSpPr>
+          <p:cNvPr id="3" name="Notes Placeholder 2"/>
+          <p:cNvSpPr>
+            <a:spLocks noGrp="1"/>
+          </p:cNvSpPr>
+          <p:nvPr>
+            <p:ph type="body" idx="1"/>
+          </p:nvPr>
+        </p:nvSpPr>
+        <p:spPr/>
+        <p:txBody>
+          <a:bodyPr/>
+          <a:lstStyle/>
+          <a:p>
+            <a:r>
+              <a:rPr lang="en-US" dirty="0"/>
+              <a:t/>
+            </a:r>
+            <a:endParaRPr lang="en-US" dirty="0"/>
+          </a:p>
+        </p:txBody>
+      </p:sp>
+      <p:sp>
+        <p:nvSpPr>
+          <p:cNvPr id="4" name="Slide Number Placeholder 3"/>
+          <p:cNvSpPr>
+            <a:spLocks noGrp="1"/>
+          </p:cNvSpPr>
+          <p:nvPr>
+            <p:ph type="sldNum" sz="quarter" idx="10"/>
+          </p:nvPr>
+        </p:nvSpPr>
+        <p:spPr/>
+        <p:txBody>
+          <a:bodyPr/>
+          <a:lstStyle/>
+          <a:p>
+            <a:fld id="{F7021451-1387-4CA6-816F-3879F97B5CBC}" type="slidenum">
+              <a:rPr lang="en-US"/>
+              <a:t>14</a:t>
+            </a:fld>
+            <a:endParaRPr lang="en-US"/>
+          </a:p>
+        </p:txBody>
+      </p:sp>
+    </p:spTree>
+    <p:extLst>
+      <p:ext uri="{BB962C8B-B14F-4D97-AF65-F5344CB8AC3E}">
+        <p14:creationId xmlns:p14="http://schemas.microsoft.com/office/powerpoint/2010/main" val="1024086991"/>
+      </p:ext>
+    </p:extLst>
+  </p:cSld>
+  <p:clrMapOvr>
+    <a:masterClrMapping/>
+  </p:clrMapOvr>
+</p:notes>
+</file>
+
+<file path=ppt/notesSlides/notesSlide15.xml><?xml version="1.0" encoding="utf-8"?>
+<p:notes xmlns:a="http://schemas.openxmlformats.org/drawingml/2006/main" xmlns:r="http://schemas.openxmlformats.org/officeDocument/2006/relationships" xmlns:p="http://schemas.openxmlformats.org/presentationml/2006/main">
+  <p:cSld>
+    <p:spTree>
+      <p:nvGrpSpPr>
+        <p:cNvPr id="1" name=""/>
+        <p:cNvGrpSpPr/>
+        <p:nvPr/>
+      </p:nvGrpSpPr>
+      <p:grpSpPr>
+        <a:xfrm>
+          <a:off x="0" y="0"/>
+          <a:ext cx="0" cy="0"/>
+          <a:chOff x="0" y="0"/>
+          <a:chExt cx="0" cy="0"/>
+        </a:xfrm>
+      </p:grpSpPr>
+      <p:sp>
+        <p:nvSpPr>
+          <p:cNvPr id="2" name="Slide Image Placeholder 1"/>
+          <p:cNvSpPr>
+            <a:spLocks noGrp="1" noRot="1" noChangeAspect="1"/>
+          </p:cNvSpPr>
+          <p:nvPr>
+            <p:ph type="sldImg"/>
+          </p:nvPr>
+        </p:nvSpPr>
+        <p:spPr/>
+      </p:sp>
+      <p:sp>
+        <p:nvSpPr>
+          <p:cNvPr id="3" name="Notes Placeholder 2"/>
+          <p:cNvSpPr>
+            <a:spLocks noGrp="1"/>
+          </p:cNvSpPr>
+          <p:nvPr>
+            <p:ph type="body" idx="1"/>
+          </p:nvPr>
+        </p:nvSpPr>
+        <p:spPr/>
+        <p:txBody>
+          <a:bodyPr/>
+          <a:lstStyle/>
+          <a:p>
+            <a:r>
+              <a:rPr lang="en-US" dirty="0"/>
+              <a:t/>
+            </a:r>
+            <a:endParaRPr lang="en-US" dirty="0"/>
+          </a:p>
+        </p:txBody>
+      </p:sp>
+      <p:sp>
+        <p:nvSpPr>
+          <p:cNvPr id="4" name="Slide Number Placeholder 3"/>
+          <p:cNvSpPr>
+            <a:spLocks noGrp="1"/>
+          </p:cNvSpPr>
+          <p:nvPr>
+            <p:ph type="sldNum" sz="quarter" idx="10"/>
+          </p:nvPr>
+        </p:nvSpPr>
+        <p:spPr/>
+        <p:txBody>
+          <a:bodyPr/>
+          <a:lstStyle/>
+          <a:p>
+            <a:fld id="{F7021451-1387-4CA6-816F-3879F97B5CBC}" type="slidenum">
+              <a:rPr lang="en-US"/>
+              <a:t>15</a:t>
+            </a:fld>
+            <a:endParaRPr lang="en-US"/>
+          </a:p>
+        </p:txBody>
+      </p:sp>
+    </p:spTree>
+    <p:extLst>
+      <p:ext uri="{BB962C8B-B14F-4D97-AF65-F5344CB8AC3E}">
+        <p14:creationId xmlns:p14="http://schemas.microsoft.com/office/powerpoint/2010/main" val="1024086991"/>
+      </p:ext>
+    </p:extLst>
+  </p:cSld>
+  <p:clrMapOvr>
+    <a:masterClrMapping/>
+  </p:clrMapOvr>
+</p:notes>
+</file>
+
+<file path=ppt/notesSlides/notesSlide16.xml><?xml version="1.0" encoding="utf-8"?>
+<p:notes xmlns:a="http://schemas.openxmlformats.org/drawingml/2006/main" xmlns:r="http://schemas.openxmlformats.org/officeDocument/2006/relationships" xmlns:p="http://schemas.openxmlformats.org/presentationml/2006/main">
+  <p:cSld>
+    <p:spTree>
+      <p:nvGrpSpPr>
+        <p:cNvPr id="1" name=""/>
+        <p:cNvGrpSpPr/>
+        <p:nvPr/>
+      </p:nvGrpSpPr>
+      <p:grpSpPr>
+        <a:xfrm>
+          <a:off x="0" y="0"/>
+          <a:ext cx="0" cy="0"/>
+          <a:chOff x="0" y="0"/>
+          <a:chExt cx="0" cy="0"/>
+        </a:xfrm>
+      </p:grpSpPr>
+      <p:sp>
+        <p:nvSpPr>
+          <p:cNvPr id="2" name="Slide Image Placeholder 1"/>
+          <p:cNvSpPr>
+            <a:spLocks noGrp="1" noRot="1" noChangeAspect="1"/>
+          </p:cNvSpPr>
+          <p:nvPr>
+            <p:ph type="sldImg"/>
+          </p:nvPr>
+        </p:nvSpPr>
+        <p:spPr/>
+      </p:sp>
+      <p:sp>
+        <p:nvSpPr>
+          <p:cNvPr id="3" name="Notes Placeholder 2"/>
+          <p:cNvSpPr>
+            <a:spLocks noGrp="1"/>
+          </p:cNvSpPr>
+          <p:nvPr>
+            <p:ph type="body" idx="1"/>
+          </p:nvPr>
+        </p:nvSpPr>
+        <p:spPr/>
+        <p:txBody>
+          <a:bodyPr/>
+          <a:lstStyle/>
+          <a:p>
+            <a:r>
+              <a:rPr lang="en-US" dirty="0"/>
+              <a:t/>
+            </a:r>
+            <a:endParaRPr lang="en-US" dirty="0"/>
+          </a:p>
+        </p:txBody>
+      </p:sp>
+      <p:sp>
+        <p:nvSpPr>
+          <p:cNvPr id="4" name="Slide Number Placeholder 3"/>
+          <p:cNvSpPr>
+            <a:spLocks noGrp="1"/>
+          </p:cNvSpPr>
+          <p:nvPr>
+            <p:ph type="sldNum" sz="quarter" idx="10"/>
+          </p:nvPr>
+        </p:nvSpPr>
+        <p:spPr/>
+        <p:txBody>
+          <a:bodyPr/>
+          <a:lstStyle/>
+          <a:p>
+            <a:fld id="{F7021451-1387-4CA6-816F-3879F97B5CBC}" type="slidenum">
+              <a:rPr lang="en-US"/>
+              <a:t>16</a:t>
+            </a:fld>
+            <a:endParaRPr lang="en-US"/>
+          </a:p>
+        </p:txBody>
+      </p:sp>
+    </p:spTree>
+    <p:extLst>
+      <p:ext uri="{BB962C8B-B14F-4D97-AF65-F5344CB8AC3E}">
+        <p14:creationId xmlns:p14="http://schemas.microsoft.com/office/powerpoint/2010/main" val="1024086991"/>
+      </p:ext>
+    </p:extLst>
+  </p:cSld>
+  <p:clrMapOvr>
+    <a:masterClrMapping/>
+  </p:clrMapOvr>
+</p:notes>
+</file>
+
+<file path=ppt/notesSlides/notesSlide17.xml><?xml version="1.0" encoding="utf-8"?>
+<p:notes xmlns:a="http://schemas.openxmlformats.org/drawingml/2006/main" xmlns:r="http://schemas.openxmlformats.org/officeDocument/2006/relationships" xmlns:p="http://schemas.openxmlformats.org/presentationml/2006/main">
+  <p:cSld>
+    <p:spTree>
+      <p:nvGrpSpPr>
+        <p:cNvPr id="1" name=""/>
+        <p:cNvGrpSpPr/>
+        <p:nvPr/>
+      </p:nvGrpSpPr>
+      <p:grpSpPr>
+        <a:xfrm>
+          <a:off x="0" y="0"/>
+          <a:ext cx="0" cy="0"/>
+          <a:chOff x="0" y="0"/>
+          <a:chExt cx="0" cy="0"/>
+        </a:xfrm>
+      </p:grpSpPr>
+      <p:sp>
+        <p:nvSpPr>
+          <p:cNvPr id="2" name="Slide Image Placeholder 1"/>
+          <p:cNvSpPr>
+            <a:spLocks noGrp="1" noRot="1" noChangeAspect="1"/>
+          </p:cNvSpPr>
+          <p:nvPr>
+            <p:ph type="sldImg"/>
+          </p:nvPr>
+        </p:nvSpPr>
+        <p:spPr/>
+      </p:sp>
+      <p:sp>
+        <p:nvSpPr>
+          <p:cNvPr id="3" name="Notes Placeholder 2"/>
+          <p:cNvSpPr>
+            <a:spLocks noGrp="1"/>
+          </p:cNvSpPr>
+          <p:nvPr>
+            <p:ph type="body" idx="1"/>
+          </p:nvPr>
+        </p:nvSpPr>
+        <p:spPr/>
+        <p:txBody>
+          <a:bodyPr/>
+          <a:lstStyle/>
+          <a:p>
+            <a:r>
+              <a:rPr lang="en-US" dirty="0"/>
+              <a:t/>
+            </a:r>
+            <a:endParaRPr lang="en-US" dirty="0"/>
+          </a:p>
+        </p:txBody>
+      </p:sp>
+      <p:sp>
+        <p:nvSpPr>
+          <p:cNvPr id="4" name="Slide Number Placeholder 3"/>
+          <p:cNvSpPr>
+            <a:spLocks noGrp="1"/>
+          </p:cNvSpPr>
+          <p:nvPr>
+            <p:ph type="sldNum" sz="quarter" idx="10"/>
+          </p:nvPr>
+        </p:nvSpPr>
+        <p:spPr/>
+        <p:txBody>
+          <a:bodyPr/>
+          <a:lstStyle/>
+          <a:p>
+            <a:fld id="{F7021451-1387-4CA6-816F-3879F97B5CBC}" type="slidenum">
+              <a:rPr lang="en-US"/>
+              <a:t>17</a:t>
+            </a:fld>
+            <a:endParaRPr lang="en-US"/>
+          </a:p>
+        </p:txBody>
+      </p:sp>
+    </p:spTree>
+    <p:extLst>
+      <p:ext uri="{BB962C8B-B14F-4D97-AF65-F5344CB8AC3E}">
+        <p14:creationId xmlns:p14="http://schemas.microsoft.com/office/powerpoint/2010/main" val="1024086991"/>
+      </p:ext>
+    </p:extLst>
+  </p:cSld>
+  <p:clrMapOvr>
+    <a:masterClrMapping/>
+  </p:clrMapOvr>
+</p:notes>
+</file>
+
+<file path=ppt/notesSlides/notesSlide18.xml><?xml version="1.0" encoding="utf-8"?>
+<p:notes xmlns:a="http://schemas.openxmlformats.org/drawingml/2006/main" xmlns:r="http://schemas.openxmlformats.org/officeDocument/2006/relationships" xmlns:p="http://schemas.openxmlformats.org/presentationml/2006/main">
+  <p:cSld>
+    <p:spTree>
+      <p:nvGrpSpPr>
+        <p:cNvPr id="1" name=""/>
+        <p:cNvGrpSpPr/>
+        <p:nvPr/>
+      </p:nvGrpSpPr>
+      <p:grpSpPr>
+        <a:xfrm>
+          <a:off x="0" y="0"/>
+          <a:ext cx="0" cy="0"/>
+          <a:chOff x="0" y="0"/>
+          <a:chExt cx="0" cy="0"/>
+        </a:xfrm>
+      </p:grpSpPr>
+      <p:sp>
+        <p:nvSpPr>
+          <p:cNvPr id="2" name="Slide Image Placeholder 1"/>
+          <p:cNvSpPr>
+            <a:spLocks noGrp="1" noRot="1" noChangeAspect="1"/>
+          </p:cNvSpPr>
+          <p:nvPr>
+            <p:ph type="sldImg"/>
+          </p:nvPr>
+        </p:nvSpPr>
+        <p:spPr/>
+      </p:sp>
+      <p:sp>
+        <p:nvSpPr>
+          <p:cNvPr id="3" name="Notes Placeholder 2"/>
+          <p:cNvSpPr>
+            <a:spLocks noGrp="1"/>
+          </p:cNvSpPr>
+          <p:nvPr>
+            <p:ph type="body" idx="1"/>
+          </p:nvPr>
+        </p:nvSpPr>
+        <p:spPr/>
+        <p:txBody>
+          <a:bodyPr/>
+          <a:lstStyle/>
+          <a:p>
+            <a:r>
+              <a:rPr lang="en-US" dirty="0"/>
+              <a:t/>
+            </a:r>
+            <a:endParaRPr lang="en-US" dirty="0"/>
+          </a:p>
+        </p:txBody>
+      </p:sp>
+      <p:sp>
+        <p:nvSpPr>
+          <p:cNvPr id="4" name="Slide Number Placeholder 3"/>
+          <p:cNvSpPr>
+            <a:spLocks noGrp="1"/>
+          </p:cNvSpPr>
+          <p:nvPr>
+            <p:ph type="sldNum" sz="quarter" idx="10"/>
+          </p:nvPr>
+        </p:nvSpPr>
+        <p:spPr/>
+        <p:txBody>
+          <a:bodyPr/>
+          <a:lstStyle/>
+          <a:p>
+            <a:fld id="{F7021451-1387-4CA6-816F-3879F97B5CBC}" type="slidenum">
+              <a:rPr lang="en-US"/>
+              <a:t>18</a:t>
+            </a:fld>
+            <a:endParaRPr lang="en-US"/>
+          </a:p>
+        </p:txBody>
+      </p:sp>
+    </p:spTree>
+    <p:extLst>
+      <p:ext uri="{BB962C8B-B14F-4D97-AF65-F5344CB8AC3E}">
+        <p14:creationId xmlns:p14="http://schemas.microsoft.com/office/powerpoint/2010/main" val="1024086991"/>
+      </p:ext>
+    </p:extLst>
+  </p:cSld>
+  <p:clrMapOvr>
+    <a:masterClrMapping/>
+  </p:clrMapOvr>
+</p:notes>
+</file>
+
+<file path=ppt/notesSlides/notesSlide19.xml><?xml version="1.0" encoding="utf-8"?>
+<p:notes xmlns:a="http://schemas.openxmlformats.org/drawingml/2006/main" xmlns:r="http://schemas.openxmlformats.org/officeDocument/2006/relationships" xmlns:p="http://schemas.openxmlformats.org/presentationml/2006/main">
+  <p:cSld>
+    <p:spTree>
+      <p:nvGrpSpPr>
+        <p:cNvPr id="1" name=""/>
+        <p:cNvGrpSpPr/>
+        <p:nvPr/>
+      </p:nvGrpSpPr>
+      <p:grpSpPr>
+        <a:xfrm>
+          <a:off x="0" y="0"/>
+          <a:ext cx="0" cy="0"/>
+          <a:chOff x="0" y="0"/>
+          <a:chExt cx="0" cy="0"/>
+        </a:xfrm>
+      </p:grpSpPr>
+      <p:sp>
+        <p:nvSpPr>
+          <p:cNvPr id="2" name="Slide Image Placeholder 1"/>
+          <p:cNvSpPr>
+            <a:spLocks noGrp="1" noRot="1" noChangeAspect="1"/>
+          </p:cNvSpPr>
+          <p:nvPr>
+            <p:ph type="sldImg"/>
+          </p:nvPr>
+        </p:nvSpPr>
+        <p:spPr/>
+      </p:sp>
+      <p:sp>
+        <p:nvSpPr>
+          <p:cNvPr id="3" name="Notes Placeholder 2"/>
+          <p:cNvSpPr>
+            <a:spLocks noGrp="1"/>
+          </p:cNvSpPr>
+          <p:nvPr>
+            <p:ph type="body" idx="1"/>
+          </p:nvPr>
+        </p:nvSpPr>
+        <p:spPr/>
+        <p:txBody>
+          <a:bodyPr/>
+          <a:lstStyle/>
+          <a:p>
+            <a:r>
+              <a:rPr lang="en-US" dirty="0"/>
+              <a:t/>
+            </a:r>
+            <a:endParaRPr lang="en-US" dirty="0"/>
+          </a:p>
+        </p:txBody>
+      </p:sp>
+      <p:sp>
+        <p:nvSpPr>
+          <p:cNvPr id="4" name="Slide Number Placeholder 3"/>
+          <p:cNvSpPr>
+            <a:spLocks noGrp="1"/>
+          </p:cNvSpPr>
+          <p:nvPr>
+            <p:ph type="sldNum" sz="quarter" idx="10"/>
+          </p:nvPr>
+        </p:nvSpPr>
+        <p:spPr/>
+        <p:txBody>
+          <a:bodyPr/>
+          <a:lstStyle/>
+          <a:p>
+            <a:fld id="{F7021451-1387-4CA6-816F-3879F97B5CBC}" type="slidenum">
+              <a:rPr lang="en-US"/>
+              <a:t>19</a:t>
+            </a:fld>
+            <a:endParaRPr lang="en-US"/>
+          </a:p>
+        </p:txBody>
+      </p:sp>
+    </p:spTree>
+    <p:extLst>
+      <p:ext uri="{BB962C8B-B14F-4D97-AF65-F5344CB8AC3E}">
+        <p14:creationId xmlns:p14="http://schemas.microsoft.com/office/powerpoint/2010/main" val="1024086991"/>
+      </p:ext>
+    </p:extLst>
+  </p:cSld>
+  <p:clrMapOvr>
+    <a:masterClrMapping/>
+  </p:clrMapOvr>
+</p:notes>
+</file>
+
 <file path=ppt/notesSlides/notesSlide2.xml><?xml version="1.0" encoding="utf-8"?>
 <p:notes xmlns:a="http://schemas.openxmlformats.org/drawingml/2006/main" xmlns:r="http://schemas.openxmlformats.org/officeDocument/2006/relationships" xmlns:p="http://schemas.openxmlformats.org/presentationml/2006/main">
   <p:cSld>
@@ -1988,6 +2878,3501 @@
 </p:sld>
 </file>
 
+<file path=ppt/slides/slide10.xml><?xml version="1.0" encoding="utf-8"?>
+<p:sld xmlns:a="http://schemas.openxmlformats.org/drawingml/2006/main" xmlns:r="http://schemas.openxmlformats.org/officeDocument/2006/relationships" xmlns:p="http://schemas.openxmlformats.org/presentationml/2006/main">
+  <p:cSld name="Slide 10">
+    <p:bg>
+      <p:bgPr>
+        <a:solidFill>
+          <a:srgbClr val="FFFFFF"/>
+        </a:solidFill>
+      </p:bgPr>
+    </p:bg>
+    <p:spTree>
+      <p:nvGrpSpPr>
+        <p:cNvPr id="1" name=""/>
+        <p:cNvGrpSpPr/>
+        <p:nvPr/>
+      </p:nvGrpSpPr>
+      <p:grpSpPr>
+        <a:xfrm>
+          <a:off x="0" y="0"/>
+          <a:ext cx="0" cy="0"/>
+          <a:chOff x="0" y="0"/>
+          <a:chExt cx="0" cy="0"/>
+        </a:xfrm>
+      </p:grpSpPr>
+      <p:sp>
+        <p:nvSpPr>
+          <p:cNvPr id="2" name="Shape 0"/>
+          <p:cNvSpPr/>
+          <p:nvPr/>
+        </p:nvSpPr>
+        <p:spPr>
+          <a:xfrm>
+            <a:off x="0" y="0"/>
+            <a:ext cx="4864608" cy="54864"/>
+          </a:xfrm>
+          <a:prstGeom prst="rect">
+            <a:avLst/>
+          </a:prstGeom>
+          <a:solidFill>
+            <a:srgbClr val="F97316"/>
+          </a:solidFill>
+          <a:ln/>
+        </p:spPr>
+      </p:sp>
+      <p:sp>
+        <p:nvSpPr>
+          <p:cNvPr id="3" name="Shape 1"/>
+          <p:cNvSpPr/>
+          <p:nvPr/>
+        </p:nvSpPr>
+        <p:spPr>
+          <a:xfrm>
+            <a:off x="4864608" y="0"/>
+            <a:ext cx="4256532" cy="54864"/>
+          </a:xfrm>
+          <a:prstGeom prst="rect">
+            <a:avLst/>
+          </a:prstGeom>
+          <a:solidFill>
+            <a:srgbClr val="F43F5E"/>
+          </a:solidFill>
+          <a:ln/>
+        </p:spPr>
+      </p:sp>
+      <p:sp>
+        <p:nvSpPr>
+          <p:cNvPr id="4" name="Shape 2"/>
+          <p:cNvSpPr/>
+          <p:nvPr/>
+        </p:nvSpPr>
+        <p:spPr>
+          <a:xfrm>
+            <a:off x="9121140" y="0"/>
+            <a:ext cx="3040380" cy="54864"/>
+          </a:xfrm>
+          <a:prstGeom prst="rect">
+            <a:avLst/>
+          </a:prstGeom>
+          <a:solidFill>
+            <a:srgbClr val="8B5CF6"/>
+          </a:solidFill>
+          <a:ln/>
+        </p:spPr>
+      </p:sp>
+      <p:sp>
+        <p:nvSpPr>
+          <p:cNvPr id="5" name="Text 3"/>
+          <p:cNvSpPr/>
+          <p:nvPr/>
+        </p:nvSpPr>
+        <p:spPr>
+          <a:xfrm>
+            <a:off x="731520" y="320040"/>
+            <a:ext cx="10698480" cy="640080"/>
+          </a:xfrm>
+          <a:prstGeom prst="rect">
+            <a:avLst/>
+          </a:prstGeom>
+          <a:noFill/>
+          <a:ln/>
+        </p:spPr>
+        <p:txBody>
+          <a:bodyPr wrap="square" lIns="0" tIns="0" rIns="0" bIns="0" rtlCol="0" anchor="ctr"/>
+          <a:lstStyle/>
+          <a:p>
+            <a:pPr indent="0" marL="0">
+              <a:buNone/>
+            </a:pPr>
+            <a:r>
+              <a:rPr lang="en-US" sz="2800" b="1" dirty="0">
+                <a:solidFill>
+                  <a:srgbClr val="0F172A"/>
+                </a:solidFill>
+                <a:latin typeface="Calibri" pitchFamily="34" charset="0"/>
+                <a:ea typeface="Calibri" pitchFamily="34" charset="-122"/>
+                <a:cs typeface="Calibri" pitchFamily="34" charset="-120"/>
+              </a:rPr>
+              <a:t>Meta Ads — Top Ads</a:t>
+            </a:r>
+            <a:endParaRPr lang="en-US" sz="2800" dirty="0"/>
+          </a:p>
+        </p:txBody>
+      </p:sp>
+      <p:sp>
+        <p:nvSpPr>
+          <p:cNvPr id="6" name="Shape 4"/>
+          <p:cNvSpPr/>
+          <p:nvPr/>
+        </p:nvSpPr>
+        <p:spPr>
+          <a:xfrm>
+            <a:off x="731520" y="1280160"/>
+            <a:ext cx="10698480" cy="3657600"/>
+          </a:xfrm>
+          <a:prstGeom prst="rect">
+            <a:avLst/>
+          </a:prstGeom>
+          <a:solidFill>
+            <a:srgbClr val="FFFFFF"/>
+          </a:solidFill>
+          <a:ln/>
+          <a:effectLst>
+            <a:outerShdw sx="100000" sy="100000" kx="0" ky="0" algn="bl" rotWithShape="0" blurRad="63500" dist="25400" dir="8100000">
+              <a:srgbClr val="000000">
+                <a:alpha val="6000"/>
+              </a:srgbClr>
+            </a:outerShdw>
+          </a:effectLst>
+        </p:spPr>
+      </p:sp>
+      <p:sp>
+        <p:nvSpPr>
+          <p:cNvPr id="7" name="Text 5"/>
+          <p:cNvSpPr/>
+          <p:nvPr/>
+        </p:nvSpPr>
+        <p:spPr>
+          <a:xfrm>
+            <a:off x="731520" y="1280160"/>
+            <a:ext cx="10698480" cy="3657600"/>
+          </a:xfrm>
+          <a:prstGeom prst="rect">
+            <a:avLst/>
+          </a:prstGeom>
+          <a:noFill/>
+          <a:ln/>
+        </p:spPr>
+        <p:txBody>
+          <a:bodyPr wrap="square" rtlCol="0" anchor="ctr"/>
+          <a:lstStyle/>
+          <a:p>
+            <a:pPr algn="ctr" indent="0" marL="0">
+              <a:buNone/>
+            </a:pPr>
+            <a:r>
+              <a:rPr lang="en-US" sz="1000" dirty="0">
+                <a:solidFill>
+                  <a:srgbClr val="94A3B8"/>
+                </a:solidFill>
+                <a:latin typeface="Calibri" pitchFamily="34" charset="0"/>
+                <a:ea typeface="Calibri" pitchFamily="34" charset="-122"/>
+                <a:cs typeface="Calibri" pitchFamily="34" charset="-120"/>
+              </a:rPr>
+              <a:t>{{chart_campaigns}}</a:t>
+            </a:r>
+            <a:endParaRPr lang="en-US" sz="1000" dirty="0"/>
+          </a:p>
+        </p:txBody>
+      </p:sp>
+      <p:sp>
+        <p:nvSpPr>
+          <p:cNvPr id="8" name="Text 6"/>
+          <p:cNvSpPr/>
+          <p:nvPr/>
+        </p:nvSpPr>
+        <p:spPr>
+          <a:xfrm>
+            <a:off x="731520" y="5212080"/>
+            <a:ext cx="10698480" cy="1097280"/>
+          </a:xfrm>
+          <a:prstGeom prst="rect">
+            <a:avLst/>
+          </a:prstGeom>
+          <a:noFill/>
+          <a:ln/>
+        </p:spPr>
+        <p:txBody>
+          <a:bodyPr wrap="square" rtlCol="0" anchor="t"/>
+          <a:lstStyle/>
+          <a:p>
+            <a:pPr indent="0" marL="0">
+              <a:lnSpc>
+                <a:spcPct val="135000"/>
+              </a:lnSpc>
+              <a:buNone/>
+            </a:pPr>
+            <a:r>
+              <a:rPr lang="en-US" sz="1200" dirty="0">
+                <a:solidFill>
+                  <a:srgbClr val="334155"/>
+                </a:solidFill>
+                <a:latin typeface="Calibri" pitchFamily="34" charset="0"/>
+                <a:ea typeface="Calibri" pitchFamily="34" charset="-122"/>
+                <a:cs typeface="Calibri" pitchFamily="34" charset="-120"/>
+              </a:rPr>
+              <a:t>{{ads_narrative}}</a:t>
+            </a:r>
+            <a:endParaRPr lang="en-US" sz="1200" dirty="0"/>
+          </a:p>
+        </p:txBody>
+      </p:sp>
+      <p:sp>
+        <p:nvSpPr>
+          <p:cNvPr id="9" name="Text 7"/>
+          <p:cNvSpPr/>
+          <p:nvPr/>
+        </p:nvSpPr>
+        <p:spPr>
+          <a:xfrm>
+            <a:off x="731520" y="6510528"/>
+            <a:ext cx="10698480" cy="256032"/>
+          </a:xfrm>
+          <a:prstGeom prst="rect">
+            <a:avLst/>
+          </a:prstGeom>
+          <a:noFill/>
+          <a:ln/>
+        </p:spPr>
+        <p:txBody>
+          <a:bodyPr wrap="square" rtlCol="0" anchor="ctr"/>
+          <a:lstStyle/>
+          <a:p>
+            <a:pPr indent="0" marL="0">
+              <a:buNone/>
+            </a:pPr>
+            <a:r>
+              <a:rPr lang="en-US" sz="800" dirty="0">
+                <a:solidFill>
+                  <a:srgbClr val="94A3B8"/>
+                </a:solidFill>
+                <a:latin typeface="Calibri" pitchFamily="34" charset="0"/>
+                <a:ea typeface="Calibri" pitchFamily="34" charset="-122"/>
+                <a:cs typeface="Calibri" pitchFamily="34" charset="-120"/>
+              </a:rPr>
+              <a:t>{{agency_name}}  •  Confidential  •  Page 10</a:t>
+            </a:r>
+            <a:endParaRPr lang="en-US" sz="800" dirty="0"/>
+          </a:p>
+        </p:txBody>
+      </p:sp>
+    </p:spTree>
+  </p:cSld>
+  <p:clrMapOvr>
+    <a:masterClrMapping/>
+  </p:clrMapOvr>
+</p:sld>
+</file>
+
+<file path=ppt/slides/slide11.xml><?xml version="1.0" encoding="utf-8"?>
+<p:sld xmlns:a="http://schemas.openxmlformats.org/drawingml/2006/main" xmlns:r="http://schemas.openxmlformats.org/officeDocument/2006/relationships" xmlns:p="http://schemas.openxmlformats.org/presentationml/2006/main">
+  <p:cSld name="Slide 11">
+    <p:bg>
+      <p:bgPr>
+        <a:solidFill>
+          <a:srgbClr val="FFFFFF"/>
+        </a:solidFill>
+      </p:bgPr>
+    </p:bg>
+    <p:spTree>
+      <p:nvGrpSpPr>
+        <p:cNvPr id="1" name=""/>
+        <p:cNvGrpSpPr/>
+        <p:nvPr/>
+      </p:nvGrpSpPr>
+      <p:grpSpPr>
+        <a:xfrm>
+          <a:off x="0" y="0"/>
+          <a:ext cx="0" cy="0"/>
+          <a:chOff x="0" y="0"/>
+          <a:chExt cx="0" cy="0"/>
+        </a:xfrm>
+      </p:grpSpPr>
+      <p:sp>
+        <p:nvSpPr>
+          <p:cNvPr id="2" name="Shape 0"/>
+          <p:cNvSpPr/>
+          <p:nvPr/>
+        </p:nvSpPr>
+        <p:spPr>
+          <a:xfrm>
+            <a:off x="0" y="0"/>
+            <a:ext cx="4864608" cy="54864"/>
+          </a:xfrm>
+          <a:prstGeom prst="rect">
+            <a:avLst/>
+          </a:prstGeom>
+          <a:solidFill>
+            <a:srgbClr val="F97316"/>
+          </a:solidFill>
+          <a:ln/>
+        </p:spPr>
+      </p:sp>
+      <p:sp>
+        <p:nvSpPr>
+          <p:cNvPr id="3" name="Shape 1"/>
+          <p:cNvSpPr/>
+          <p:nvPr/>
+        </p:nvSpPr>
+        <p:spPr>
+          <a:xfrm>
+            <a:off x="4864608" y="0"/>
+            <a:ext cx="4256532" cy="54864"/>
+          </a:xfrm>
+          <a:prstGeom prst="rect">
+            <a:avLst/>
+          </a:prstGeom>
+          <a:solidFill>
+            <a:srgbClr val="F43F5E"/>
+          </a:solidFill>
+          <a:ln/>
+        </p:spPr>
+      </p:sp>
+      <p:sp>
+        <p:nvSpPr>
+          <p:cNvPr id="4" name="Shape 2"/>
+          <p:cNvSpPr/>
+          <p:nvPr/>
+        </p:nvSpPr>
+        <p:spPr>
+          <a:xfrm>
+            <a:off x="9121140" y="0"/>
+            <a:ext cx="3040380" cy="54864"/>
+          </a:xfrm>
+          <a:prstGeom prst="rect">
+            <a:avLst/>
+          </a:prstGeom>
+          <a:solidFill>
+            <a:srgbClr val="8B5CF6"/>
+          </a:solidFill>
+          <a:ln/>
+        </p:spPr>
+      </p:sp>
+      <p:sp>
+        <p:nvSpPr>
+          <p:cNvPr id="5" name="Text 3"/>
+          <p:cNvSpPr/>
+          <p:nvPr/>
+        </p:nvSpPr>
+        <p:spPr>
+          <a:xfrm>
+            <a:off x="731520" y="320040"/>
+            <a:ext cx="10698480" cy="640080"/>
+          </a:xfrm>
+          <a:prstGeom prst="rect">
+            <a:avLst/>
+          </a:prstGeom>
+          <a:noFill/>
+          <a:ln/>
+        </p:spPr>
+        <p:txBody>
+          <a:bodyPr wrap="square" lIns="0" tIns="0" rIns="0" bIns="0" rtlCol="0" anchor="ctr"/>
+          <a:lstStyle/>
+          <a:p>
+            <a:pPr indent="0" marL="0">
+              <a:buNone/>
+            </a:pPr>
+            <a:r>
+              <a:rPr lang="en-US" sz="2800" b="1" dirty="0">
+                <a:solidFill>
+                  <a:srgbClr val="0F172A"/>
+                </a:solidFill>
+                <a:latin typeface="Calibri" pitchFamily="34" charset="0"/>
+                <a:ea typeface="Calibri" pitchFamily="34" charset="-122"/>
+                <a:cs typeface="Calibri" pitchFamily="34" charset="-120"/>
+              </a:rPr>
+              <a:t>Search Advertising — Google Ads</a:t>
+            </a:r>
+            <a:endParaRPr lang="en-US" sz="2800" dirty="0"/>
+          </a:p>
+        </p:txBody>
+      </p:sp>
+      <p:sp>
+        <p:nvSpPr>
+          <p:cNvPr id="6" name="Shape 4"/>
+          <p:cNvSpPr/>
+          <p:nvPr/>
+        </p:nvSpPr>
+        <p:spPr>
+          <a:xfrm>
+            <a:off x="731520" y="1280160"/>
+            <a:ext cx="5120640" cy="2743200"/>
+          </a:xfrm>
+          <a:prstGeom prst="rect">
+            <a:avLst/>
+          </a:prstGeom>
+          <a:solidFill>
+            <a:srgbClr val="FFFFFF"/>
+          </a:solidFill>
+          <a:ln/>
+          <a:effectLst>
+            <a:outerShdw sx="100000" sy="100000" kx="0" ky="0" algn="bl" rotWithShape="0" blurRad="63500" dist="25400" dir="8100000">
+              <a:srgbClr val="000000">
+                <a:alpha val="6000"/>
+              </a:srgbClr>
+            </a:outerShdw>
+          </a:effectLst>
+        </p:spPr>
+      </p:sp>
+      <p:sp>
+        <p:nvSpPr>
+          <p:cNvPr id="7" name="Text 5"/>
+          <p:cNvSpPr/>
+          <p:nvPr/>
+        </p:nvSpPr>
+        <p:spPr>
+          <a:xfrm>
+            <a:off x="731520" y="1280160"/>
+            <a:ext cx="5120640" cy="2743200"/>
+          </a:xfrm>
+          <a:prstGeom prst="rect">
+            <a:avLst/>
+          </a:prstGeom>
+          <a:noFill/>
+          <a:ln/>
+        </p:spPr>
+        <p:txBody>
+          <a:bodyPr wrap="square" rtlCol="0" anchor="ctr"/>
+          <a:lstStyle/>
+          <a:p>
+            <a:pPr algn="ctr" indent="0" marL="0">
+              <a:buNone/>
+            </a:pPr>
+            <a:r>
+              <a:rPr lang="en-US" sz="1000" dirty="0">
+                <a:solidFill>
+                  <a:srgbClr val="94A3B8"/>
+                </a:solidFill>
+                <a:latin typeface="Calibri" pitchFamily="34" charset="0"/>
+                <a:ea typeface="Calibri" pitchFamily="34" charset="-122"/>
+                <a:cs typeface="Calibri" pitchFamily="34" charset="-120"/>
+              </a:rPr>
+              <a:t>{{chart_gads_spend}}</a:t>
+            </a:r>
+            <a:endParaRPr lang="en-US" sz="1000" dirty="0"/>
+          </a:p>
+        </p:txBody>
+      </p:sp>
+      <p:sp>
+        <p:nvSpPr>
+          <p:cNvPr id="8" name="Shape 6"/>
+          <p:cNvSpPr/>
+          <p:nvPr/>
+        </p:nvSpPr>
+        <p:spPr>
+          <a:xfrm>
+            <a:off x="6217920" y="1280160"/>
+            <a:ext cx="5212080" cy="2743200"/>
+          </a:xfrm>
+          <a:prstGeom prst="rect">
+            <a:avLst/>
+          </a:prstGeom>
+          <a:solidFill>
+            <a:srgbClr val="FFFFFF"/>
+          </a:solidFill>
+          <a:ln/>
+          <a:effectLst>
+            <a:outerShdw sx="100000" sy="100000" kx="0" ky="0" algn="bl" rotWithShape="0" blurRad="63500" dist="25400" dir="8100000">
+              <a:srgbClr val="000000">
+                <a:alpha val="6000"/>
+              </a:srgbClr>
+            </a:outerShdw>
+          </a:effectLst>
+        </p:spPr>
+      </p:sp>
+      <p:sp>
+        <p:nvSpPr>
+          <p:cNvPr id="9" name="Text 7"/>
+          <p:cNvSpPr/>
+          <p:nvPr/>
+        </p:nvSpPr>
+        <p:spPr>
+          <a:xfrm>
+            <a:off x="6217920" y="1280160"/>
+            <a:ext cx="5212080" cy="2743200"/>
+          </a:xfrm>
+          <a:prstGeom prst="rect">
+            <a:avLst/>
+          </a:prstGeom>
+          <a:noFill/>
+          <a:ln/>
+        </p:spPr>
+        <p:txBody>
+          <a:bodyPr wrap="square" rtlCol="0" anchor="ctr"/>
+          <a:lstStyle/>
+          <a:p>
+            <a:pPr algn="ctr" indent="0" marL="0">
+              <a:buNone/>
+            </a:pPr>
+            <a:r>
+              <a:rPr lang="en-US" sz="1000" dirty="0">
+                <a:solidFill>
+                  <a:srgbClr val="94A3B8"/>
+                </a:solidFill>
+                <a:latin typeface="Calibri" pitchFamily="34" charset="0"/>
+                <a:ea typeface="Calibri" pitchFamily="34" charset="-122"/>
+                <a:cs typeface="Calibri" pitchFamily="34" charset="-120"/>
+              </a:rPr>
+              <a:t>{{chart_gads_campaigns}}</a:t>
+            </a:r>
+            <a:endParaRPr lang="en-US" sz="1000" dirty="0"/>
+          </a:p>
+        </p:txBody>
+      </p:sp>
+      <p:sp>
+        <p:nvSpPr>
+          <p:cNvPr id="10" name="Text 8"/>
+          <p:cNvSpPr/>
+          <p:nvPr/>
+        </p:nvSpPr>
+        <p:spPr>
+          <a:xfrm>
+            <a:off x="731520" y="4297680"/>
+            <a:ext cx="10698480" cy="1920240"/>
+          </a:xfrm>
+          <a:prstGeom prst="rect">
+            <a:avLst/>
+          </a:prstGeom>
+          <a:noFill/>
+          <a:ln/>
+        </p:spPr>
+        <p:txBody>
+          <a:bodyPr wrap="square" rtlCol="0" anchor="t"/>
+          <a:lstStyle/>
+          <a:p>
+            <a:pPr indent="0" marL="0">
+              <a:lnSpc>
+                <a:spcPct val="135000"/>
+              </a:lnSpc>
+              <a:buNone/>
+            </a:pPr>
+            <a:r>
+              <a:rPr lang="en-US" sz="1200" dirty="0">
+                <a:solidFill>
+                  <a:srgbClr val="334155"/>
+                </a:solidFill>
+                <a:latin typeface="Calibri" pitchFamily="34" charset="0"/>
+                <a:ea typeface="Calibri" pitchFamily="34" charset="-122"/>
+                <a:cs typeface="Calibri" pitchFamily="34" charset="-120"/>
+              </a:rPr>
+              <a:t>{{google_ads_narrative}}</a:t>
+            </a:r>
+            <a:endParaRPr lang="en-US" sz="1200" dirty="0"/>
+          </a:p>
+        </p:txBody>
+      </p:sp>
+      <p:sp>
+        <p:nvSpPr>
+          <p:cNvPr id="11" name="Text 9"/>
+          <p:cNvSpPr/>
+          <p:nvPr/>
+        </p:nvSpPr>
+        <p:spPr>
+          <a:xfrm>
+            <a:off x="731520" y="6510528"/>
+            <a:ext cx="10698480" cy="256032"/>
+          </a:xfrm>
+          <a:prstGeom prst="rect">
+            <a:avLst/>
+          </a:prstGeom>
+          <a:noFill/>
+          <a:ln/>
+        </p:spPr>
+        <p:txBody>
+          <a:bodyPr wrap="square" rtlCol="0" anchor="ctr"/>
+          <a:lstStyle/>
+          <a:p>
+            <a:pPr indent="0" marL="0">
+              <a:buNone/>
+            </a:pPr>
+            <a:r>
+              <a:rPr lang="en-US" sz="800" dirty="0">
+                <a:solidFill>
+                  <a:srgbClr val="94A3B8"/>
+                </a:solidFill>
+                <a:latin typeface="Calibri" pitchFamily="34" charset="0"/>
+                <a:ea typeface="Calibri" pitchFamily="34" charset="-122"/>
+                <a:cs typeface="Calibri" pitchFamily="34" charset="-120"/>
+              </a:rPr>
+              <a:t>{{agency_name}}  •  Confidential  •  Page 11</a:t>
+            </a:r>
+            <a:endParaRPr lang="en-US" sz="800" dirty="0"/>
+          </a:p>
+        </p:txBody>
+      </p:sp>
+    </p:spTree>
+  </p:cSld>
+  <p:clrMapOvr>
+    <a:masterClrMapping/>
+  </p:clrMapOvr>
+</p:sld>
+</file>
+
+<file path=ppt/slides/slide12.xml><?xml version="1.0" encoding="utf-8"?>
+<p:sld xmlns:a="http://schemas.openxmlformats.org/drawingml/2006/main" xmlns:r="http://schemas.openxmlformats.org/officeDocument/2006/relationships" xmlns:p="http://schemas.openxmlformats.org/presentationml/2006/main">
+  <p:cSld name="Slide 12">
+    <p:bg>
+      <p:bgPr>
+        <a:solidFill>
+          <a:srgbClr val="FFFFFF"/>
+        </a:solidFill>
+      </p:bgPr>
+    </p:bg>
+    <p:spTree>
+      <p:nvGrpSpPr>
+        <p:cNvPr id="1" name=""/>
+        <p:cNvGrpSpPr/>
+        <p:nvPr/>
+      </p:nvGrpSpPr>
+      <p:grpSpPr>
+        <a:xfrm>
+          <a:off x="0" y="0"/>
+          <a:ext cx="0" cy="0"/>
+          <a:chOff x="0" y="0"/>
+          <a:chExt cx="0" cy="0"/>
+        </a:xfrm>
+      </p:grpSpPr>
+      <p:sp>
+        <p:nvSpPr>
+          <p:cNvPr id="2" name="Shape 0"/>
+          <p:cNvSpPr/>
+          <p:nvPr/>
+        </p:nvSpPr>
+        <p:spPr>
+          <a:xfrm>
+            <a:off x="0" y="0"/>
+            <a:ext cx="4864608" cy="54864"/>
+          </a:xfrm>
+          <a:prstGeom prst="rect">
+            <a:avLst/>
+          </a:prstGeom>
+          <a:solidFill>
+            <a:srgbClr val="F97316"/>
+          </a:solidFill>
+          <a:ln/>
+        </p:spPr>
+      </p:sp>
+      <p:sp>
+        <p:nvSpPr>
+          <p:cNvPr id="3" name="Shape 1"/>
+          <p:cNvSpPr/>
+          <p:nvPr/>
+        </p:nvSpPr>
+        <p:spPr>
+          <a:xfrm>
+            <a:off x="4864608" y="0"/>
+            <a:ext cx="4256532" cy="54864"/>
+          </a:xfrm>
+          <a:prstGeom prst="rect">
+            <a:avLst/>
+          </a:prstGeom>
+          <a:solidFill>
+            <a:srgbClr val="F43F5E"/>
+          </a:solidFill>
+          <a:ln/>
+        </p:spPr>
+      </p:sp>
+      <p:sp>
+        <p:nvSpPr>
+          <p:cNvPr id="4" name="Shape 2"/>
+          <p:cNvSpPr/>
+          <p:nvPr/>
+        </p:nvSpPr>
+        <p:spPr>
+          <a:xfrm>
+            <a:off x="9121140" y="0"/>
+            <a:ext cx="3040380" cy="54864"/>
+          </a:xfrm>
+          <a:prstGeom prst="rect">
+            <a:avLst/>
+          </a:prstGeom>
+          <a:solidFill>
+            <a:srgbClr val="8B5CF6"/>
+          </a:solidFill>
+          <a:ln/>
+        </p:spPr>
+      </p:sp>
+      <p:sp>
+        <p:nvSpPr>
+          <p:cNvPr id="5" name="Text 3"/>
+          <p:cNvSpPr/>
+          <p:nvPr/>
+        </p:nvSpPr>
+        <p:spPr>
+          <a:xfrm>
+            <a:off x="731520" y="320040"/>
+            <a:ext cx="10698480" cy="640080"/>
+          </a:xfrm>
+          <a:prstGeom prst="rect">
+            <a:avLst/>
+          </a:prstGeom>
+          <a:noFill/>
+          <a:ln/>
+        </p:spPr>
+        <p:txBody>
+          <a:bodyPr wrap="square" lIns="0" tIns="0" rIns="0" bIns="0" rtlCol="0" anchor="ctr"/>
+          <a:lstStyle/>
+          <a:p>
+            <a:pPr indent="0" marL="0">
+              <a:buNone/>
+            </a:pPr>
+            <a:r>
+              <a:rPr lang="en-US" sz="2800" b="1" dirty="0">
+                <a:solidFill>
+                  <a:srgbClr val="0F172A"/>
+                </a:solidFill>
+                <a:latin typeface="Calibri" pitchFamily="34" charset="0"/>
+                <a:ea typeface="Calibri" pitchFamily="34" charset="-122"/>
+                <a:cs typeface="Calibri" pitchFamily="34" charset="-120"/>
+              </a:rPr>
+              <a:t>Search Terms Performance</a:t>
+            </a:r>
+            <a:endParaRPr lang="en-US" sz="2800" dirty="0"/>
+          </a:p>
+        </p:txBody>
+      </p:sp>
+      <p:sp>
+        <p:nvSpPr>
+          <p:cNvPr id="6" name="Shape 4"/>
+          <p:cNvSpPr/>
+          <p:nvPr/>
+        </p:nvSpPr>
+        <p:spPr>
+          <a:xfrm>
+            <a:off x="731520" y="1280160"/>
+            <a:ext cx="10698480" cy="3657600"/>
+          </a:xfrm>
+          <a:prstGeom prst="rect">
+            <a:avLst/>
+          </a:prstGeom>
+          <a:solidFill>
+            <a:srgbClr val="FFFFFF"/>
+          </a:solidFill>
+          <a:ln/>
+          <a:effectLst>
+            <a:outerShdw sx="100000" sy="100000" kx="0" ky="0" algn="bl" rotWithShape="0" blurRad="63500" dist="25400" dir="8100000">
+              <a:srgbClr val="000000">
+                <a:alpha val="6000"/>
+              </a:srgbClr>
+            </a:outerShdw>
+          </a:effectLst>
+        </p:spPr>
+      </p:sp>
+      <p:sp>
+        <p:nvSpPr>
+          <p:cNvPr id="7" name="Text 5"/>
+          <p:cNvSpPr/>
+          <p:nvPr/>
+        </p:nvSpPr>
+        <p:spPr>
+          <a:xfrm>
+            <a:off x="731520" y="1280160"/>
+            <a:ext cx="10698480" cy="3657600"/>
+          </a:xfrm>
+          <a:prstGeom prst="rect">
+            <a:avLst/>
+          </a:prstGeom>
+          <a:noFill/>
+          <a:ln/>
+        </p:spPr>
+        <p:txBody>
+          <a:bodyPr wrap="square" rtlCol="0" anchor="ctr"/>
+          <a:lstStyle/>
+          <a:p>
+            <a:pPr algn="ctr" indent="0" marL="0">
+              <a:buNone/>
+            </a:pPr>
+            <a:r>
+              <a:rPr lang="en-US" sz="1000" dirty="0">
+                <a:solidFill>
+                  <a:srgbClr val="94A3B8"/>
+                </a:solidFill>
+                <a:latin typeface="Calibri" pitchFamily="34" charset="0"/>
+                <a:ea typeface="Calibri" pitchFamily="34" charset="-122"/>
+                <a:cs typeface="Calibri" pitchFamily="34" charset="-120"/>
+              </a:rPr>
+              <a:t>{{chart_search_terms}}</a:t>
+            </a:r>
+            <a:endParaRPr lang="en-US" sz="1000" dirty="0"/>
+          </a:p>
+        </p:txBody>
+      </p:sp>
+      <p:sp>
+        <p:nvSpPr>
+          <p:cNvPr id="8" name="Text 6"/>
+          <p:cNvSpPr/>
+          <p:nvPr/>
+        </p:nvSpPr>
+        <p:spPr>
+          <a:xfrm>
+            <a:off x="731520" y="5212080"/>
+            <a:ext cx="10698480" cy="1097280"/>
+          </a:xfrm>
+          <a:prstGeom prst="rect">
+            <a:avLst/>
+          </a:prstGeom>
+          <a:noFill/>
+          <a:ln/>
+        </p:spPr>
+        <p:txBody>
+          <a:bodyPr wrap="square" rtlCol="0" anchor="t"/>
+          <a:lstStyle/>
+          <a:p>
+            <a:pPr indent="0" marL="0">
+              <a:lnSpc>
+                <a:spcPct val="135000"/>
+              </a:lnSpc>
+              <a:buNone/>
+            </a:pPr>
+            <a:r>
+              <a:rPr lang="en-US" sz="1200" dirty="0">
+                <a:solidFill>
+                  <a:srgbClr val="334155"/>
+                </a:solidFill>
+                <a:latin typeface="Calibri" pitchFamily="34" charset="0"/>
+                <a:ea typeface="Calibri" pitchFamily="34" charset="-122"/>
+                <a:cs typeface="Calibri" pitchFamily="34" charset="-120"/>
+              </a:rPr>
+              <a:t>{{google_ads_narrative}}</a:t>
+            </a:r>
+            <a:endParaRPr lang="en-US" sz="1200" dirty="0"/>
+          </a:p>
+        </p:txBody>
+      </p:sp>
+      <p:sp>
+        <p:nvSpPr>
+          <p:cNvPr id="9" name="Text 7"/>
+          <p:cNvSpPr/>
+          <p:nvPr/>
+        </p:nvSpPr>
+        <p:spPr>
+          <a:xfrm>
+            <a:off x="731520" y="6510528"/>
+            <a:ext cx="10698480" cy="256032"/>
+          </a:xfrm>
+          <a:prstGeom prst="rect">
+            <a:avLst/>
+          </a:prstGeom>
+          <a:noFill/>
+          <a:ln/>
+        </p:spPr>
+        <p:txBody>
+          <a:bodyPr wrap="square" rtlCol="0" anchor="ctr"/>
+          <a:lstStyle/>
+          <a:p>
+            <a:pPr indent="0" marL="0">
+              <a:buNone/>
+            </a:pPr>
+            <a:r>
+              <a:rPr lang="en-US" sz="800" dirty="0">
+                <a:solidFill>
+                  <a:srgbClr val="94A3B8"/>
+                </a:solidFill>
+                <a:latin typeface="Calibri" pitchFamily="34" charset="0"/>
+                <a:ea typeface="Calibri" pitchFamily="34" charset="-122"/>
+                <a:cs typeface="Calibri" pitchFamily="34" charset="-120"/>
+              </a:rPr>
+              <a:t>{{agency_name}}  •  Confidential  •  Page 12</a:t>
+            </a:r>
+            <a:endParaRPr lang="en-US" sz="800" dirty="0"/>
+          </a:p>
+        </p:txBody>
+      </p:sp>
+    </p:spTree>
+  </p:cSld>
+  <p:clrMapOvr>
+    <a:masterClrMapping/>
+  </p:clrMapOvr>
+</p:sld>
+</file>
+
+<file path=ppt/slides/slide13.xml><?xml version="1.0" encoding="utf-8"?>
+<p:sld xmlns:a="http://schemas.openxmlformats.org/drawingml/2006/main" xmlns:r="http://schemas.openxmlformats.org/officeDocument/2006/relationships" xmlns:p="http://schemas.openxmlformats.org/presentationml/2006/main">
+  <p:cSld name="Slide 13">
+    <p:bg>
+      <p:bgPr>
+        <a:solidFill>
+          <a:srgbClr val="FFFFFF"/>
+        </a:solidFill>
+      </p:bgPr>
+    </p:bg>
+    <p:spTree>
+      <p:nvGrpSpPr>
+        <p:cNvPr id="1" name=""/>
+        <p:cNvGrpSpPr/>
+        <p:nvPr/>
+      </p:nvGrpSpPr>
+      <p:grpSpPr>
+        <a:xfrm>
+          <a:off x="0" y="0"/>
+          <a:ext cx="0" cy="0"/>
+          <a:chOff x="0" y="0"/>
+          <a:chExt cx="0" cy="0"/>
+        </a:xfrm>
+      </p:grpSpPr>
+      <p:sp>
+        <p:nvSpPr>
+          <p:cNvPr id="2" name="Shape 0"/>
+          <p:cNvSpPr/>
+          <p:nvPr/>
+        </p:nvSpPr>
+        <p:spPr>
+          <a:xfrm>
+            <a:off x="0" y="0"/>
+            <a:ext cx="4864608" cy="54864"/>
+          </a:xfrm>
+          <a:prstGeom prst="rect">
+            <a:avLst/>
+          </a:prstGeom>
+          <a:solidFill>
+            <a:srgbClr val="F97316"/>
+          </a:solidFill>
+          <a:ln/>
+        </p:spPr>
+      </p:sp>
+      <p:sp>
+        <p:nvSpPr>
+          <p:cNvPr id="3" name="Shape 1"/>
+          <p:cNvSpPr/>
+          <p:nvPr/>
+        </p:nvSpPr>
+        <p:spPr>
+          <a:xfrm>
+            <a:off x="4864608" y="0"/>
+            <a:ext cx="4256532" cy="54864"/>
+          </a:xfrm>
+          <a:prstGeom prst="rect">
+            <a:avLst/>
+          </a:prstGeom>
+          <a:solidFill>
+            <a:srgbClr val="F43F5E"/>
+          </a:solidFill>
+          <a:ln/>
+        </p:spPr>
+      </p:sp>
+      <p:sp>
+        <p:nvSpPr>
+          <p:cNvPr id="4" name="Shape 2"/>
+          <p:cNvSpPr/>
+          <p:nvPr/>
+        </p:nvSpPr>
+        <p:spPr>
+          <a:xfrm>
+            <a:off x="9121140" y="0"/>
+            <a:ext cx="3040380" cy="54864"/>
+          </a:xfrm>
+          <a:prstGeom prst="rect">
+            <a:avLst/>
+          </a:prstGeom>
+          <a:solidFill>
+            <a:srgbClr val="8B5CF6"/>
+          </a:solidFill>
+          <a:ln/>
+        </p:spPr>
+      </p:sp>
+      <p:sp>
+        <p:nvSpPr>
+          <p:cNvPr id="5" name="Text 3"/>
+          <p:cNvSpPr/>
+          <p:nvPr/>
+        </p:nvSpPr>
+        <p:spPr>
+          <a:xfrm>
+            <a:off x="731520" y="320040"/>
+            <a:ext cx="10698480" cy="640080"/>
+          </a:xfrm>
+          <a:prstGeom prst="rect">
+            <a:avLst/>
+          </a:prstGeom>
+          <a:noFill/>
+          <a:ln/>
+        </p:spPr>
+        <p:txBody>
+          <a:bodyPr wrap="square" lIns="0" tIns="0" rIns="0" bIns="0" rtlCol="0" anchor="ctr"/>
+          <a:lstStyle/>
+          <a:p>
+            <a:pPr indent="0" marL="0">
+              <a:buNone/>
+            </a:pPr>
+            <a:r>
+              <a:rPr lang="en-US" sz="2800" b="1" dirty="0">
+                <a:solidFill>
+                  <a:srgbClr val="0F172A"/>
+                </a:solidFill>
+                <a:latin typeface="Calibri" pitchFamily="34" charset="0"/>
+                <a:ea typeface="Calibri" pitchFamily="34" charset="-122"/>
+                <a:cs typeface="Calibri" pitchFamily="34" charset="-120"/>
+              </a:rPr>
+              <a:t>Organic Search — SEO</a:t>
+            </a:r>
+            <a:endParaRPr lang="en-US" sz="2800" dirty="0"/>
+          </a:p>
+        </p:txBody>
+      </p:sp>
+      <p:sp>
+        <p:nvSpPr>
+          <p:cNvPr id="6" name="Shape 4"/>
+          <p:cNvSpPr/>
+          <p:nvPr/>
+        </p:nvSpPr>
+        <p:spPr>
+          <a:xfrm>
+            <a:off x="731520" y="1280160"/>
+            <a:ext cx="5120640" cy="2743200"/>
+          </a:xfrm>
+          <a:prstGeom prst="rect">
+            <a:avLst/>
+          </a:prstGeom>
+          <a:solidFill>
+            <a:srgbClr val="FFFFFF"/>
+          </a:solidFill>
+          <a:ln/>
+          <a:effectLst>
+            <a:outerShdw sx="100000" sy="100000" kx="0" ky="0" algn="bl" rotWithShape="0" blurRad="63500" dist="25400" dir="8100000">
+              <a:srgbClr val="000000">
+                <a:alpha val="6000"/>
+              </a:srgbClr>
+            </a:outerShdw>
+          </a:effectLst>
+        </p:spPr>
+      </p:sp>
+      <p:sp>
+        <p:nvSpPr>
+          <p:cNvPr id="7" name="Text 5"/>
+          <p:cNvSpPr/>
+          <p:nvPr/>
+        </p:nvSpPr>
+        <p:spPr>
+          <a:xfrm>
+            <a:off x="731520" y="1280160"/>
+            <a:ext cx="5120640" cy="2743200"/>
+          </a:xfrm>
+          <a:prstGeom prst="rect">
+            <a:avLst/>
+          </a:prstGeom>
+          <a:noFill/>
+          <a:ln/>
+        </p:spPr>
+        <p:txBody>
+          <a:bodyPr wrap="square" rtlCol="0" anchor="ctr"/>
+          <a:lstStyle/>
+          <a:p>
+            <a:pPr algn="ctr" indent="0" marL="0">
+              <a:buNone/>
+            </a:pPr>
+            <a:r>
+              <a:rPr lang="en-US" sz="1000" dirty="0">
+                <a:solidFill>
+                  <a:srgbClr val="94A3B8"/>
+                </a:solidFill>
+                <a:latin typeface="Calibri" pitchFamily="34" charset="0"/>
+                <a:ea typeface="Calibri" pitchFamily="34" charset="-122"/>
+                <a:cs typeface="Calibri" pitchFamily="34" charset="-120"/>
+              </a:rPr>
+              <a:t>{{chart_seo_trend}}</a:t>
+            </a:r>
+            <a:endParaRPr lang="en-US" sz="1000" dirty="0"/>
+          </a:p>
+        </p:txBody>
+      </p:sp>
+      <p:sp>
+        <p:nvSpPr>
+          <p:cNvPr id="8" name="Shape 6"/>
+          <p:cNvSpPr/>
+          <p:nvPr/>
+        </p:nvSpPr>
+        <p:spPr>
+          <a:xfrm>
+            <a:off x="6217920" y="1280160"/>
+            <a:ext cx="5212080" cy="2743200"/>
+          </a:xfrm>
+          <a:prstGeom prst="rect">
+            <a:avLst/>
+          </a:prstGeom>
+          <a:solidFill>
+            <a:srgbClr val="FFFFFF"/>
+          </a:solidFill>
+          <a:ln/>
+          <a:effectLst>
+            <a:outerShdw sx="100000" sy="100000" kx="0" ky="0" algn="bl" rotWithShape="0" blurRad="63500" dist="25400" dir="8100000">
+              <a:srgbClr val="000000">
+                <a:alpha val="6000"/>
+              </a:srgbClr>
+            </a:outerShdw>
+          </a:effectLst>
+        </p:spPr>
+      </p:sp>
+      <p:sp>
+        <p:nvSpPr>
+          <p:cNvPr id="9" name="Text 7"/>
+          <p:cNvSpPr/>
+          <p:nvPr/>
+        </p:nvSpPr>
+        <p:spPr>
+          <a:xfrm>
+            <a:off x="6217920" y="1280160"/>
+            <a:ext cx="5212080" cy="2743200"/>
+          </a:xfrm>
+          <a:prstGeom prst="rect">
+            <a:avLst/>
+          </a:prstGeom>
+          <a:noFill/>
+          <a:ln/>
+        </p:spPr>
+        <p:txBody>
+          <a:bodyPr wrap="square" rtlCol="0" anchor="ctr"/>
+          <a:lstStyle/>
+          <a:p>
+            <a:pPr algn="ctr" indent="0" marL="0">
+              <a:buNone/>
+            </a:pPr>
+            <a:r>
+              <a:rPr lang="en-US" sz="1000" dirty="0">
+                <a:solidFill>
+                  <a:srgbClr val="94A3B8"/>
+                </a:solidFill>
+                <a:latin typeface="Calibri" pitchFamily="34" charset="0"/>
+                <a:ea typeface="Calibri" pitchFamily="34" charset="-122"/>
+                <a:cs typeface="Calibri" pitchFamily="34" charset="-120"/>
+              </a:rPr>
+              <a:t>{{chart_top_queries}}</a:t>
+            </a:r>
+            <a:endParaRPr lang="en-US" sz="1000" dirty="0"/>
+          </a:p>
+        </p:txBody>
+      </p:sp>
+      <p:sp>
+        <p:nvSpPr>
+          <p:cNvPr id="10" name="Text 8"/>
+          <p:cNvSpPr/>
+          <p:nvPr/>
+        </p:nvSpPr>
+        <p:spPr>
+          <a:xfrm>
+            <a:off x="731520" y="4297680"/>
+            <a:ext cx="10698480" cy="1920240"/>
+          </a:xfrm>
+          <a:prstGeom prst="rect">
+            <a:avLst/>
+          </a:prstGeom>
+          <a:noFill/>
+          <a:ln/>
+        </p:spPr>
+        <p:txBody>
+          <a:bodyPr wrap="square" rtlCol="0" anchor="t"/>
+          <a:lstStyle/>
+          <a:p>
+            <a:pPr indent="0" marL="0">
+              <a:lnSpc>
+                <a:spcPct val="135000"/>
+              </a:lnSpc>
+              <a:buNone/>
+            </a:pPr>
+            <a:r>
+              <a:rPr lang="en-US" sz="1200" dirty="0">
+                <a:solidFill>
+                  <a:srgbClr val="334155"/>
+                </a:solidFill>
+                <a:latin typeface="Calibri" pitchFamily="34" charset="0"/>
+                <a:ea typeface="Calibri" pitchFamily="34" charset="-122"/>
+                <a:cs typeface="Calibri" pitchFamily="34" charset="-120"/>
+              </a:rPr>
+              <a:t>{{seo_narrative}}</a:t>
+            </a:r>
+            <a:endParaRPr lang="en-US" sz="1200" dirty="0"/>
+          </a:p>
+        </p:txBody>
+      </p:sp>
+      <p:sp>
+        <p:nvSpPr>
+          <p:cNvPr id="11" name="Text 9"/>
+          <p:cNvSpPr/>
+          <p:nvPr/>
+        </p:nvSpPr>
+        <p:spPr>
+          <a:xfrm>
+            <a:off x="731520" y="6510528"/>
+            <a:ext cx="10698480" cy="256032"/>
+          </a:xfrm>
+          <a:prstGeom prst="rect">
+            <a:avLst/>
+          </a:prstGeom>
+          <a:noFill/>
+          <a:ln/>
+        </p:spPr>
+        <p:txBody>
+          <a:bodyPr wrap="square" rtlCol="0" anchor="ctr"/>
+          <a:lstStyle/>
+          <a:p>
+            <a:pPr indent="0" marL="0">
+              <a:buNone/>
+            </a:pPr>
+            <a:r>
+              <a:rPr lang="en-US" sz="800" dirty="0">
+                <a:solidFill>
+                  <a:srgbClr val="94A3B8"/>
+                </a:solidFill>
+                <a:latin typeface="Calibri" pitchFamily="34" charset="0"/>
+                <a:ea typeface="Calibri" pitchFamily="34" charset="-122"/>
+                <a:cs typeface="Calibri" pitchFamily="34" charset="-120"/>
+              </a:rPr>
+              <a:t>{{agency_name}}  •  Confidential  •  Page 13</a:t>
+            </a:r>
+            <a:endParaRPr lang="en-US" sz="800" dirty="0"/>
+          </a:p>
+        </p:txBody>
+      </p:sp>
+    </p:spTree>
+  </p:cSld>
+  <p:clrMapOvr>
+    <a:masterClrMapping/>
+  </p:clrMapOvr>
+</p:sld>
+</file>
+
+<file path=ppt/slides/slide14.xml><?xml version="1.0" encoding="utf-8"?>
+<p:sld xmlns:a="http://schemas.openxmlformats.org/drawingml/2006/main" xmlns:r="http://schemas.openxmlformats.org/officeDocument/2006/relationships" xmlns:p="http://schemas.openxmlformats.org/presentationml/2006/main">
+  <p:cSld name="Slide 14">
+    <p:bg>
+      <p:bgPr>
+        <a:solidFill>
+          <a:srgbClr val="FFFBF5"/>
+        </a:solidFill>
+      </p:bgPr>
+    </p:bg>
+    <p:spTree>
+      <p:nvGrpSpPr>
+        <p:cNvPr id="1" name=""/>
+        <p:cNvGrpSpPr/>
+        <p:nvPr/>
+      </p:nvGrpSpPr>
+      <p:grpSpPr>
+        <a:xfrm>
+          <a:off x="0" y="0"/>
+          <a:ext cx="0" cy="0"/>
+          <a:chOff x="0" y="0"/>
+          <a:chExt cx="0" cy="0"/>
+        </a:xfrm>
+      </p:grpSpPr>
+      <p:sp>
+        <p:nvSpPr>
+          <p:cNvPr id="2" name="Shape 0"/>
+          <p:cNvSpPr/>
+          <p:nvPr/>
+        </p:nvSpPr>
+        <p:spPr>
+          <a:xfrm>
+            <a:off x="0" y="0"/>
+            <a:ext cx="4864608" cy="54864"/>
+          </a:xfrm>
+          <a:prstGeom prst="rect">
+            <a:avLst/>
+          </a:prstGeom>
+          <a:solidFill>
+            <a:srgbClr val="F97316"/>
+          </a:solidFill>
+          <a:ln/>
+        </p:spPr>
+      </p:sp>
+      <p:sp>
+        <p:nvSpPr>
+          <p:cNvPr id="3" name="Shape 1"/>
+          <p:cNvSpPr/>
+          <p:nvPr/>
+        </p:nvSpPr>
+        <p:spPr>
+          <a:xfrm>
+            <a:off x="4864608" y="0"/>
+            <a:ext cx="4256532" cy="54864"/>
+          </a:xfrm>
+          <a:prstGeom prst="rect">
+            <a:avLst/>
+          </a:prstGeom>
+          <a:solidFill>
+            <a:srgbClr val="F43F5E"/>
+          </a:solidFill>
+          <a:ln/>
+        </p:spPr>
+      </p:sp>
+      <p:sp>
+        <p:nvSpPr>
+          <p:cNvPr id="4" name="Shape 2"/>
+          <p:cNvSpPr/>
+          <p:nvPr/>
+        </p:nvSpPr>
+        <p:spPr>
+          <a:xfrm>
+            <a:off x="9121140" y="0"/>
+            <a:ext cx="3040380" cy="54864"/>
+          </a:xfrm>
+          <a:prstGeom prst="rect">
+            <a:avLst/>
+          </a:prstGeom>
+          <a:solidFill>
+            <a:srgbClr val="8B5CF6"/>
+          </a:solidFill>
+          <a:ln/>
+        </p:spPr>
+      </p:sp>
+      <p:sp>
+        <p:nvSpPr>
+          <p:cNvPr id="5" name="Text 3"/>
+          <p:cNvSpPr/>
+          <p:nvPr/>
+        </p:nvSpPr>
+        <p:spPr>
+          <a:xfrm>
+            <a:off x="731520" y="320040"/>
+            <a:ext cx="10698480" cy="640080"/>
+          </a:xfrm>
+          <a:prstGeom prst="rect">
+            <a:avLst/>
+          </a:prstGeom>
+          <a:noFill/>
+          <a:ln/>
+        </p:spPr>
+        <p:txBody>
+          <a:bodyPr wrap="square" lIns="0" tIns="0" rIns="0" bIns="0" rtlCol="0" anchor="ctr"/>
+          <a:lstStyle/>
+          <a:p>
+            <a:pPr indent="0" marL="0">
+              <a:buNone/>
+            </a:pPr>
+            <a:r>
+              <a:rPr lang="en-US" sz="2800" b="1" dirty="0">
+                <a:solidFill>
+                  <a:srgbClr val="0F172A"/>
+                </a:solidFill>
+                <a:latin typeface="Calibri" pitchFamily="34" charset="0"/>
+                <a:ea typeface="Calibri" pitchFamily="34" charset="-122"/>
+                <a:cs typeface="Calibri" pitchFamily="34" charset="-120"/>
+              </a:rPr>
+              <a:t>{{csv_source_name}}</a:t>
+            </a:r>
+            <a:endParaRPr lang="en-US" sz="2800" dirty="0"/>
+          </a:p>
+        </p:txBody>
+      </p:sp>
+      <p:sp>
+        <p:nvSpPr>
+          <p:cNvPr id="6" name="Shape 4"/>
+          <p:cNvSpPr/>
+          <p:nvPr/>
+        </p:nvSpPr>
+        <p:spPr>
+          <a:xfrm>
+            <a:off x="731520" y="1371600"/>
+            <a:ext cx="4937760" cy="502920"/>
+          </a:xfrm>
+          <a:prstGeom prst="rect">
+            <a:avLst/>
+          </a:prstGeom>
+          <a:solidFill>
+            <a:srgbClr val="FFFFFF"/>
+          </a:solidFill>
+          <a:ln/>
+          <a:effectLst>
+            <a:outerShdw sx="100000" sy="100000" kx="0" ky="0" algn="bl" rotWithShape="0" blurRad="76200" dist="25400" dir="8100000">
+              <a:srgbClr val="F97316">
+                <a:alpha val="6000"/>
+              </a:srgbClr>
+            </a:outerShdw>
+          </a:effectLst>
+        </p:spPr>
+      </p:sp>
+      <p:sp>
+        <p:nvSpPr>
+          <p:cNvPr id="7" name="Shape 5"/>
+          <p:cNvSpPr/>
+          <p:nvPr/>
+        </p:nvSpPr>
+        <p:spPr>
+          <a:xfrm>
+            <a:off x="731520" y="1371600"/>
+            <a:ext cx="36576" cy="502920"/>
+          </a:xfrm>
+          <a:prstGeom prst="rect">
+            <a:avLst/>
+          </a:prstGeom>
+          <a:solidFill>
+            <a:srgbClr val="F97316"/>
+          </a:solidFill>
+          <a:ln/>
+        </p:spPr>
+      </p:sp>
+      <p:sp>
+        <p:nvSpPr>
+          <p:cNvPr id="8" name="Shape 6"/>
+          <p:cNvSpPr/>
+          <p:nvPr/>
+        </p:nvSpPr>
+        <p:spPr>
+          <a:xfrm>
+            <a:off x="768096" y="1371600"/>
+            <a:ext cx="27432" cy="502920"/>
+          </a:xfrm>
+          <a:prstGeom prst="rect">
+            <a:avLst/>
+          </a:prstGeom>
+          <a:solidFill>
+            <a:srgbClr val="F43F5E"/>
+          </a:solidFill>
+          <a:ln/>
+        </p:spPr>
+      </p:sp>
+      <p:sp>
+        <p:nvSpPr>
+          <p:cNvPr id="9" name="Text 7"/>
+          <p:cNvSpPr/>
+          <p:nvPr/>
+        </p:nvSpPr>
+        <p:spPr>
+          <a:xfrm>
+            <a:off x="914400" y="1417320"/>
+            <a:ext cx="2011680" cy="411480"/>
+          </a:xfrm>
+          <a:prstGeom prst="rect">
+            <a:avLst/>
+          </a:prstGeom>
+          <a:noFill/>
+          <a:ln/>
+        </p:spPr>
+        <p:txBody>
+          <a:bodyPr wrap="square" rtlCol="0" anchor="ctr"/>
+          <a:lstStyle/>
+          <a:p>
+            <a:pPr indent="0" marL="0">
+              <a:buNone/>
+            </a:pPr>
+            <a:r>
+              <a:rPr lang="en-US" sz="900" b="1" spc="100" kern="0" dirty="0">
+                <a:solidFill>
+                  <a:srgbClr val="64748B"/>
+                </a:solidFill>
+                <a:latin typeface="Calibri" pitchFamily="34" charset="0"/>
+                <a:ea typeface="Calibri" pitchFamily="34" charset="-122"/>
+                <a:cs typeface="Calibri" pitchFamily="34" charset="-120"/>
+              </a:rPr>
+              <a:t>{{csv_kpi_0_label}}</a:t>
+            </a:r>
+            <a:endParaRPr lang="en-US" sz="900" dirty="0"/>
+          </a:p>
+        </p:txBody>
+      </p:sp>
+      <p:sp>
+        <p:nvSpPr>
+          <p:cNvPr id="10" name="Text 8"/>
+          <p:cNvSpPr/>
+          <p:nvPr/>
+        </p:nvSpPr>
+        <p:spPr>
+          <a:xfrm>
+            <a:off x="3017520" y="1417320"/>
+            <a:ext cx="2468880" cy="411480"/>
+          </a:xfrm>
+          <a:prstGeom prst="rect">
+            <a:avLst/>
+          </a:prstGeom>
+          <a:noFill/>
+          <a:ln/>
+        </p:spPr>
+        <p:txBody>
+          <a:bodyPr wrap="square" rtlCol="0" anchor="ctr"/>
+          <a:lstStyle/>
+          <a:p>
+            <a:pPr indent="0" marL="0">
+              <a:buNone/>
+            </a:pPr>
+            <a:r>
+              <a:rPr lang="en-US" sz="1800" b="1" dirty="0">
+                <a:solidFill>
+                  <a:srgbClr val="0F172A"/>
+                </a:solidFill>
+                <a:latin typeface="Calibri" pitchFamily="34" charset="0"/>
+                <a:ea typeface="Calibri" pitchFamily="34" charset="-122"/>
+                <a:cs typeface="Calibri" pitchFamily="34" charset="-120"/>
+              </a:rPr>
+              <a:t>{{csv_kpi_0_value}}</a:t>
+            </a:r>
+            <a:endParaRPr lang="en-US" sz="1800" dirty="0"/>
+          </a:p>
+        </p:txBody>
+      </p:sp>
+      <p:sp>
+        <p:nvSpPr>
+          <p:cNvPr id="11" name="Shape 9"/>
+          <p:cNvSpPr/>
+          <p:nvPr/>
+        </p:nvSpPr>
+        <p:spPr>
+          <a:xfrm>
+            <a:off x="6400800" y="1371600"/>
+            <a:ext cx="4937760" cy="502920"/>
+          </a:xfrm>
+          <a:prstGeom prst="rect">
+            <a:avLst/>
+          </a:prstGeom>
+          <a:solidFill>
+            <a:srgbClr val="FFFFFF"/>
+          </a:solidFill>
+          <a:ln/>
+          <a:effectLst>
+            <a:outerShdw sx="100000" sy="100000" kx="0" ky="0" algn="bl" rotWithShape="0" blurRad="76200" dist="25400" dir="8100000">
+              <a:srgbClr val="F97316">
+                <a:alpha val="6000"/>
+              </a:srgbClr>
+            </a:outerShdw>
+          </a:effectLst>
+        </p:spPr>
+      </p:sp>
+      <p:sp>
+        <p:nvSpPr>
+          <p:cNvPr id="12" name="Shape 10"/>
+          <p:cNvSpPr/>
+          <p:nvPr/>
+        </p:nvSpPr>
+        <p:spPr>
+          <a:xfrm>
+            <a:off x="6400800" y="1371600"/>
+            <a:ext cx="36576" cy="502920"/>
+          </a:xfrm>
+          <a:prstGeom prst="rect">
+            <a:avLst/>
+          </a:prstGeom>
+          <a:solidFill>
+            <a:srgbClr val="F43F5E"/>
+          </a:solidFill>
+          <a:ln/>
+        </p:spPr>
+      </p:sp>
+      <p:sp>
+        <p:nvSpPr>
+          <p:cNvPr id="13" name="Shape 11"/>
+          <p:cNvSpPr/>
+          <p:nvPr/>
+        </p:nvSpPr>
+        <p:spPr>
+          <a:xfrm>
+            <a:off x="6437376" y="1371600"/>
+            <a:ext cx="27432" cy="502920"/>
+          </a:xfrm>
+          <a:prstGeom prst="rect">
+            <a:avLst/>
+          </a:prstGeom>
+          <a:solidFill>
+            <a:srgbClr val="8B5CF6"/>
+          </a:solidFill>
+          <a:ln/>
+        </p:spPr>
+      </p:sp>
+      <p:sp>
+        <p:nvSpPr>
+          <p:cNvPr id="14" name="Text 12"/>
+          <p:cNvSpPr/>
+          <p:nvPr/>
+        </p:nvSpPr>
+        <p:spPr>
+          <a:xfrm>
+            <a:off x="6583680" y="1417320"/>
+            <a:ext cx="2011680" cy="411480"/>
+          </a:xfrm>
+          <a:prstGeom prst="rect">
+            <a:avLst/>
+          </a:prstGeom>
+          <a:noFill/>
+          <a:ln/>
+        </p:spPr>
+        <p:txBody>
+          <a:bodyPr wrap="square" rtlCol="0" anchor="ctr"/>
+          <a:lstStyle/>
+          <a:p>
+            <a:pPr indent="0" marL="0">
+              <a:buNone/>
+            </a:pPr>
+            <a:r>
+              <a:rPr lang="en-US" sz="900" b="1" spc="100" kern="0" dirty="0">
+                <a:solidFill>
+                  <a:srgbClr val="64748B"/>
+                </a:solidFill>
+                <a:latin typeface="Calibri" pitchFamily="34" charset="0"/>
+                <a:ea typeface="Calibri" pitchFamily="34" charset="-122"/>
+                <a:cs typeface="Calibri" pitchFamily="34" charset="-120"/>
+              </a:rPr>
+              <a:t>{{csv_kpi_1_label}}</a:t>
+            </a:r>
+            <a:endParaRPr lang="en-US" sz="900" dirty="0"/>
+          </a:p>
+        </p:txBody>
+      </p:sp>
+      <p:sp>
+        <p:nvSpPr>
+          <p:cNvPr id="15" name="Text 13"/>
+          <p:cNvSpPr/>
+          <p:nvPr/>
+        </p:nvSpPr>
+        <p:spPr>
+          <a:xfrm>
+            <a:off x="8686800" y="1417320"/>
+            <a:ext cx="2468880" cy="411480"/>
+          </a:xfrm>
+          <a:prstGeom prst="rect">
+            <a:avLst/>
+          </a:prstGeom>
+          <a:noFill/>
+          <a:ln/>
+        </p:spPr>
+        <p:txBody>
+          <a:bodyPr wrap="square" rtlCol="0" anchor="ctr"/>
+          <a:lstStyle/>
+          <a:p>
+            <a:pPr indent="0" marL="0">
+              <a:buNone/>
+            </a:pPr>
+            <a:r>
+              <a:rPr lang="en-US" sz="1800" b="1" dirty="0">
+                <a:solidFill>
+                  <a:srgbClr val="0F172A"/>
+                </a:solidFill>
+                <a:latin typeface="Calibri" pitchFamily="34" charset="0"/>
+                <a:ea typeface="Calibri" pitchFamily="34" charset="-122"/>
+                <a:cs typeface="Calibri" pitchFamily="34" charset="-120"/>
+              </a:rPr>
+              <a:t>{{csv_kpi_1_value}}</a:t>
+            </a:r>
+            <a:endParaRPr lang="en-US" sz="1800" dirty="0"/>
+          </a:p>
+        </p:txBody>
+      </p:sp>
+      <p:sp>
+        <p:nvSpPr>
+          <p:cNvPr id="16" name="Shape 14"/>
+          <p:cNvSpPr/>
+          <p:nvPr/>
+        </p:nvSpPr>
+        <p:spPr>
+          <a:xfrm>
+            <a:off x="731520" y="2002536"/>
+            <a:ext cx="4937760" cy="502920"/>
+          </a:xfrm>
+          <a:prstGeom prst="rect">
+            <a:avLst/>
+          </a:prstGeom>
+          <a:solidFill>
+            <a:srgbClr val="FFFFFF"/>
+          </a:solidFill>
+          <a:ln/>
+          <a:effectLst>
+            <a:outerShdw sx="100000" sy="100000" kx="0" ky="0" algn="bl" rotWithShape="0" blurRad="76200" dist="25400" dir="8100000">
+              <a:srgbClr val="F97316">
+                <a:alpha val="6000"/>
+              </a:srgbClr>
+            </a:outerShdw>
+          </a:effectLst>
+        </p:spPr>
+      </p:sp>
+      <p:sp>
+        <p:nvSpPr>
+          <p:cNvPr id="17" name="Shape 15"/>
+          <p:cNvSpPr/>
+          <p:nvPr/>
+        </p:nvSpPr>
+        <p:spPr>
+          <a:xfrm>
+            <a:off x="731520" y="2002536"/>
+            <a:ext cx="36576" cy="502920"/>
+          </a:xfrm>
+          <a:prstGeom prst="rect">
+            <a:avLst/>
+          </a:prstGeom>
+          <a:solidFill>
+            <a:srgbClr val="8B5CF6"/>
+          </a:solidFill>
+          <a:ln/>
+        </p:spPr>
+      </p:sp>
+      <p:sp>
+        <p:nvSpPr>
+          <p:cNvPr id="18" name="Shape 16"/>
+          <p:cNvSpPr/>
+          <p:nvPr/>
+        </p:nvSpPr>
+        <p:spPr>
+          <a:xfrm>
+            <a:off x="768096" y="2002536"/>
+            <a:ext cx="27432" cy="502920"/>
+          </a:xfrm>
+          <a:prstGeom prst="rect">
+            <a:avLst/>
+          </a:prstGeom>
+          <a:solidFill>
+            <a:srgbClr val="F97316"/>
+          </a:solidFill>
+          <a:ln/>
+        </p:spPr>
+      </p:sp>
+      <p:sp>
+        <p:nvSpPr>
+          <p:cNvPr id="19" name="Text 17"/>
+          <p:cNvSpPr/>
+          <p:nvPr/>
+        </p:nvSpPr>
+        <p:spPr>
+          <a:xfrm>
+            <a:off x="914400" y="2048256"/>
+            <a:ext cx="2011680" cy="411480"/>
+          </a:xfrm>
+          <a:prstGeom prst="rect">
+            <a:avLst/>
+          </a:prstGeom>
+          <a:noFill/>
+          <a:ln/>
+        </p:spPr>
+        <p:txBody>
+          <a:bodyPr wrap="square" rtlCol="0" anchor="ctr"/>
+          <a:lstStyle/>
+          <a:p>
+            <a:pPr indent="0" marL="0">
+              <a:buNone/>
+            </a:pPr>
+            <a:r>
+              <a:rPr lang="en-US" sz="900" b="1" spc="100" kern="0" dirty="0">
+                <a:solidFill>
+                  <a:srgbClr val="64748B"/>
+                </a:solidFill>
+                <a:latin typeface="Calibri" pitchFamily="34" charset="0"/>
+                <a:ea typeface="Calibri" pitchFamily="34" charset="-122"/>
+                <a:cs typeface="Calibri" pitchFamily="34" charset="-120"/>
+              </a:rPr>
+              <a:t>{{csv_kpi_2_label}}</a:t>
+            </a:r>
+            <a:endParaRPr lang="en-US" sz="900" dirty="0"/>
+          </a:p>
+        </p:txBody>
+      </p:sp>
+      <p:sp>
+        <p:nvSpPr>
+          <p:cNvPr id="20" name="Text 18"/>
+          <p:cNvSpPr/>
+          <p:nvPr/>
+        </p:nvSpPr>
+        <p:spPr>
+          <a:xfrm>
+            <a:off x="3017520" y="2048256"/>
+            <a:ext cx="2468880" cy="411480"/>
+          </a:xfrm>
+          <a:prstGeom prst="rect">
+            <a:avLst/>
+          </a:prstGeom>
+          <a:noFill/>
+          <a:ln/>
+        </p:spPr>
+        <p:txBody>
+          <a:bodyPr wrap="square" rtlCol="0" anchor="ctr"/>
+          <a:lstStyle/>
+          <a:p>
+            <a:pPr indent="0" marL="0">
+              <a:buNone/>
+            </a:pPr>
+            <a:r>
+              <a:rPr lang="en-US" sz="1800" b="1" dirty="0">
+                <a:solidFill>
+                  <a:srgbClr val="0F172A"/>
+                </a:solidFill>
+                <a:latin typeface="Calibri" pitchFamily="34" charset="0"/>
+                <a:ea typeface="Calibri" pitchFamily="34" charset="-122"/>
+                <a:cs typeface="Calibri" pitchFamily="34" charset="-120"/>
+              </a:rPr>
+              <a:t>{{csv_kpi_2_value}}</a:t>
+            </a:r>
+            <a:endParaRPr lang="en-US" sz="1800" dirty="0"/>
+          </a:p>
+        </p:txBody>
+      </p:sp>
+      <p:sp>
+        <p:nvSpPr>
+          <p:cNvPr id="21" name="Shape 19"/>
+          <p:cNvSpPr/>
+          <p:nvPr/>
+        </p:nvSpPr>
+        <p:spPr>
+          <a:xfrm>
+            <a:off x="6400800" y="2002536"/>
+            <a:ext cx="4937760" cy="502920"/>
+          </a:xfrm>
+          <a:prstGeom prst="rect">
+            <a:avLst/>
+          </a:prstGeom>
+          <a:solidFill>
+            <a:srgbClr val="FFFFFF"/>
+          </a:solidFill>
+          <a:ln/>
+          <a:effectLst>
+            <a:outerShdw sx="100000" sy="100000" kx="0" ky="0" algn="bl" rotWithShape="0" blurRad="76200" dist="25400" dir="8100000">
+              <a:srgbClr val="F97316">
+                <a:alpha val="6000"/>
+              </a:srgbClr>
+            </a:outerShdw>
+          </a:effectLst>
+        </p:spPr>
+      </p:sp>
+      <p:sp>
+        <p:nvSpPr>
+          <p:cNvPr id="22" name="Shape 20"/>
+          <p:cNvSpPr/>
+          <p:nvPr/>
+        </p:nvSpPr>
+        <p:spPr>
+          <a:xfrm>
+            <a:off x="6400800" y="2002536"/>
+            <a:ext cx="36576" cy="502920"/>
+          </a:xfrm>
+          <a:prstGeom prst="rect">
+            <a:avLst/>
+          </a:prstGeom>
+          <a:solidFill>
+            <a:srgbClr val="F97316"/>
+          </a:solidFill>
+          <a:ln/>
+        </p:spPr>
+      </p:sp>
+      <p:sp>
+        <p:nvSpPr>
+          <p:cNvPr id="23" name="Shape 21"/>
+          <p:cNvSpPr/>
+          <p:nvPr/>
+        </p:nvSpPr>
+        <p:spPr>
+          <a:xfrm>
+            <a:off x="6437376" y="2002536"/>
+            <a:ext cx="27432" cy="502920"/>
+          </a:xfrm>
+          <a:prstGeom prst="rect">
+            <a:avLst/>
+          </a:prstGeom>
+          <a:solidFill>
+            <a:srgbClr val="F43F5E"/>
+          </a:solidFill>
+          <a:ln/>
+        </p:spPr>
+      </p:sp>
+      <p:sp>
+        <p:nvSpPr>
+          <p:cNvPr id="24" name="Text 22"/>
+          <p:cNvSpPr/>
+          <p:nvPr/>
+        </p:nvSpPr>
+        <p:spPr>
+          <a:xfrm>
+            <a:off x="6583680" y="2048256"/>
+            <a:ext cx="2011680" cy="411480"/>
+          </a:xfrm>
+          <a:prstGeom prst="rect">
+            <a:avLst/>
+          </a:prstGeom>
+          <a:noFill/>
+          <a:ln/>
+        </p:spPr>
+        <p:txBody>
+          <a:bodyPr wrap="square" rtlCol="0" anchor="ctr"/>
+          <a:lstStyle/>
+          <a:p>
+            <a:pPr indent="0" marL="0">
+              <a:buNone/>
+            </a:pPr>
+            <a:r>
+              <a:rPr lang="en-US" sz="900" b="1" spc="100" kern="0" dirty="0">
+                <a:solidFill>
+                  <a:srgbClr val="64748B"/>
+                </a:solidFill>
+                <a:latin typeface="Calibri" pitchFamily="34" charset="0"/>
+                <a:ea typeface="Calibri" pitchFamily="34" charset="-122"/>
+                <a:cs typeface="Calibri" pitchFamily="34" charset="-120"/>
+              </a:rPr>
+              <a:t>{{csv_kpi_3_label}}</a:t>
+            </a:r>
+            <a:endParaRPr lang="en-US" sz="900" dirty="0"/>
+          </a:p>
+        </p:txBody>
+      </p:sp>
+      <p:sp>
+        <p:nvSpPr>
+          <p:cNvPr id="25" name="Text 23"/>
+          <p:cNvSpPr/>
+          <p:nvPr/>
+        </p:nvSpPr>
+        <p:spPr>
+          <a:xfrm>
+            <a:off x="8686800" y="2048256"/>
+            <a:ext cx="2468880" cy="411480"/>
+          </a:xfrm>
+          <a:prstGeom prst="rect">
+            <a:avLst/>
+          </a:prstGeom>
+          <a:noFill/>
+          <a:ln/>
+        </p:spPr>
+        <p:txBody>
+          <a:bodyPr wrap="square" rtlCol="0" anchor="ctr"/>
+          <a:lstStyle/>
+          <a:p>
+            <a:pPr indent="0" marL="0">
+              <a:buNone/>
+            </a:pPr>
+            <a:r>
+              <a:rPr lang="en-US" sz="1800" b="1" dirty="0">
+                <a:solidFill>
+                  <a:srgbClr val="0F172A"/>
+                </a:solidFill>
+                <a:latin typeface="Calibri" pitchFamily="34" charset="0"/>
+                <a:ea typeface="Calibri" pitchFamily="34" charset="-122"/>
+                <a:cs typeface="Calibri" pitchFamily="34" charset="-120"/>
+              </a:rPr>
+              <a:t>{{csv_kpi_3_value}}</a:t>
+            </a:r>
+            <a:endParaRPr lang="en-US" sz="1800" dirty="0"/>
+          </a:p>
+        </p:txBody>
+      </p:sp>
+      <p:sp>
+        <p:nvSpPr>
+          <p:cNvPr id="26" name="Shape 24"/>
+          <p:cNvSpPr/>
+          <p:nvPr/>
+        </p:nvSpPr>
+        <p:spPr>
+          <a:xfrm>
+            <a:off x="731520" y="2633472"/>
+            <a:ext cx="4937760" cy="502920"/>
+          </a:xfrm>
+          <a:prstGeom prst="rect">
+            <a:avLst/>
+          </a:prstGeom>
+          <a:solidFill>
+            <a:srgbClr val="FFFFFF"/>
+          </a:solidFill>
+          <a:ln/>
+          <a:effectLst>
+            <a:outerShdw sx="100000" sy="100000" kx="0" ky="0" algn="bl" rotWithShape="0" blurRad="76200" dist="25400" dir="8100000">
+              <a:srgbClr val="F97316">
+                <a:alpha val="6000"/>
+              </a:srgbClr>
+            </a:outerShdw>
+          </a:effectLst>
+        </p:spPr>
+      </p:sp>
+      <p:sp>
+        <p:nvSpPr>
+          <p:cNvPr id="27" name="Shape 25"/>
+          <p:cNvSpPr/>
+          <p:nvPr/>
+        </p:nvSpPr>
+        <p:spPr>
+          <a:xfrm>
+            <a:off x="731520" y="2633472"/>
+            <a:ext cx="36576" cy="502920"/>
+          </a:xfrm>
+          <a:prstGeom prst="rect">
+            <a:avLst/>
+          </a:prstGeom>
+          <a:solidFill>
+            <a:srgbClr val="F43F5E"/>
+          </a:solidFill>
+          <a:ln/>
+        </p:spPr>
+      </p:sp>
+      <p:sp>
+        <p:nvSpPr>
+          <p:cNvPr id="28" name="Shape 26"/>
+          <p:cNvSpPr/>
+          <p:nvPr/>
+        </p:nvSpPr>
+        <p:spPr>
+          <a:xfrm>
+            <a:off x="768096" y="2633472"/>
+            <a:ext cx="27432" cy="502920"/>
+          </a:xfrm>
+          <a:prstGeom prst="rect">
+            <a:avLst/>
+          </a:prstGeom>
+          <a:solidFill>
+            <a:srgbClr val="8B5CF6"/>
+          </a:solidFill>
+          <a:ln/>
+        </p:spPr>
+      </p:sp>
+      <p:sp>
+        <p:nvSpPr>
+          <p:cNvPr id="29" name="Text 27"/>
+          <p:cNvSpPr/>
+          <p:nvPr/>
+        </p:nvSpPr>
+        <p:spPr>
+          <a:xfrm>
+            <a:off x="914400" y="2679192"/>
+            <a:ext cx="2011680" cy="411480"/>
+          </a:xfrm>
+          <a:prstGeom prst="rect">
+            <a:avLst/>
+          </a:prstGeom>
+          <a:noFill/>
+          <a:ln/>
+        </p:spPr>
+        <p:txBody>
+          <a:bodyPr wrap="square" rtlCol="0" anchor="ctr"/>
+          <a:lstStyle/>
+          <a:p>
+            <a:pPr indent="0" marL="0">
+              <a:buNone/>
+            </a:pPr>
+            <a:r>
+              <a:rPr lang="en-US" sz="900" b="1" spc="100" kern="0" dirty="0">
+                <a:solidFill>
+                  <a:srgbClr val="64748B"/>
+                </a:solidFill>
+                <a:latin typeface="Calibri" pitchFamily="34" charset="0"/>
+                <a:ea typeface="Calibri" pitchFamily="34" charset="-122"/>
+                <a:cs typeface="Calibri" pitchFamily="34" charset="-120"/>
+              </a:rPr>
+              <a:t>{{csv_kpi_4_label}}</a:t>
+            </a:r>
+            <a:endParaRPr lang="en-US" sz="900" dirty="0"/>
+          </a:p>
+        </p:txBody>
+      </p:sp>
+      <p:sp>
+        <p:nvSpPr>
+          <p:cNvPr id="30" name="Text 28"/>
+          <p:cNvSpPr/>
+          <p:nvPr/>
+        </p:nvSpPr>
+        <p:spPr>
+          <a:xfrm>
+            <a:off x="3017520" y="2679192"/>
+            <a:ext cx="2468880" cy="411480"/>
+          </a:xfrm>
+          <a:prstGeom prst="rect">
+            <a:avLst/>
+          </a:prstGeom>
+          <a:noFill/>
+          <a:ln/>
+        </p:spPr>
+        <p:txBody>
+          <a:bodyPr wrap="square" rtlCol="0" anchor="ctr"/>
+          <a:lstStyle/>
+          <a:p>
+            <a:pPr indent="0" marL="0">
+              <a:buNone/>
+            </a:pPr>
+            <a:r>
+              <a:rPr lang="en-US" sz="1800" b="1" dirty="0">
+                <a:solidFill>
+                  <a:srgbClr val="0F172A"/>
+                </a:solidFill>
+                <a:latin typeface="Calibri" pitchFamily="34" charset="0"/>
+                <a:ea typeface="Calibri" pitchFamily="34" charset="-122"/>
+                <a:cs typeface="Calibri" pitchFamily="34" charset="-120"/>
+              </a:rPr>
+              <a:t>{{csv_kpi_4_value}}</a:t>
+            </a:r>
+            <a:endParaRPr lang="en-US" sz="1800" dirty="0"/>
+          </a:p>
+        </p:txBody>
+      </p:sp>
+      <p:sp>
+        <p:nvSpPr>
+          <p:cNvPr id="31" name="Shape 29"/>
+          <p:cNvSpPr/>
+          <p:nvPr/>
+        </p:nvSpPr>
+        <p:spPr>
+          <a:xfrm>
+            <a:off x="6400800" y="2633472"/>
+            <a:ext cx="4937760" cy="502920"/>
+          </a:xfrm>
+          <a:prstGeom prst="rect">
+            <a:avLst/>
+          </a:prstGeom>
+          <a:solidFill>
+            <a:srgbClr val="FFFFFF"/>
+          </a:solidFill>
+          <a:ln/>
+          <a:effectLst>
+            <a:outerShdw sx="100000" sy="100000" kx="0" ky="0" algn="bl" rotWithShape="0" blurRad="76200" dist="25400" dir="8100000">
+              <a:srgbClr val="F97316">
+                <a:alpha val="6000"/>
+              </a:srgbClr>
+            </a:outerShdw>
+          </a:effectLst>
+        </p:spPr>
+      </p:sp>
+      <p:sp>
+        <p:nvSpPr>
+          <p:cNvPr id="32" name="Shape 30"/>
+          <p:cNvSpPr/>
+          <p:nvPr/>
+        </p:nvSpPr>
+        <p:spPr>
+          <a:xfrm>
+            <a:off x="6400800" y="2633472"/>
+            <a:ext cx="36576" cy="502920"/>
+          </a:xfrm>
+          <a:prstGeom prst="rect">
+            <a:avLst/>
+          </a:prstGeom>
+          <a:solidFill>
+            <a:srgbClr val="8B5CF6"/>
+          </a:solidFill>
+          <a:ln/>
+        </p:spPr>
+      </p:sp>
+      <p:sp>
+        <p:nvSpPr>
+          <p:cNvPr id="33" name="Shape 31"/>
+          <p:cNvSpPr/>
+          <p:nvPr/>
+        </p:nvSpPr>
+        <p:spPr>
+          <a:xfrm>
+            <a:off x="6437376" y="2633472"/>
+            <a:ext cx="27432" cy="502920"/>
+          </a:xfrm>
+          <a:prstGeom prst="rect">
+            <a:avLst/>
+          </a:prstGeom>
+          <a:solidFill>
+            <a:srgbClr val="F97316"/>
+          </a:solidFill>
+          <a:ln/>
+        </p:spPr>
+      </p:sp>
+      <p:sp>
+        <p:nvSpPr>
+          <p:cNvPr id="34" name="Text 32"/>
+          <p:cNvSpPr/>
+          <p:nvPr/>
+        </p:nvSpPr>
+        <p:spPr>
+          <a:xfrm>
+            <a:off x="6583680" y="2679192"/>
+            <a:ext cx="2011680" cy="411480"/>
+          </a:xfrm>
+          <a:prstGeom prst="rect">
+            <a:avLst/>
+          </a:prstGeom>
+          <a:noFill/>
+          <a:ln/>
+        </p:spPr>
+        <p:txBody>
+          <a:bodyPr wrap="square" rtlCol="0" anchor="ctr"/>
+          <a:lstStyle/>
+          <a:p>
+            <a:pPr indent="0" marL="0">
+              <a:buNone/>
+            </a:pPr>
+            <a:r>
+              <a:rPr lang="en-US" sz="900" b="1" spc="100" kern="0" dirty="0">
+                <a:solidFill>
+                  <a:srgbClr val="64748B"/>
+                </a:solidFill>
+                <a:latin typeface="Calibri" pitchFamily="34" charset="0"/>
+                <a:ea typeface="Calibri" pitchFamily="34" charset="-122"/>
+                <a:cs typeface="Calibri" pitchFamily="34" charset="-120"/>
+              </a:rPr>
+              <a:t>{{csv_kpi_5_label}}</a:t>
+            </a:r>
+            <a:endParaRPr lang="en-US" sz="900" dirty="0"/>
+          </a:p>
+        </p:txBody>
+      </p:sp>
+      <p:sp>
+        <p:nvSpPr>
+          <p:cNvPr id="35" name="Text 33"/>
+          <p:cNvSpPr/>
+          <p:nvPr/>
+        </p:nvSpPr>
+        <p:spPr>
+          <a:xfrm>
+            <a:off x="8686800" y="2679192"/>
+            <a:ext cx="2468880" cy="411480"/>
+          </a:xfrm>
+          <a:prstGeom prst="rect">
+            <a:avLst/>
+          </a:prstGeom>
+          <a:noFill/>
+          <a:ln/>
+        </p:spPr>
+        <p:txBody>
+          <a:bodyPr wrap="square" rtlCol="0" anchor="ctr"/>
+          <a:lstStyle/>
+          <a:p>
+            <a:pPr indent="0" marL="0">
+              <a:buNone/>
+            </a:pPr>
+            <a:r>
+              <a:rPr lang="en-US" sz="1800" b="1" dirty="0">
+                <a:solidFill>
+                  <a:srgbClr val="0F172A"/>
+                </a:solidFill>
+                <a:latin typeface="Calibri" pitchFamily="34" charset="0"/>
+                <a:ea typeface="Calibri" pitchFamily="34" charset="-122"/>
+                <a:cs typeface="Calibri" pitchFamily="34" charset="-120"/>
+              </a:rPr>
+              <a:t>{{csv_kpi_5_value}}</a:t>
+            </a:r>
+            <a:endParaRPr lang="en-US" sz="1800" dirty="0"/>
+          </a:p>
+        </p:txBody>
+      </p:sp>
+      <p:sp>
+        <p:nvSpPr>
+          <p:cNvPr id="36" name="Shape 34"/>
+          <p:cNvSpPr/>
+          <p:nvPr/>
+        </p:nvSpPr>
+        <p:spPr>
+          <a:xfrm>
+            <a:off x="731520" y="3337560"/>
+            <a:ext cx="10698480" cy="2606040"/>
+          </a:xfrm>
+          <a:prstGeom prst="rect">
+            <a:avLst/>
+          </a:prstGeom>
+          <a:solidFill>
+            <a:srgbClr val="FFFFFF"/>
+          </a:solidFill>
+          <a:ln/>
+          <a:effectLst>
+            <a:outerShdw sx="100000" sy="100000" kx="0" ky="0" algn="bl" rotWithShape="0" blurRad="63500" dist="25400" dir="8100000">
+              <a:srgbClr val="000000">
+                <a:alpha val="6000"/>
+              </a:srgbClr>
+            </a:outerShdw>
+          </a:effectLst>
+        </p:spPr>
+      </p:sp>
+      <p:sp>
+        <p:nvSpPr>
+          <p:cNvPr id="37" name="Text 35"/>
+          <p:cNvSpPr/>
+          <p:nvPr/>
+        </p:nvSpPr>
+        <p:spPr>
+          <a:xfrm>
+            <a:off x="731520" y="3337560"/>
+            <a:ext cx="10698480" cy="2606040"/>
+          </a:xfrm>
+          <a:prstGeom prst="rect">
+            <a:avLst/>
+          </a:prstGeom>
+          <a:noFill/>
+          <a:ln/>
+        </p:spPr>
+        <p:txBody>
+          <a:bodyPr wrap="square" rtlCol="0" anchor="ctr"/>
+          <a:lstStyle/>
+          <a:p>
+            <a:pPr algn="ctr" indent="0" marL="0">
+              <a:buNone/>
+            </a:pPr>
+            <a:r>
+              <a:rPr lang="en-US" sz="1000" dirty="0">
+                <a:solidFill>
+                  <a:srgbClr val="94A3B8"/>
+                </a:solidFill>
+                <a:latin typeface="Calibri" pitchFamily="34" charset="0"/>
+                <a:ea typeface="Calibri" pitchFamily="34" charset="-122"/>
+                <a:cs typeface="Calibri" pitchFamily="34" charset="-120"/>
+              </a:rPr>
+              <a:t>{{chart_csv_data}}</a:t>
+            </a:r>
+            <a:endParaRPr lang="en-US" sz="1000" dirty="0"/>
+          </a:p>
+        </p:txBody>
+      </p:sp>
+      <p:sp>
+        <p:nvSpPr>
+          <p:cNvPr id="38" name="Text 36"/>
+          <p:cNvSpPr/>
+          <p:nvPr/>
+        </p:nvSpPr>
+        <p:spPr>
+          <a:xfrm>
+            <a:off x="731520" y="6510528"/>
+            <a:ext cx="10698480" cy="256032"/>
+          </a:xfrm>
+          <a:prstGeom prst="rect">
+            <a:avLst/>
+          </a:prstGeom>
+          <a:noFill/>
+          <a:ln/>
+        </p:spPr>
+        <p:txBody>
+          <a:bodyPr wrap="square" rtlCol="0" anchor="ctr"/>
+          <a:lstStyle/>
+          <a:p>
+            <a:pPr indent="0" marL="0">
+              <a:buNone/>
+            </a:pPr>
+            <a:r>
+              <a:rPr lang="en-US" sz="800" dirty="0">
+                <a:solidFill>
+                  <a:srgbClr val="94A3B8"/>
+                </a:solidFill>
+                <a:latin typeface="Calibri" pitchFamily="34" charset="0"/>
+                <a:ea typeface="Calibri" pitchFamily="34" charset="-122"/>
+                <a:cs typeface="Calibri" pitchFamily="34" charset="-120"/>
+              </a:rPr>
+              <a:t>{{agency_name}}  •  Confidential  •  Page 14</a:t>
+            </a:r>
+            <a:endParaRPr lang="en-US" sz="800" dirty="0"/>
+          </a:p>
+        </p:txBody>
+      </p:sp>
+    </p:spTree>
+  </p:cSld>
+  <p:clrMapOvr>
+    <a:masterClrMapping/>
+  </p:clrMapOvr>
+</p:sld>
+</file>
+
+<file path=ppt/slides/slide15.xml><?xml version="1.0" encoding="utf-8"?>
+<p:sld xmlns:a="http://schemas.openxmlformats.org/drawingml/2006/main" xmlns:r="http://schemas.openxmlformats.org/officeDocument/2006/relationships" xmlns:p="http://schemas.openxmlformats.org/presentationml/2006/main">
+  <p:cSld name="Slide 15">
+    <p:bg>
+      <p:bgPr>
+        <a:solidFill>
+          <a:srgbClr val="FFFFFF"/>
+        </a:solidFill>
+      </p:bgPr>
+    </p:bg>
+    <p:spTree>
+      <p:nvGrpSpPr>
+        <p:cNvPr id="1" name=""/>
+        <p:cNvGrpSpPr/>
+        <p:nvPr/>
+      </p:nvGrpSpPr>
+      <p:grpSpPr>
+        <a:xfrm>
+          <a:off x="0" y="0"/>
+          <a:ext cx="0" cy="0"/>
+          <a:chOff x="0" y="0"/>
+          <a:chExt cx="0" cy="0"/>
+        </a:xfrm>
+      </p:grpSpPr>
+      <p:sp>
+        <p:nvSpPr>
+          <p:cNvPr id="2" name="Shape 0"/>
+          <p:cNvSpPr/>
+          <p:nvPr/>
+        </p:nvSpPr>
+        <p:spPr>
+          <a:xfrm>
+            <a:off x="0" y="0"/>
+            <a:ext cx="4864608" cy="54864"/>
+          </a:xfrm>
+          <a:prstGeom prst="rect">
+            <a:avLst/>
+          </a:prstGeom>
+          <a:solidFill>
+            <a:srgbClr val="F97316"/>
+          </a:solidFill>
+          <a:ln/>
+        </p:spPr>
+      </p:sp>
+      <p:sp>
+        <p:nvSpPr>
+          <p:cNvPr id="3" name="Shape 1"/>
+          <p:cNvSpPr/>
+          <p:nvPr/>
+        </p:nvSpPr>
+        <p:spPr>
+          <a:xfrm>
+            <a:off x="4864608" y="0"/>
+            <a:ext cx="4256532" cy="54864"/>
+          </a:xfrm>
+          <a:prstGeom prst="rect">
+            <a:avLst/>
+          </a:prstGeom>
+          <a:solidFill>
+            <a:srgbClr val="F43F5E"/>
+          </a:solidFill>
+          <a:ln/>
+        </p:spPr>
+      </p:sp>
+      <p:sp>
+        <p:nvSpPr>
+          <p:cNvPr id="4" name="Shape 2"/>
+          <p:cNvSpPr/>
+          <p:nvPr/>
+        </p:nvSpPr>
+        <p:spPr>
+          <a:xfrm>
+            <a:off x="9121140" y="0"/>
+            <a:ext cx="3040380" cy="54864"/>
+          </a:xfrm>
+          <a:prstGeom prst="rect">
+            <a:avLst/>
+          </a:prstGeom>
+          <a:solidFill>
+            <a:srgbClr val="8B5CF6"/>
+          </a:solidFill>
+          <a:ln/>
+        </p:spPr>
+      </p:sp>
+      <p:sp>
+        <p:nvSpPr>
+          <p:cNvPr id="5" name="Text 3"/>
+          <p:cNvSpPr/>
+          <p:nvPr/>
+        </p:nvSpPr>
+        <p:spPr>
+          <a:xfrm>
+            <a:off x="731520" y="320040"/>
+            <a:ext cx="10698480" cy="640080"/>
+          </a:xfrm>
+          <a:prstGeom prst="rect">
+            <a:avLst/>
+          </a:prstGeom>
+          <a:noFill/>
+          <a:ln/>
+        </p:spPr>
+        <p:txBody>
+          <a:bodyPr wrap="square" lIns="0" tIns="0" rIns="0" bIns="0" rtlCol="0" anchor="ctr"/>
+          <a:lstStyle/>
+          <a:p>
+            <a:pPr indent="0" marL="0">
+              <a:buNone/>
+            </a:pPr>
+            <a:r>
+              <a:rPr lang="en-US" sz="2800" b="1" dirty="0">
+                <a:solidFill>
+                  <a:srgbClr val="0F172A"/>
+                </a:solidFill>
+                <a:latin typeface="Calibri" pitchFamily="34" charset="0"/>
+                <a:ea typeface="Calibri" pitchFamily="34" charset="-122"/>
+                <a:cs typeface="Calibri" pitchFamily="34" charset="-120"/>
+              </a:rPr>
+              <a:t>Conversion Funnel</a:t>
+            </a:r>
+            <a:endParaRPr lang="en-US" sz="2800" dirty="0"/>
+          </a:p>
+        </p:txBody>
+      </p:sp>
+      <p:sp>
+        <p:nvSpPr>
+          <p:cNvPr id="6" name="Shape 4"/>
+          <p:cNvSpPr/>
+          <p:nvPr/>
+        </p:nvSpPr>
+        <p:spPr>
+          <a:xfrm>
+            <a:off x="731520" y="1280160"/>
+            <a:ext cx="10698480" cy="3657600"/>
+          </a:xfrm>
+          <a:prstGeom prst="rect">
+            <a:avLst/>
+          </a:prstGeom>
+          <a:solidFill>
+            <a:srgbClr val="FFFFFF"/>
+          </a:solidFill>
+          <a:ln/>
+          <a:effectLst>
+            <a:outerShdw sx="100000" sy="100000" kx="0" ky="0" algn="bl" rotWithShape="0" blurRad="63500" dist="25400" dir="8100000">
+              <a:srgbClr val="000000">
+                <a:alpha val="6000"/>
+              </a:srgbClr>
+            </a:outerShdw>
+          </a:effectLst>
+        </p:spPr>
+      </p:sp>
+      <p:sp>
+        <p:nvSpPr>
+          <p:cNvPr id="7" name="Text 5"/>
+          <p:cNvSpPr/>
+          <p:nvPr/>
+        </p:nvSpPr>
+        <p:spPr>
+          <a:xfrm>
+            <a:off x="731520" y="1280160"/>
+            <a:ext cx="10698480" cy="3657600"/>
+          </a:xfrm>
+          <a:prstGeom prst="rect">
+            <a:avLst/>
+          </a:prstGeom>
+          <a:noFill/>
+          <a:ln/>
+        </p:spPr>
+        <p:txBody>
+          <a:bodyPr wrap="square" rtlCol="0" anchor="ctr"/>
+          <a:lstStyle/>
+          <a:p>
+            <a:pPr algn="ctr" indent="0" marL="0">
+              <a:buNone/>
+            </a:pPr>
+            <a:r>
+              <a:rPr lang="en-US" sz="1000" dirty="0">
+                <a:solidFill>
+                  <a:srgbClr val="94A3B8"/>
+                </a:solidFill>
+                <a:latin typeface="Calibri" pitchFamily="34" charset="0"/>
+                <a:ea typeface="Calibri" pitchFamily="34" charset="-122"/>
+                <a:cs typeface="Calibri" pitchFamily="34" charset="-120"/>
+              </a:rPr>
+              <a:t>{{chart_conversion_funnel}}</a:t>
+            </a:r>
+            <a:endParaRPr lang="en-US" sz="1000" dirty="0"/>
+          </a:p>
+        </p:txBody>
+      </p:sp>
+      <p:sp>
+        <p:nvSpPr>
+          <p:cNvPr id="8" name="Text 6"/>
+          <p:cNvSpPr/>
+          <p:nvPr/>
+        </p:nvSpPr>
+        <p:spPr>
+          <a:xfrm>
+            <a:off x="731520" y="5212080"/>
+            <a:ext cx="10698480" cy="1097280"/>
+          </a:xfrm>
+          <a:prstGeom prst="rect">
+            <a:avLst/>
+          </a:prstGeom>
+          <a:noFill/>
+          <a:ln/>
+        </p:spPr>
+        <p:txBody>
+          <a:bodyPr wrap="square" rtlCol="0" anchor="t"/>
+          <a:lstStyle/>
+          <a:p>
+            <a:pPr indent="0" marL="0">
+              <a:lnSpc>
+                <a:spcPct val="135000"/>
+              </a:lnSpc>
+              <a:buNone/>
+            </a:pPr>
+            <a:r>
+              <a:rPr lang="en-US" sz="1200" dirty="0">
+                <a:solidFill>
+                  <a:srgbClr val="334155"/>
+                </a:solidFill>
+                <a:latin typeface="Calibri" pitchFamily="34" charset="0"/>
+                <a:ea typeface="Calibri" pitchFamily="34" charset="-122"/>
+                <a:cs typeface="Calibri" pitchFamily="34" charset="-120"/>
+              </a:rPr>
+              <a:t>{{website_narrative}}</a:t>
+            </a:r>
+            <a:endParaRPr lang="en-US" sz="1200" dirty="0"/>
+          </a:p>
+        </p:txBody>
+      </p:sp>
+      <p:sp>
+        <p:nvSpPr>
+          <p:cNvPr id="9" name="Text 7"/>
+          <p:cNvSpPr/>
+          <p:nvPr/>
+        </p:nvSpPr>
+        <p:spPr>
+          <a:xfrm>
+            <a:off x="731520" y="6510528"/>
+            <a:ext cx="10698480" cy="256032"/>
+          </a:xfrm>
+          <a:prstGeom prst="rect">
+            <a:avLst/>
+          </a:prstGeom>
+          <a:noFill/>
+          <a:ln/>
+        </p:spPr>
+        <p:txBody>
+          <a:bodyPr wrap="square" rtlCol="0" anchor="ctr"/>
+          <a:lstStyle/>
+          <a:p>
+            <a:pPr indent="0" marL="0">
+              <a:buNone/>
+            </a:pPr>
+            <a:r>
+              <a:rPr lang="en-US" sz="800" dirty="0">
+                <a:solidFill>
+                  <a:srgbClr val="94A3B8"/>
+                </a:solidFill>
+                <a:latin typeface="Calibri" pitchFamily="34" charset="0"/>
+                <a:ea typeface="Calibri" pitchFamily="34" charset="-122"/>
+                <a:cs typeface="Calibri" pitchFamily="34" charset="-120"/>
+              </a:rPr>
+              <a:t>{{agency_name}}  •  Confidential  •  Page 15</a:t>
+            </a:r>
+            <a:endParaRPr lang="en-US" sz="800" dirty="0"/>
+          </a:p>
+        </p:txBody>
+      </p:sp>
+    </p:spTree>
+  </p:cSld>
+  <p:clrMapOvr>
+    <a:masterClrMapping/>
+  </p:clrMapOvr>
+</p:sld>
+</file>
+
+<file path=ppt/slides/slide16.xml><?xml version="1.0" encoding="utf-8"?>
+<p:sld xmlns:a="http://schemas.openxmlformats.org/drawingml/2006/main" xmlns:r="http://schemas.openxmlformats.org/officeDocument/2006/relationships" xmlns:p="http://schemas.openxmlformats.org/presentationml/2006/main">
+  <p:cSld name="Slide 16">
+    <p:bg>
+      <p:bgPr>
+        <a:solidFill>
+          <a:srgbClr val="FFFFFF"/>
+        </a:solidFill>
+      </p:bgPr>
+    </p:bg>
+    <p:spTree>
+      <p:nvGrpSpPr>
+        <p:cNvPr id="1" name=""/>
+        <p:cNvGrpSpPr/>
+        <p:nvPr/>
+      </p:nvGrpSpPr>
+      <p:grpSpPr>
+        <a:xfrm>
+          <a:off x="0" y="0"/>
+          <a:ext cx="0" cy="0"/>
+          <a:chOff x="0" y="0"/>
+          <a:chExt cx="0" cy="0"/>
+        </a:xfrm>
+      </p:grpSpPr>
+      <p:sp>
+        <p:nvSpPr>
+          <p:cNvPr id="2" name="Shape 0"/>
+          <p:cNvSpPr/>
+          <p:nvPr/>
+        </p:nvSpPr>
+        <p:spPr>
+          <a:xfrm>
+            <a:off x="0" y="0"/>
+            <a:ext cx="12161520" cy="54864"/>
+          </a:xfrm>
+          <a:prstGeom prst="rect">
+            <a:avLst/>
+          </a:prstGeom>
+          <a:solidFill>
+            <a:srgbClr val="059669"/>
+          </a:solidFill>
+          <a:ln/>
+        </p:spPr>
+      </p:sp>
+      <p:sp>
+        <p:nvSpPr>
+          <p:cNvPr id="3" name="Text 1"/>
+          <p:cNvSpPr/>
+          <p:nvPr/>
+        </p:nvSpPr>
+        <p:spPr>
+          <a:xfrm>
+            <a:off x="731520" y="320040"/>
+            <a:ext cx="10698480" cy="640080"/>
+          </a:xfrm>
+          <a:prstGeom prst="rect">
+            <a:avLst/>
+          </a:prstGeom>
+          <a:noFill/>
+          <a:ln/>
+        </p:spPr>
+        <p:txBody>
+          <a:bodyPr wrap="square" lIns="0" tIns="0" rIns="0" bIns="0" rtlCol="0" anchor="ctr"/>
+          <a:lstStyle/>
+          <a:p>
+            <a:pPr indent="0" marL="0">
+              <a:buNone/>
+            </a:pPr>
+            <a:r>
+              <a:rPr lang="en-US" sz="2800" b="1" dirty="0">
+                <a:solidFill>
+                  <a:srgbClr val="059669"/>
+                </a:solidFill>
+                <a:latin typeface="Calibri" pitchFamily="34" charset="0"/>
+                <a:ea typeface="Calibri" pitchFamily="34" charset="-122"/>
+                <a:cs typeface="Calibri" pitchFamily="34" charset="-120"/>
+              </a:rPr>
+              <a:t>Key Wins &amp; Highlights</a:t>
+            </a:r>
+            <a:endParaRPr lang="en-US" sz="2800" dirty="0"/>
+          </a:p>
+        </p:txBody>
+      </p:sp>
+      <p:sp>
+        <p:nvSpPr>
+          <p:cNvPr id="4" name="Text 2"/>
+          <p:cNvSpPr/>
+          <p:nvPr/>
+        </p:nvSpPr>
+        <p:spPr>
+          <a:xfrm>
+            <a:off x="731520" y="1280160"/>
+            <a:ext cx="10698480" cy="4754880"/>
+          </a:xfrm>
+          <a:prstGeom prst="rect">
+            <a:avLst/>
+          </a:prstGeom>
+          <a:noFill/>
+          <a:ln/>
+        </p:spPr>
+        <p:txBody>
+          <a:bodyPr wrap="square" rtlCol="0" anchor="t"/>
+          <a:lstStyle/>
+          <a:p>
+            <a:pPr indent="0" marL="0">
+              <a:lnSpc>
+                <a:spcPct val="150000"/>
+              </a:lnSpc>
+              <a:buNone/>
+            </a:pPr>
+            <a:r>
+              <a:rPr lang="en-US" sz="1300" dirty="0">
+                <a:solidFill>
+                  <a:srgbClr val="334155"/>
+                </a:solidFill>
+                <a:latin typeface="Calibri" pitchFamily="34" charset="0"/>
+                <a:ea typeface="Calibri" pitchFamily="34" charset="-122"/>
+                <a:cs typeface="Calibri" pitchFamily="34" charset="-120"/>
+              </a:rPr>
+              <a:t>{{key_wins}}</a:t>
+            </a:r>
+            <a:endParaRPr lang="en-US" sz="1300" dirty="0"/>
+          </a:p>
+        </p:txBody>
+      </p:sp>
+      <p:sp>
+        <p:nvSpPr>
+          <p:cNvPr id="5" name="Text 3"/>
+          <p:cNvSpPr/>
+          <p:nvPr/>
+        </p:nvSpPr>
+        <p:spPr>
+          <a:xfrm>
+            <a:off x="731520" y="6510528"/>
+            <a:ext cx="10698480" cy="256032"/>
+          </a:xfrm>
+          <a:prstGeom prst="rect">
+            <a:avLst/>
+          </a:prstGeom>
+          <a:noFill/>
+          <a:ln/>
+        </p:spPr>
+        <p:txBody>
+          <a:bodyPr wrap="square" rtlCol="0" anchor="ctr"/>
+          <a:lstStyle/>
+          <a:p>
+            <a:pPr indent="0" marL="0">
+              <a:buNone/>
+            </a:pPr>
+            <a:r>
+              <a:rPr lang="en-US" sz="800" dirty="0">
+                <a:solidFill>
+                  <a:srgbClr val="94A3B8"/>
+                </a:solidFill>
+                <a:latin typeface="Calibri" pitchFamily="34" charset="0"/>
+                <a:ea typeface="Calibri" pitchFamily="34" charset="-122"/>
+                <a:cs typeface="Calibri" pitchFamily="34" charset="-120"/>
+              </a:rPr>
+              <a:t>{{agency_name}}  •  Confidential  •  Page 16</a:t>
+            </a:r>
+            <a:endParaRPr lang="en-US" sz="800" dirty="0"/>
+          </a:p>
+        </p:txBody>
+      </p:sp>
+    </p:spTree>
+  </p:cSld>
+  <p:clrMapOvr>
+    <a:masterClrMapping/>
+  </p:clrMapOvr>
+</p:sld>
+</file>
+
+<file path=ppt/slides/slide17.xml><?xml version="1.0" encoding="utf-8"?>
+<p:sld xmlns:a="http://schemas.openxmlformats.org/drawingml/2006/main" xmlns:r="http://schemas.openxmlformats.org/officeDocument/2006/relationships" xmlns:p="http://schemas.openxmlformats.org/presentationml/2006/main">
+  <p:cSld name="Slide 17">
+    <p:bg>
+      <p:bgPr>
+        <a:solidFill>
+          <a:srgbClr val="FFFFFF"/>
+        </a:solidFill>
+      </p:bgPr>
+    </p:bg>
+    <p:spTree>
+      <p:nvGrpSpPr>
+        <p:cNvPr id="1" name=""/>
+        <p:cNvGrpSpPr/>
+        <p:nvPr/>
+      </p:nvGrpSpPr>
+      <p:grpSpPr>
+        <a:xfrm>
+          <a:off x="0" y="0"/>
+          <a:ext cx="0" cy="0"/>
+          <a:chOff x="0" y="0"/>
+          <a:chExt cx="0" cy="0"/>
+        </a:xfrm>
+      </p:grpSpPr>
+      <p:sp>
+        <p:nvSpPr>
+          <p:cNvPr id="2" name="Shape 0"/>
+          <p:cNvSpPr/>
+          <p:nvPr/>
+        </p:nvSpPr>
+        <p:spPr>
+          <a:xfrm>
+            <a:off x="0" y="0"/>
+            <a:ext cx="12161520" cy="54864"/>
+          </a:xfrm>
+          <a:prstGeom prst="rect">
+            <a:avLst/>
+          </a:prstGeom>
+          <a:solidFill>
+            <a:srgbClr val="D97706"/>
+          </a:solidFill>
+          <a:ln/>
+        </p:spPr>
+      </p:sp>
+      <p:sp>
+        <p:nvSpPr>
+          <p:cNvPr id="3" name="Text 1"/>
+          <p:cNvSpPr/>
+          <p:nvPr/>
+        </p:nvSpPr>
+        <p:spPr>
+          <a:xfrm>
+            <a:off x="731520" y="320040"/>
+            <a:ext cx="10698480" cy="640080"/>
+          </a:xfrm>
+          <a:prstGeom prst="rect">
+            <a:avLst/>
+          </a:prstGeom>
+          <a:noFill/>
+          <a:ln/>
+        </p:spPr>
+        <p:txBody>
+          <a:bodyPr wrap="square" lIns="0" tIns="0" rIns="0" bIns="0" rtlCol="0" anchor="ctr"/>
+          <a:lstStyle/>
+          <a:p>
+            <a:pPr indent="0" marL="0">
+              <a:buNone/>
+            </a:pPr>
+            <a:r>
+              <a:rPr lang="en-US" sz="2800" b="1" dirty="0">
+                <a:solidFill>
+                  <a:srgbClr val="D97706"/>
+                </a:solidFill>
+                <a:latin typeface="Calibri" pitchFamily="34" charset="0"/>
+                <a:ea typeface="Calibri" pitchFamily="34" charset="-122"/>
+                <a:cs typeface="Calibri" pitchFamily="34" charset="-120"/>
+              </a:rPr>
+              <a:t>Concerns &amp; Recommendations</a:t>
+            </a:r>
+            <a:endParaRPr lang="en-US" sz="2800" dirty="0"/>
+          </a:p>
+        </p:txBody>
+      </p:sp>
+      <p:sp>
+        <p:nvSpPr>
+          <p:cNvPr id="4" name="Text 2"/>
+          <p:cNvSpPr/>
+          <p:nvPr/>
+        </p:nvSpPr>
+        <p:spPr>
+          <a:xfrm>
+            <a:off x="731520" y="1280160"/>
+            <a:ext cx="10698480" cy="4754880"/>
+          </a:xfrm>
+          <a:prstGeom prst="rect">
+            <a:avLst/>
+          </a:prstGeom>
+          <a:noFill/>
+          <a:ln/>
+        </p:spPr>
+        <p:txBody>
+          <a:bodyPr wrap="square" rtlCol="0" anchor="t"/>
+          <a:lstStyle/>
+          <a:p>
+            <a:pPr indent="0" marL="0">
+              <a:lnSpc>
+                <a:spcPct val="150000"/>
+              </a:lnSpc>
+              <a:buNone/>
+            </a:pPr>
+            <a:r>
+              <a:rPr lang="en-US" sz="1300" dirty="0">
+                <a:solidFill>
+                  <a:srgbClr val="334155"/>
+                </a:solidFill>
+                <a:latin typeface="Calibri" pitchFamily="34" charset="0"/>
+                <a:ea typeface="Calibri" pitchFamily="34" charset="-122"/>
+                <a:cs typeface="Calibri" pitchFamily="34" charset="-120"/>
+              </a:rPr>
+              <a:t>{{concerns}}</a:t>
+            </a:r>
+            <a:endParaRPr lang="en-US" sz="1300" dirty="0"/>
+          </a:p>
+        </p:txBody>
+      </p:sp>
+      <p:sp>
+        <p:nvSpPr>
+          <p:cNvPr id="5" name="Text 3"/>
+          <p:cNvSpPr/>
+          <p:nvPr/>
+        </p:nvSpPr>
+        <p:spPr>
+          <a:xfrm>
+            <a:off x="731520" y="6510528"/>
+            <a:ext cx="10698480" cy="256032"/>
+          </a:xfrm>
+          <a:prstGeom prst="rect">
+            <a:avLst/>
+          </a:prstGeom>
+          <a:noFill/>
+          <a:ln/>
+        </p:spPr>
+        <p:txBody>
+          <a:bodyPr wrap="square" rtlCol="0" anchor="ctr"/>
+          <a:lstStyle/>
+          <a:p>
+            <a:pPr indent="0" marL="0">
+              <a:buNone/>
+            </a:pPr>
+            <a:r>
+              <a:rPr lang="en-US" sz="800" dirty="0">
+                <a:solidFill>
+                  <a:srgbClr val="94A3B8"/>
+                </a:solidFill>
+                <a:latin typeface="Calibri" pitchFamily="34" charset="0"/>
+                <a:ea typeface="Calibri" pitchFamily="34" charset="-122"/>
+                <a:cs typeface="Calibri" pitchFamily="34" charset="-120"/>
+              </a:rPr>
+              <a:t>{{agency_name}}  •  Confidential  •  Page 17</a:t>
+            </a:r>
+            <a:endParaRPr lang="en-US" sz="800" dirty="0"/>
+          </a:p>
+        </p:txBody>
+      </p:sp>
+    </p:spTree>
+  </p:cSld>
+  <p:clrMapOvr>
+    <a:masterClrMapping/>
+  </p:clrMapOvr>
+</p:sld>
+</file>
+
+<file path=ppt/slides/slide18.xml><?xml version="1.0" encoding="utf-8"?>
+<p:sld xmlns:a="http://schemas.openxmlformats.org/drawingml/2006/main" xmlns:r="http://schemas.openxmlformats.org/officeDocument/2006/relationships" xmlns:p="http://schemas.openxmlformats.org/presentationml/2006/main">
+  <p:cSld name="Slide 18">
+    <p:bg>
+      <p:bgPr>
+        <a:solidFill>
+          <a:srgbClr val="FFFFFF"/>
+        </a:solidFill>
+      </p:bgPr>
+    </p:bg>
+    <p:spTree>
+      <p:nvGrpSpPr>
+        <p:cNvPr id="1" name=""/>
+        <p:cNvGrpSpPr/>
+        <p:nvPr/>
+      </p:nvGrpSpPr>
+      <p:grpSpPr>
+        <a:xfrm>
+          <a:off x="0" y="0"/>
+          <a:ext cx="0" cy="0"/>
+          <a:chOff x="0" y="0"/>
+          <a:chExt cx="0" cy="0"/>
+        </a:xfrm>
+      </p:grpSpPr>
+      <p:sp>
+        <p:nvSpPr>
+          <p:cNvPr id="2" name="Shape 0"/>
+          <p:cNvSpPr/>
+          <p:nvPr/>
+        </p:nvSpPr>
+        <p:spPr>
+          <a:xfrm>
+            <a:off x="0" y="0"/>
+            <a:ext cx="4864608" cy="54864"/>
+          </a:xfrm>
+          <a:prstGeom prst="rect">
+            <a:avLst/>
+          </a:prstGeom>
+          <a:solidFill>
+            <a:srgbClr val="F97316"/>
+          </a:solidFill>
+          <a:ln/>
+        </p:spPr>
+      </p:sp>
+      <p:sp>
+        <p:nvSpPr>
+          <p:cNvPr id="3" name="Shape 1"/>
+          <p:cNvSpPr/>
+          <p:nvPr/>
+        </p:nvSpPr>
+        <p:spPr>
+          <a:xfrm>
+            <a:off x="4864608" y="0"/>
+            <a:ext cx="4256532" cy="54864"/>
+          </a:xfrm>
+          <a:prstGeom prst="rect">
+            <a:avLst/>
+          </a:prstGeom>
+          <a:solidFill>
+            <a:srgbClr val="F43F5E"/>
+          </a:solidFill>
+          <a:ln/>
+        </p:spPr>
+      </p:sp>
+      <p:sp>
+        <p:nvSpPr>
+          <p:cNvPr id="4" name="Shape 2"/>
+          <p:cNvSpPr/>
+          <p:nvPr/>
+        </p:nvSpPr>
+        <p:spPr>
+          <a:xfrm>
+            <a:off x="9121140" y="0"/>
+            <a:ext cx="3040380" cy="54864"/>
+          </a:xfrm>
+          <a:prstGeom prst="rect">
+            <a:avLst/>
+          </a:prstGeom>
+          <a:solidFill>
+            <a:srgbClr val="8B5CF6"/>
+          </a:solidFill>
+          <a:ln/>
+        </p:spPr>
+      </p:sp>
+      <p:sp>
+        <p:nvSpPr>
+          <p:cNvPr id="5" name="Text 3"/>
+          <p:cNvSpPr/>
+          <p:nvPr/>
+        </p:nvSpPr>
+        <p:spPr>
+          <a:xfrm>
+            <a:off x="731520" y="320040"/>
+            <a:ext cx="10698480" cy="640080"/>
+          </a:xfrm>
+          <a:prstGeom prst="rect">
+            <a:avLst/>
+          </a:prstGeom>
+          <a:noFill/>
+          <a:ln/>
+        </p:spPr>
+        <p:txBody>
+          <a:bodyPr wrap="square" lIns="0" tIns="0" rIns="0" bIns="0" rtlCol="0" anchor="ctr"/>
+          <a:lstStyle/>
+          <a:p>
+            <a:pPr indent="0" marL="0">
+              <a:buNone/>
+            </a:pPr>
+            <a:r>
+              <a:rPr lang="en-US" sz="2800" b="1" dirty="0">
+                <a:solidFill>
+                  <a:srgbClr val="0F172A"/>
+                </a:solidFill>
+                <a:latin typeface="Calibri" pitchFamily="34" charset="0"/>
+                <a:ea typeface="Calibri" pitchFamily="34" charset="-122"/>
+                <a:cs typeface="Calibri" pitchFamily="34" charset="-120"/>
+              </a:rPr>
+              <a:t>Next Steps &amp; Action Items</a:t>
+            </a:r>
+            <a:endParaRPr lang="en-US" sz="2800" dirty="0"/>
+          </a:p>
+        </p:txBody>
+      </p:sp>
+      <p:sp>
+        <p:nvSpPr>
+          <p:cNvPr id="6" name="Text 4"/>
+          <p:cNvSpPr/>
+          <p:nvPr/>
+        </p:nvSpPr>
+        <p:spPr>
+          <a:xfrm>
+            <a:off x="731520" y="1280160"/>
+            <a:ext cx="10698480" cy="3840480"/>
+          </a:xfrm>
+          <a:prstGeom prst="rect">
+            <a:avLst/>
+          </a:prstGeom>
+          <a:noFill/>
+          <a:ln/>
+        </p:spPr>
+        <p:txBody>
+          <a:bodyPr wrap="square" rtlCol="0" anchor="t"/>
+          <a:lstStyle/>
+          <a:p>
+            <a:pPr indent="0" marL="0">
+              <a:lnSpc>
+                <a:spcPct val="150000"/>
+              </a:lnSpc>
+              <a:buNone/>
+            </a:pPr>
+            <a:r>
+              <a:rPr lang="en-US" sz="1300" dirty="0">
+                <a:solidFill>
+                  <a:srgbClr val="334155"/>
+                </a:solidFill>
+                <a:latin typeface="Calibri" pitchFamily="34" charset="0"/>
+                <a:ea typeface="Calibri" pitchFamily="34" charset="-122"/>
+                <a:cs typeface="Calibri" pitchFamily="34" charset="-120"/>
+              </a:rPr>
+              <a:t>{{next_steps}}</a:t>
+            </a:r>
+            <a:endParaRPr lang="en-US" sz="1300" dirty="0"/>
+          </a:p>
+        </p:txBody>
+      </p:sp>
+      <p:sp>
+        <p:nvSpPr>
+          <p:cNvPr id="7" name="Shape 5"/>
+          <p:cNvSpPr/>
+          <p:nvPr/>
+        </p:nvSpPr>
+        <p:spPr>
+          <a:xfrm>
+            <a:off x="0" y="5760720"/>
+            <a:ext cx="4864608" cy="1097280"/>
+          </a:xfrm>
+          <a:prstGeom prst="rect">
+            <a:avLst/>
+          </a:prstGeom>
+          <a:solidFill>
+            <a:srgbClr val="F97316"/>
+          </a:solidFill>
+          <a:ln/>
+        </p:spPr>
+      </p:sp>
+      <p:sp>
+        <p:nvSpPr>
+          <p:cNvPr id="8" name="Shape 6"/>
+          <p:cNvSpPr/>
+          <p:nvPr/>
+        </p:nvSpPr>
+        <p:spPr>
+          <a:xfrm>
+            <a:off x="4864608" y="5760720"/>
+            <a:ext cx="4256532" cy="1097280"/>
+          </a:xfrm>
+          <a:prstGeom prst="rect">
+            <a:avLst/>
+          </a:prstGeom>
+          <a:solidFill>
+            <a:srgbClr val="F43F5E"/>
+          </a:solidFill>
+          <a:ln/>
+        </p:spPr>
+      </p:sp>
+      <p:sp>
+        <p:nvSpPr>
+          <p:cNvPr id="9" name="Shape 7"/>
+          <p:cNvSpPr/>
+          <p:nvPr/>
+        </p:nvSpPr>
+        <p:spPr>
+          <a:xfrm>
+            <a:off x="9121140" y="5760720"/>
+            <a:ext cx="3040380" cy="1097280"/>
+          </a:xfrm>
+          <a:prstGeom prst="rect">
+            <a:avLst/>
+          </a:prstGeom>
+          <a:solidFill>
+            <a:srgbClr val="8B5CF6"/>
+          </a:solidFill>
+          <a:ln/>
+        </p:spPr>
+      </p:sp>
+      <p:sp>
+        <p:nvSpPr>
+          <p:cNvPr id="10" name="Text 8"/>
+          <p:cNvSpPr/>
+          <p:nvPr/>
+        </p:nvSpPr>
+        <p:spPr>
+          <a:xfrm>
+            <a:off x="731520" y="5806440"/>
+            <a:ext cx="10698480" cy="411480"/>
+          </a:xfrm>
+          <a:prstGeom prst="rect">
+            <a:avLst/>
+          </a:prstGeom>
+          <a:noFill/>
+          <a:ln/>
+        </p:spPr>
+        <p:txBody>
+          <a:bodyPr wrap="square" rtlCol="0" anchor="ctr"/>
+          <a:lstStyle/>
+          <a:p>
+            <a:pPr indent="0" marL="0">
+              <a:buNone/>
+            </a:pPr>
+            <a:r>
+              <a:rPr lang="en-US" sz="1300" b="1" dirty="0">
+                <a:solidFill>
+                  <a:srgbClr val="FFFFFF"/>
+                </a:solidFill>
+                <a:latin typeface="Calibri" pitchFamily="34" charset="0"/>
+                <a:ea typeface="Calibri" pitchFamily="34" charset="-122"/>
+                <a:cs typeface="Calibri" pitchFamily="34" charset="-120"/>
+              </a:rPr>
+              <a:t>Questions? Reply to this email or schedule a call.</a:t>
+            </a:r>
+            <a:endParaRPr lang="en-US" sz="1300" dirty="0"/>
+          </a:p>
+        </p:txBody>
+      </p:sp>
+      <p:sp>
+        <p:nvSpPr>
+          <p:cNvPr id="11" name="Text 9"/>
+          <p:cNvSpPr/>
+          <p:nvPr/>
+        </p:nvSpPr>
+        <p:spPr>
+          <a:xfrm>
+            <a:off x="731520" y="6263640"/>
+            <a:ext cx="10698480" cy="320040"/>
+          </a:xfrm>
+          <a:prstGeom prst="rect">
+            <a:avLst/>
+          </a:prstGeom>
+          <a:noFill/>
+          <a:ln/>
+        </p:spPr>
+        <p:txBody>
+          <a:bodyPr wrap="square" rtlCol="0" anchor="ctr"/>
+          <a:lstStyle/>
+          <a:p>
+            <a:pPr indent="0" marL="0">
+              <a:buNone/>
+            </a:pPr>
+            <a:r>
+              <a:rPr lang="en-US" sz="1100" dirty="0">
+                <a:solidFill>
+                  <a:srgbClr val="FECDD3"/>
+                </a:solidFill>
+                <a:latin typeface="Calibri" pitchFamily="34" charset="0"/>
+                <a:ea typeface="Calibri" pitchFamily="34" charset="-122"/>
+                <a:cs typeface="Calibri" pitchFamily="34" charset="-120"/>
+              </a:rPr>
+              <a:t>{{agency_name}}  •  {{agency_email}}</a:t>
+            </a:r>
+            <a:endParaRPr lang="en-US" sz="1100" dirty="0"/>
+          </a:p>
+        </p:txBody>
+      </p:sp>
+    </p:spTree>
+  </p:cSld>
+  <p:clrMapOvr>
+    <a:masterClrMapping/>
+  </p:clrMapOvr>
+</p:sld>
+</file>
+
+<file path=ppt/slides/slide19.xml><?xml version="1.0" encoding="utf-8"?>
+<p:sld xmlns:a="http://schemas.openxmlformats.org/drawingml/2006/main" xmlns:r="http://schemas.openxmlformats.org/officeDocument/2006/relationships" xmlns:p="http://schemas.openxmlformats.org/presentationml/2006/main">
+  <p:cSld name="Slide 19">
+    <p:bg>
+      <p:bgPr>
+        <a:solidFill>
+          <a:srgbClr val="FFFFFF"/>
+        </a:solidFill>
+      </p:bgPr>
+    </p:bg>
+    <p:spTree>
+      <p:nvGrpSpPr>
+        <p:cNvPr id="1" name=""/>
+        <p:cNvGrpSpPr/>
+        <p:nvPr/>
+      </p:nvGrpSpPr>
+      <p:grpSpPr>
+        <a:xfrm>
+          <a:off x="0" y="0"/>
+          <a:ext cx="0" cy="0"/>
+          <a:chOff x="0" y="0"/>
+          <a:chExt cx="0" cy="0"/>
+        </a:xfrm>
+      </p:grpSpPr>
+      <p:sp>
+        <p:nvSpPr>
+          <p:cNvPr id="2" name="Shape 0"/>
+          <p:cNvSpPr/>
+          <p:nvPr/>
+        </p:nvSpPr>
+        <p:spPr>
+          <a:xfrm>
+            <a:off x="0" y="0"/>
+            <a:ext cx="4864608" cy="54864"/>
+          </a:xfrm>
+          <a:prstGeom prst="rect">
+            <a:avLst/>
+          </a:prstGeom>
+          <a:solidFill>
+            <a:srgbClr val="F97316"/>
+          </a:solidFill>
+          <a:ln/>
+        </p:spPr>
+      </p:sp>
+      <p:sp>
+        <p:nvSpPr>
+          <p:cNvPr id="3" name="Shape 1"/>
+          <p:cNvSpPr/>
+          <p:nvPr/>
+        </p:nvSpPr>
+        <p:spPr>
+          <a:xfrm>
+            <a:off x="4864608" y="0"/>
+            <a:ext cx="4256532" cy="54864"/>
+          </a:xfrm>
+          <a:prstGeom prst="rect">
+            <a:avLst/>
+          </a:prstGeom>
+          <a:solidFill>
+            <a:srgbClr val="F43F5E"/>
+          </a:solidFill>
+          <a:ln/>
+        </p:spPr>
+      </p:sp>
+      <p:sp>
+        <p:nvSpPr>
+          <p:cNvPr id="4" name="Shape 2"/>
+          <p:cNvSpPr/>
+          <p:nvPr/>
+        </p:nvSpPr>
+        <p:spPr>
+          <a:xfrm>
+            <a:off x="9121140" y="0"/>
+            <a:ext cx="3040380" cy="54864"/>
+          </a:xfrm>
+          <a:prstGeom prst="rect">
+            <a:avLst/>
+          </a:prstGeom>
+          <a:solidFill>
+            <a:srgbClr val="8B5CF6"/>
+          </a:solidFill>
+          <a:ln/>
+        </p:spPr>
+      </p:sp>
+      <p:sp>
+        <p:nvSpPr>
+          <p:cNvPr id="5" name="Text 3"/>
+          <p:cNvSpPr/>
+          <p:nvPr/>
+        </p:nvSpPr>
+        <p:spPr>
+          <a:xfrm>
+            <a:off x="731520" y="320040"/>
+            <a:ext cx="10698480" cy="640080"/>
+          </a:xfrm>
+          <a:prstGeom prst="rect">
+            <a:avLst/>
+          </a:prstGeom>
+          <a:noFill/>
+          <a:ln/>
+        </p:spPr>
+        <p:txBody>
+          <a:bodyPr wrap="square" rtlCol="0" anchor="ctr"/>
+          <a:lstStyle/>
+          <a:p>
+            <a:pPr indent="0" marL="0">
+              <a:buNone/>
+            </a:pPr>
+            <a:r>
+              <a:rPr lang="en-US" sz="2800" b="1" dirty="0">
+                <a:solidFill>
+                  <a:srgbClr val="0F172A"/>
+                </a:solidFill>
+                <a:latin typeface="Calibri" pitchFamily="34" charset="0"/>
+                <a:ea typeface="Calibri" pitchFamily="34" charset="-122"/>
+                <a:cs typeface="Calibri" pitchFamily="34" charset="-120"/>
+              </a:rPr>
+              <a:t>{{custom_section_title}}</a:t>
+            </a:r>
+            <a:endParaRPr lang="en-US" sz="2800" dirty="0"/>
+          </a:p>
+        </p:txBody>
+      </p:sp>
+      <p:sp>
+        <p:nvSpPr>
+          <p:cNvPr id="6" name="Text 4"/>
+          <p:cNvSpPr/>
+          <p:nvPr/>
+        </p:nvSpPr>
+        <p:spPr>
+          <a:xfrm>
+            <a:off x="731520" y="1280160"/>
+            <a:ext cx="10698480" cy="4754880"/>
+          </a:xfrm>
+          <a:prstGeom prst="rect">
+            <a:avLst/>
+          </a:prstGeom>
+          <a:noFill/>
+          <a:ln/>
+        </p:spPr>
+        <p:txBody>
+          <a:bodyPr wrap="square" rtlCol="0" anchor="t"/>
+          <a:lstStyle/>
+          <a:p>
+            <a:pPr indent="0" marL="0">
+              <a:lnSpc>
+                <a:spcPct val="140000"/>
+              </a:lnSpc>
+              <a:buNone/>
+            </a:pPr>
+            <a:r>
+              <a:rPr lang="en-US" sz="1300" dirty="0">
+                <a:solidFill>
+                  <a:srgbClr val="334155"/>
+                </a:solidFill>
+                <a:latin typeface="Calibri" pitchFamily="34" charset="0"/>
+                <a:ea typeface="Calibri" pitchFamily="34" charset="-122"/>
+                <a:cs typeface="Calibri" pitchFamily="34" charset="-120"/>
+              </a:rPr>
+              <a:t>{{custom_section_text}}</a:t>
+            </a:r>
+            <a:endParaRPr lang="en-US" sz="1300" dirty="0"/>
+          </a:p>
+        </p:txBody>
+      </p:sp>
+      <p:sp>
+        <p:nvSpPr>
+          <p:cNvPr id="7" name="Text 5"/>
+          <p:cNvSpPr/>
+          <p:nvPr/>
+        </p:nvSpPr>
+        <p:spPr>
+          <a:xfrm>
+            <a:off x="731520" y="6510528"/>
+            <a:ext cx="10698480" cy="256032"/>
+          </a:xfrm>
+          <a:prstGeom prst="rect">
+            <a:avLst/>
+          </a:prstGeom>
+          <a:noFill/>
+          <a:ln/>
+        </p:spPr>
+        <p:txBody>
+          <a:bodyPr wrap="square" rtlCol="0" anchor="ctr"/>
+          <a:lstStyle/>
+          <a:p>
+            <a:pPr indent="0" marL="0">
+              <a:buNone/>
+            </a:pPr>
+            <a:r>
+              <a:rPr lang="en-US" sz="800" dirty="0">
+                <a:solidFill>
+                  <a:srgbClr val="94A3B8"/>
+                </a:solidFill>
+                <a:latin typeface="Calibri" pitchFamily="34" charset="0"/>
+                <a:ea typeface="Calibri" pitchFamily="34" charset="-122"/>
+                <a:cs typeface="Calibri" pitchFamily="34" charset="-120"/>
+              </a:rPr>
+              <a:t>{{agency_name}}  •  Confidential  •  Page 19</a:t>
+            </a:r>
+            <a:endParaRPr lang="en-US" sz="800" dirty="0"/>
+          </a:p>
+        </p:txBody>
+      </p:sp>
+    </p:spTree>
+  </p:cSld>
+  <p:clrMapOvr>
+    <a:masterClrMapping/>
+  </p:clrMapOvr>
+</p:sld>
+</file>
+
 <file path=ppt/slides/slide2.xml><?xml version="1.0" encoding="utf-8"?>
 <p:sld xmlns:a="http://schemas.openxmlformats.org/drawingml/2006/main" xmlns:r="http://schemas.openxmlformats.org/officeDocument/2006/relationships" xmlns:p="http://schemas.openxmlformats.org/presentationml/2006/main">
   <p:cSld name="Slide 2">
@@ -3935,7 +8320,7 @@
                 <a:ea typeface="Calibri" pitchFamily="34" charset="-122"/>
                 <a:cs typeface="Calibri" pitchFamily="34" charset="-120"/>
               </a:rPr>
-              <a:t>Paid Advertising — Meta Ads</a:t>
+              <a:t>Website Engagement</a:t>
             </a:r>
             <a:endParaRPr lang="en-US" sz="2800" dirty="0"/>
           </a:p>
@@ -4001,7 +8386,7 @@
                 <a:ea typeface="Calibri" pitchFamily="34" charset="-122"/>
                 <a:cs typeface="Calibri" pitchFamily="34" charset="-120"/>
               </a:rPr>
-              <a:t>{{chart_spend}}</a:t>
+              <a:t>{{chart_device_breakdown}}</a:t>
             </a:r>
             <a:endParaRPr lang="en-US" sz="1000" dirty="0"/>
           </a:p>
@@ -4067,7 +8452,7 @@
                 <a:ea typeface="Calibri" pitchFamily="34" charset="-122"/>
                 <a:cs typeface="Calibri" pitchFamily="34" charset="-120"/>
               </a:rPr>
-              <a:t>{{chart_campaigns}}</a:t>
+              <a:t>{{chart_top_pages}}</a:t>
             </a:r>
             <a:endParaRPr lang="en-US" sz="1000" dirty="0"/>
           </a:p>
@@ -4109,7 +8494,7 @@
                 <a:ea typeface="Calibri" pitchFamily="34" charset="-122"/>
                 <a:cs typeface="Calibri" pitchFamily="34" charset="-120"/>
               </a:rPr>
-              <a:t>{{ads_narrative}}</a:t>
+              <a:t>{{website_narrative}}</a:t>
             </a:r>
             <a:endParaRPr lang="en-US" sz="1200" dirty="0"/>
           </a:p>
@@ -4195,20 +8580,60 @@
         <p:spPr>
           <a:xfrm>
             <a:off x="0" y="0"/>
-            <a:ext cx="12161520" cy="54864"/>
-          </a:xfrm>
-          <a:prstGeom prst="rect">
-            <a:avLst/>
-          </a:prstGeom>
-          <a:solidFill>
-            <a:srgbClr val="059669"/>
-          </a:solidFill>
-          <a:ln/>
-        </p:spPr>
-      </p:sp>
-      <p:sp>
-        <p:nvSpPr>
-          <p:cNvPr id="3" name="Text 1"/>
+            <a:ext cx="4864608" cy="54864"/>
+          </a:xfrm>
+          <a:prstGeom prst="rect">
+            <a:avLst/>
+          </a:prstGeom>
+          <a:solidFill>
+            <a:srgbClr val="F97316"/>
+          </a:solidFill>
+          <a:ln/>
+        </p:spPr>
+      </p:sp>
+      <p:sp>
+        <p:nvSpPr>
+          <p:cNvPr id="3" name="Shape 1"/>
+          <p:cNvSpPr/>
+          <p:nvPr/>
+        </p:nvSpPr>
+        <p:spPr>
+          <a:xfrm>
+            <a:off x="4864608" y="0"/>
+            <a:ext cx="4256532" cy="54864"/>
+          </a:xfrm>
+          <a:prstGeom prst="rect">
+            <a:avLst/>
+          </a:prstGeom>
+          <a:solidFill>
+            <a:srgbClr val="F43F5E"/>
+          </a:solidFill>
+          <a:ln/>
+        </p:spPr>
+      </p:sp>
+      <p:sp>
+        <p:nvSpPr>
+          <p:cNvPr id="4" name="Shape 2"/>
+          <p:cNvSpPr/>
+          <p:nvPr/>
+        </p:nvSpPr>
+        <p:spPr>
+          <a:xfrm>
+            <a:off x="9121140" y="0"/>
+            <a:ext cx="3040380" cy="54864"/>
+          </a:xfrm>
+          <a:prstGeom prst="rect">
+            <a:avLst/>
+          </a:prstGeom>
+          <a:solidFill>
+            <a:srgbClr val="8B5CF6"/>
+          </a:solidFill>
+          <a:ln/>
+        </p:spPr>
+      </p:sp>
+      <p:sp>
+        <p:nvSpPr>
+          <p:cNvPr id="5" name="Text 3"/>
           <p:cNvSpPr/>
           <p:nvPr/>
         </p:nvSpPr>
@@ -4233,13 +8658,13 @@
             <a:r>
               <a:rPr lang="en-US" sz="2800" b="1" dirty="0">
                 <a:solidFill>
-                  <a:srgbClr val="059669"/>
-                </a:solidFill>
-                <a:latin typeface="Calibri" pitchFamily="34" charset="0"/>
-                <a:ea typeface="Calibri" pitchFamily="34" charset="-122"/>
-                <a:cs typeface="Calibri" pitchFamily="34" charset="-120"/>
-              </a:rPr>
-              <a:t>Key Wins &amp; Highlights</a:t>
+                  <a:srgbClr val="0F172A"/>
+                </a:solidFill>
+                <a:latin typeface="Calibri" pitchFamily="34" charset="0"/>
+                <a:ea typeface="Calibri" pitchFamily="34" charset="-122"/>
+                <a:cs typeface="Calibri" pitchFamily="34" charset="-120"/>
+              </a:rPr>
+              <a:t>Audience Insights</a:t>
             </a:r>
             <a:endParaRPr lang="en-US" sz="2800" dirty="0"/>
           </a:p>
@@ -4247,14 +8672,146 @@
       </p:sp>
       <p:sp>
         <p:nvSpPr>
-          <p:cNvPr id="4" name="Text 2"/>
+          <p:cNvPr id="6" name="Shape 4"/>
           <p:cNvSpPr/>
           <p:nvPr/>
         </p:nvSpPr>
         <p:spPr>
           <a:xfrm>
             <a:off x="731520" y="1280160"/>
-            <a:ext cx="10698480" cy="4754880"/>
+            <a:ext cx="5120640" cy="2743200"/>
+          </a:xfrm>
+          <a:prstGeom prst="rect">
+            <a:avLst/>
+          </a:prstGeom>
+          <a:solidFill>
+            <a:srgbClr val="FFFFFF"/>
+          </a:solidFill>
+          <a:ln/>
+          <a:effectLst>
+            <a:outerShdw sx="100000" sy="100000" kx="0" ky="0" algn="bl" rotWithShape="0" blurRad="63500" dist="25400" dir="8100000">
+              <a:srgbClr val="000000">
+                <a:alpha val="6000"/>
+              </a:srgbClr>
+            </a:outerShdw>
+          </a:effectLst>
+        </p:spPr>
+      </p:sp>
+      <p:sp>
+        <p:nvSpPr>
+          <p:cNvPr id="7" name="Text 5"/>
+          <p:cNvSpPr/>
+          <p:nvPr/>
+        </p:nvSpPr>
+        <p:spPr>
+          <a:xfrm>
+            <a:off x="731520" y="1280160"/>
+            <a:ext cx="5120640" cy="2743200"/>
+          </a:xfrm>
+          <a:prstGeom prst="rect">
+            <a:avLst/>
+          </a:prstGeom>
+          <a:noFill/>
+          <a:ln/>
+        </p:spPr>
+        <p:txBody>
+          <a:bodyPr wrap="square" rtlCol="0" anchor="ctr"/>
+          <a:lstStyle/>
+          <a:p>
+            <a:pPr algn="ctr" indent="0" marL="0">
+              <a:buNone/>
+            </a:pPr>
+            <a:r>
+              <a:rPr lang="en-US" sz="1000" dirty="0">
+                <a:solidFill>
+                  <a:srgbClr val="94A3B8"/>
+                </a:solidFill>
+                <a:latin typeface="Calibri" pitchFamily="34" charset="0"/>
+                <a:ea typeface="Calibri" pitchFamily="34" charset="-122"/>
+                <a:cs typeface="Calibri" pitchFamily="34" charset="-120"/>
+              </a:rPr>
+              <a:t>{{chart_new_vs_returning}}</a:t>
+            </a:r>
+            <a:endParaRPr lang="en-US" sz="1000" dirty="0"/>
+          </a:p>
+        </p:txBody>
+      </p:sp>
+      <p:sp>
+        <p:nvSpPr>
+          <p:cNvPr id="8" name="Shape 6"/>
+          <p:cNvSpPr/>
+          <p:nvPr/>
+        </p:nvSpPr>
+        <p:spPr>
+          <a:xfrm>
+            <a:off x="6217920" y="1280160"/>
+            <a:ext cx="5212080" cy="2743200"/>
+          </a:xfrm>
+          <a:prstGeom prst="rect">
+            <a:avLst/>
+          </a:prstGeom>
+          <a:solidFill>
+            <a:srgbClr val="FFFFFF"/>
+          </a:solidFill>
+          <a:ln/>
+          <a:effectLst>
+            <a:outerShdw sx="100000" sy="100000" kx="0" ky="0" algn="bl" rotWithShape="0" blurRad="63500" dist="25400" dir="8100000">
+              <a:srgbClr val="000000">
+                <a:alpha val="6000"/>
+              </a:srgbClr>
+            </a:outerShdw>
+          </a:effectLst>
+        </p:spPr>
+      </p:sp>
+      <p:sp>
+        <p:nvSpPr>
+          <p:cNvPr id="9" name="Text 7"/>
+          <p:cNvSpPr/>
+          <p:nvPr/>
+        </p:nvSpPr>
+        <p:spPr>
+          <a:xfrm>
+            <a:off x="6217920" y="1280160"/>
+            <a:ext cx="5212080" cy="2743200"/>
+          </a:xfrm>
+          <a:prstGeom prst="rect">
+            <a:avLst/>
+          </a:prstGeom>
+          <a:noFill/>
+          <a:ln/>
+        </p:spPr>
+        <p:txBody>
+          <a:bodyPr wrap="square" rtlCol="0" anchor="ctr"/>
+          <a:lstStyle/>
+          <a:p>
+            <a:pPr algn="ctr" indent="0" marL="0">
+              <a:buNone/>
+            </a:pPr>
+            <a:r>
+              <a:rPr lang="en-US" sz="1000" dirty="0">
+                <a:solidFill>
+                  <a:srgbClr val="94A3B8"/>
+                </a:solidFill>
+                <a:latin typeface="Calibri" pitchFamily="34" charset="0"/>
+                <a:ea typeface="Calibri" pitchFamily="34" charset="-122"/>
+                <a:cs typeface="Calibri" pitchFamily="34" charset="-120"/>
+              </a:rPr>
+              <a:t>{{chart_top_countries}}</a:t>
+            </a:r>
+            <a:endParaRPr lang="en-US" sz="1000" dirty="0"/>
+          </a:p>
+        </p:txBody>
+      </p:sp>
+      <p:sp>
+        <p:nvSpPr>
+          <p:cNvPr id="10" name="Text 8"/>
+          <p:cNvSpPr/>
+          <p:nvPr/>
+        </p:nvSpPr>
+        <p:spPr>
+          <a:xfrm>
+            <a:off x="731520" y="4297680"/>
+            <a:ext cx="10698480" cy="1920240"/>
           </a:xfrm>
           <a:prstGeom prst="rect">
             <a:avLst/>
@@ -4268,12 +8825,12 @@
           <a:p>
             <a:pPr indent="0" marL="0">
               <a:lnSpc>
-                <a:spcPct val="150000"/>
+                <a:spcPct val="135000"/>
               </a:lnSpc>
               <a:buNone/>
             </a:pPr>
             <a:r>
-              <a:rPr lang="en-US" sz="1300" dirty="0">
+              <a:rPr lang="en-US" sz="1200" dirty="0">
                 <a:solidFill>
                   <a:srgbClr val="334155"/>
                 </a:solidFill>
@@ -4281,15 +8838,15 @@
                 <a:ea typeface="Calibri" pitchFamily="34" charset="-122"/>
                 <a:cs typeface="Calibri" pitchFamily="34" charset="-120"/>
               </a:rPr>
-              <a:t>{{key_wins}}</a:t>
-            </a:r>
-            <a:endParaRPr lang="en-US" sz="1300" dirty="0"/>
-          </a:p>
-        </p:txBody>
-      </p:sp>
-      <p:sp>
-        <p:nvSpPr>
-          <p:cNvPr id="5" name="Text 3"/>
+              <a:t>{{website_narrative}}</a:t>
+            </a:r>
+            <a:endParaRPr lang="en-US" sz="1200" dirty="0"/>
+          </a:p>
+        </p:txBody>
+      </p:sp>
+      <p:sp>
+        <p:nvSpPr>
+          <p:cNvPr id="11" name="Text 9"/>
           <p:cNvSpPr/>
           <p:nvPr/>
         </p:nvSpPr>
@@ -4367,20 +8924,60 @@
         <p:spPr>
           <a:xfrm>
             <a:off x="0" y="0"/>
-            <a:ext cx="12161520" cy="54864"/>
-          </a:xfrm>
-          <a:prstGeom prst="rect">
-            <a:avLst/>
-          </a:prstGeom>
-          <a:solidFill>
-            <a:srgbClr val="D97706"/>
-          </a:solidFill>
-          <a:ln/>
-        </p:spPr>
-      </p:sp>
-      <p:sp>
-        <p:nvSpPr>
-          <p:cNvPr id="3" name="Text 1"/>
+            <a:ext cx="4864608" cy="54864"/>
+          </a:xfrm>
+          <a:prstGeom prst="rect">
+            <a:avLst/>
+          </a:prstGeom>
+          <a:solidFill>
+            <a:srgbClr val="F97316"/>
+          </a:solidFill>
+          <a:ln/>
+        </p:spPr>
+      </p:sp>
+      <p:sp>
+        <p:nvSpPr>
+          <p:cNvPr id="3" name="Shape 1"/>
+          <p:cNvSpPr/>
+          <p:nvPr/>
+        </p:nvSpPr>
+        <p:spPr>
+          <a:xfrm>
+            <a:off x="4864608" y="0"/>
+            <a:ext cx="4256532" cy="54864"/>
+          </a:xfrm>
+          <a:prstGeom prst="rect">
+            <a:avLst/>
+          </a:prstGeom>
+          <a:solidFill>
+            <a:srgbClr val="F43F5E"/>
+          </a:solidFill>
+          <a:ln/>
+        </p:spPr>
+      </p:sp>
+      <p:sp>
+        <p:nvSpPr>
+          <p:cNvPr id="4" name="Shape 2"/>
+          <p:cNvSpPr/>
+          <p:nvPr/>
+        </p:nvSpPr>
+        <p:spPr>
+          <a:xfrm>
+            <a:off x="9121140" y="0"/>
+            <a:ext cx="3040380" cy="54864"/>
+          </a:xfrm>
+          <a:prstGeom prst="rect">
+            <a:avLst/>
+          </a:prstGeom>
+          <a:solidFill>
+            <a:srgbClr val="8B5CF6"/>
+          </a:solidFill>
+          <a:ln/>
+        </p:spPr>
+      </p:sp>
+      <p:sp>
+        <p:nvSpPr>
+          <p:cNvPr id="5" name="Text 3"/>
           <p:cNvSpPr/>
           <p:nvPr/>
         </p:nvSpPr>
@@ -4405,13 +9002,13 @@
             <a:r>
               <a:rPr lang="en-US" sz="2800" b="1" dirty="0">
                 <a:solidFill>
-                  <a:srgbClr val="D97706"/>
-                </a:solidFill>
-                <a:latin typeface="Calibri" pitchFamily="34" charset="0"/>
-                <a:ea typeface="Calibri" pitchFamily="34" charset="-122"/>
-                <a:cs typeface="Calibri" pitchFamily="34" charset="-120"/>
-              </a:rPr>
-              <a:t>Concerns &amp; Recommendations</a:t>
+                  <a:srgbClr val="0F172A"/>
+                </a:solidFill>
+                <a:latin typeface="Calibri" pitchFamily="34" charset="0"/>
+                <a:ea typeface="Calibri" pitchFamily="34" charset="-122"/>
+                <a:cs typeface="Calibri" pitchFamily="34" charset="-120"/>
+              </a:rPr>
+              <a:t>Bounce Rate Analysis</a:t>
             </a:r>
             <a:endParaRPr lang="en-US" sz="2800" dirty="0"/>
           </a:p>
@@ -4419,14 +9016,80 @@
       </p:sp>
       <p:sp>
         <p:nvSpPr>
-          <p:cNvPr id="4" name="Text 2"/>
+          <p:cNvPr id="6" name="Shape 4"/>
           <p:cNvSpPr/>
           <p:nvPr/>
         </p:nvSpPr>
         <p:spPr>
           <a:xfrm>
             <a:off x="731520" y="1280160"/>
-            <a:ext cx="10698480" cy="4754880"/>
+            <a:ext cx="10698480" cy="3657600"/>
+          </a:xfrm>
+          <a:prstGeom prst="rect">
+            <a:avLst/>
+          </a:prstGeom>
+          <a:solidFill>
+            <a:srgbClr val="FFFFFF"/>
+          </a:solidFill>
+          <a:ln/>
+          <a:effectLst>
+            <a:outerShdw sx="100000" sy="100000" kx="0" ky="0" algn="bl" rotWithShape="0" blurRad="63500" dist="25400" dir="8100000">
+              <a:srgbClr val="000000">
+                <a:alpha val="6000"/>
+              </a:srgbClr>
+            </a:outerShdw>
+          </a:effectLst>
+        </p:spPr>
+      </p:sp>
+      <p:sp>
+        <p:nvSpPr>
+          <p:cNvPr id="7" name="Text 5"/>
+          <p:cNvSpPr/>
+          <p:nvPr/>
+        </p:nvSpPr>
+        <p:spPr>
+          <a:xfrm>
+            <a:off x="731520" y="1280160"/>
+            <a:ext cx="10698480" cy="3657600"/>
+          </a:xfrm>
+          <a:prstGeom prst="rect">
+            <a:avLst/>
+          </a:prstGeom>
+          <a:noFill/>
+          <a:ln/>
+        </p:spPr>
+        <p:txBody>
+          <a:bodyPr wrap="square" rtlCol="0" anchor="ctr"/>
+          <a:lstStyle/>
+          <a:p>
+            <a:pPr algn="ctr" indent="0" marL="0">
+              <a:buNone/>
+            </a:pPr>
+            <a:r>
+              <a:rPr lang="en-US" sz="1000" dirty="0">
+                <a:solidFill>
+                  <a:srgbClr val="94A3B8"/>
+                </a:solidFill>
+                <a:latin typeface="Calibri" pitchFamily="34" charset="0"/>
+                <a:ea typeface="Calibri" pitchFamily="34" charset="-122"/>
+                <a:cs typeface="Calibri" pitchFamily="34" charset="-120"/>
+              </a:rPr>
+              <a:t>{{chart_bounce_rate}}</a:t>
+            </a:r>
+            <a:endParaRPr lang="en-US" sz="1000" dirty="0"/>
+          </a:p>
+        </p:txBody>
+      </p:sp>
+      <p:sp>
+        <p:nvSpPr>
+          <p:cNvPr id="8" name="Text 6"/>
+          <p:cNvSpPr/>
+          <p:nvPr/>
+        </p:nvSpPr>
+        <p:spPr>
+          <a:xfrm>
+            <a:off x="731520" y="5212080"/>
+            <a:ext cx="10698480" cy="1097280"/>
           </a:xfrm>
           <a:prstGeom prst="rect">
             <a:avLst/>
@@ -4440,12 +9103,12 @@
           <a:p>
             <a:pPr indent="0" marL="0">
               <a:lnSpc>
-                <a:spcPct val="150000"/>
+                <a:spcPct val="135000"/>
               </a:lnSpc>
               <a:buNone/>
             </a:pPr>
             <a:r>
-              <a:rPr lang="en-US" sz="1300" dirty="0">
+              <a:rPr lang="en-US" sz="1200" dirty="0">
                 <a:solidFill>
                   <a:srgbClr val="334155"/>
                 </a:solidFill>
@@ -4453,15 +9116,15 @@
                 <a:ea typeface="Calibri" pitchFamily="34" charset="-122"/>
                 <a:cs typeface="Calibri" pitchFamily="34" charset="-120"/>
               </a:rPr>
-              <a:t>{{concerns}}</a:t>
-            </a:r>
-            <a:endParaRPr lang="en-US" sz="1300" dirty="0"/>
-          </a:p>
-        </p:txBody>
-      </p:sp>
-      <p:sp>
-        <p:nvSpPr>
-          <p:cNvPr id="5" name="Text 3"/>
+              <a:t>{{website_narrative}}</a:t>
+            </a:r>
+            <a:endParaRPr lang="en-US" sz="1200" dirty="0"/>
+          </a:p>
+        </p:txBody>
+      </p:sp>
+      <p:sp>
+        <p:nvSpPr>
+          <p:cNvPr id="9" name="Text 7"/>
           <p:cNvSpPr/>
           <p:nvPr/>
         </p:nvSpPr>
@@ -4623,7 +9286,7 @@
                 <a:ea typeface="Calibri" pitchFamily="34" charset="-122"/>
                 <a:cs typeface="Calibri" pitchFamily="34" charset="-120"/>
               </a:rPr>
-              <a:t>Next Steps &amp; Action Items</a:t>
+              <a:t>Paid Advertising — Meta Ads</a:t>
             </a:r>
             <a:endParaRPr lang="en-US" sz="2800" dirty="0"/>
           </a:p>
@@ -4631,14 +9294,146 @@
       </p:sp>
       <p:sp>
         <p:nvSpPr>
-          <p:cNvPr id="6" name="Text 4"/>
+          <p:cNvPr id="6" name="Shape 4"/>
           <p:cNvSpPr/>
           <p:nvPr/>
         </p:nvSpPr>
         <p:spPr>
           <a:xfrm>
             <a:off x="731520" y="1280160"/>
-            <a:ext cx="10698480" cy="3840480"/>
+            <a:ext cx="5120640" cy="2743200"/>
+          </a:xfrm>
+          <a:prstGeom prst="rect">
+            <a:avLst/>
+          </a:prstGeom>
+          <a:solidFill>
+            <a:srgbClr val="FFFFFF"/>
+          </a:solidFill>
+          <a:ln/>
+          <a:effectLst>
+            <a:outerShdw sx="100000" sy="100000" kx="0" ky="0" algn="bl" rotWithShape="0" blurRad="63500" dist="25400" dir="8100000">
+              <a:srgbClr val="000000">
+                <a:alpha val="6000"/>
+              </a:srgbClr>
+            </a:outerShdw>
+          </a:effectLst>
+        </p:spPr>
+      </p:sp>
+      <p:sp>
+        <p:nvSpPr>
+          <p:cNvPr id="7" name="Text 5"/>
+          <p:cNvSpPr/>
+          <p:nvPr/>
+        </p:nvSpPr>
+        <p:spPr>
+          <a:xfrm>
+            <a:off x="731520" y="1280160"/>
+            <a:ext cx="5120640" cy="2743200"/>
+          </a:xfrm>
+          <a:prstGeom prst="rect">
+            <a:avLst/>
+          </a:prstGeom>
+          <a:noFill/>
+          <a:ln/>
+        </p:spPr>
+        <p:txBody>
+          <a:bodyPr wrap="square" rtlCol="0" anchor="ctr"/>
+          <a:lstStyle/>
+          <a:p>
+            <a:pPr algn="ctr" indent="0" marL="0">
+              <a:buNone/>
+            </a:pPr>
+            <a:r>
+              <a:rPr lang="en-US" sz="1000" dirty="0">
+                <a:solidFill>
+                  <a:srgbClr val="94A3B8"/>
+                </a:solidFill>
+                <a:latin typeface="Calibri" pitchFamily="34" charset="0"/>
+                <a:ea typeface="Calibri" pitchFamily="34" charset="-122"/>
+                <a:cs typeface="Calibri" pitchFamily="34" charset="-120"/>
+              </a:rPr>
+              <a:t>{{chart_spend}}</a:t>
+            </a:r>
+            <a:endParaRPr lang="en-US" sz="1000" dirty="0"/>
+          </a:p>
+        </p:txBody>
+      </p:sp>
+      <p:sp>
+        <p:nvSpPr>
+          <p:cNvPr id="8" name="Shape 6"/>
+          <p:cNvSpPr/>
+          <p:nvPr/>
+        </p:nvSpPr>
+        <p:spPr>
+          <a:xfrm>
+            <a:off x="6217920" y="1280160"/>
+            <a:ext cx="5212080" cy="2743200"/>
+          </a:xfrm>
+          <a:prstGeom prst="rect">
+            <a:avLst/>
+          </a:prstGeom>
+          <a:solidFill>
+            <a:srgbClr val="FFFFFF"/>
+          </a:solidFill>
+          <a:ln/>
+          <a:effectLst>
+            <a:outerShdw sx="100000" sy="100000" kx="0" ky="0" algn="bl" rotWithShape="0" blurRad="63500" dist="25400" dir="8100000">
+              <a:srgbClr val="000000">
+                <a:alpha val="6000"/>
+              </a:srgbClr>
+            </a:outerShdw>
+          </a:effectLst>
+        </p:spPr>
+      </p:sp>
+      <p:sp>
+        <p:nvSpPr>
+          <p:cNvPr id="9" name="Text 7"/>
+          <p:cNvSpPr/>
+          <p:nvPr/>
+        </p:nvSpPr>
+        <p:spPr>
+          <a:xfrm>
+            <a:off x="6217920" y="1280160"/>
+            <a:ext cx="5212080" cy="2743200"/>
+          </a:xfrm>
+          <a:prstGeom prst="rect">
+            <a:avLst/>
+          </a:prstGeom>
+          <a:noFill/>
+          <a:ln/>
+        </p:spPr>
+        <p:txBody>
+          <a:bodyPr wrap="square" rtlCol="0" anchor="ctr"/>
+          <a:lstStyle/>
+          <a:p>
+            <a:pPr algn="ctr" indent="0" marL="0">
+              <a:buNone/>
+            </a:pPr>
+            <a:r>
+              <a:rPr lang="en-US" sz="1000" dirty="0">
+                <a:solidFill>
+                  <a:srgbClr val="94A3B8"/>
+                </a:solidFill>
+                <a:latin typeface="Calibri" pitchFamily="34" charset="0"/>
+                <a:ea typeface="Calibri" pitchFamily="34" charset="-122"/>
+                <a:cs typeface="Calibri" pitchFamily="34" charset="-120"/>
+              </a:rPr>
+              <a:t>{{chart_campaigns}}</a:t>
+            </a:r>
+            <a:endParaRPr lang="en-US" sz="1000" dirty="0"/>
+          </a:p>
+        </p:txBody>
+      </p:sp>
+      <p:sp>
+        <p:nvSpPr>
+          <p:cNvPr id="10" name="Text 8"/>
+          <p:cNvSpPr/>
+          <p:nvPr/>
+        </p:nvSpPr>
+        <p:spPr>
+          <a:xfrm>
+            <a:off x="731520" y="4297680"/>
+            <a:ext cx="10698480" cy="1920240"/>
           </a:xfrm>
           <a:prstGeom prst="rect">
             <a:avLst/>
@@ -4652,12 +9447,12 @@
           <a:p>
             <a:pPr indent="0" marL="0">
               <a:lnSpc>
-                <a:spcPct val="150000"/>
+                <a:spcPct val="135000"/>
               </a:lnSpc>
               <a:buNone/>
             </a:pPr>
             <a:r>
-              <a:rPr lang="en-US" sz="1300" dirty="0">
+              <a:rPr lang="en-US" sz="1200" dirty="0">
                 <a:solidFill>
                   <a:srgbClr val="334155"/>
                 </a:solidFill>
@@ -4665,82 +9460,22 @@
                 <a:ea typeface="Calibri" pitchFamily="34" charset="-122"/>
                 <a:cs typeface="Calibri" pitchFamily="34" charset="-120"/>
               </a:rPr>
-              <a:t>{{next_steps}}</a:t>
-            </a:r>
-            <a:endParaRPr lang="en-US" sz="1300" dirty="0"/>
-          </a:p>
-        </p:txBody>
-      </p:sp>
-      <p:sp>
-        <p:nvSpPr>
-          <p:cNvPr id="7" name="Shape 5"/>
-          <p:cNvSpPr/>
-          <p:nvPr/>
-        </p:nvSpPr>
-        <p:spPr>
-          <a:xfrm>
-            <a:off x="0" y="5760720"/>
-            <a:ext cx="4864608" cy="1097280"/>
-          </a:xfrm>
-          <a:prstGeom prst="rect">
-            <a:avLst/>
-          </a:prstGeom>
-          <a:solidFill>
-            <a:srgbClr val="F97316"/>
-          </a:solidFill>
-          <a:ln/>
-        </p:spPr>
-      </p:sp>
-      <p:sp>
-        <p:nvSpPr>
-          <p:cNvPr id="8" name="Shape 6"/>
-          <p:cNvSpPr/>
-          <p:nvPr/>
-        </p:nvSpPr>
-        <p:spPr>
-          <a:xfrm>
-            <a:off x="4864608" y="5760720"/>
-            <a:ext cx="4256532" cy="1097280"/>
-          </a:xfrm>
-          <a:prstGeom prst="rect">
-            <a:avLst/>
-          </a:prstGeom>
-          <a:solidFill>
-            <a:srgbClr val="F43F5E"/>
-          </a:solidFill>
-          <a:ln/>
-        </p:spPr>
-      </p:sp>
-      <p:sp>
-        <p:nvSpPr>
-          <p:cNvPr id="9" name="Shape 7"/>
-          <p:cNvSpPr/>
-          <p:nvPr/>
-        </p:nvSpPr>
-        <p:spPr>
-          <a:xfrm>
-            <a:off x="9121140" y="5760720"/>
-            <a:ext cx="3040380" cy="1097280"/>
-          </a:xfrm>
-          <a:prstGeom prst="rect">
-            <a:avLst/>
-          </a:prstGeom>
-          <a:solidFill>
-            <a:srgbClr val="8B5CF6"/>
-          </a:solidFill>
-          <a:ln/>
-        </p:spPr>
-      </p:sp>
-      <p:sp>
-        <p:nvSpPr>
-          <p:cNvPr id="10" name="Text 8"/>
-          <p:cNvSpPr/>
-          <p:nvPr/>
-        </p:nvSpPr>
-        <p:spPr>
-          <a:xfrm>
-            <a:off x="731520" y="5806440"/>
-            <a:ext cx="10698480" cy="411480"/>
+              <a:t>{{ads_narrative}}</a:t>
+            </a:r>
+            <a:endParaRPr lang="en-US" sz="1200" dirty="0"/>
+          </a:p>
+        </p:txBody>
+      </p:sp>
+      <p:sp>
+        <p:nvSpPr>
+          <p:cNvPr id="11" name="Text 9"/>
+          <p:cNvSpPr/>
+          <p:nvPr/>
+        </p:nvSpPr>
+        <p:spPr>
+          <a:xfrm>
+            <a:off x="731520" y="6510528"/>
+            <a:ext cx="10698480" cy="256032"/>
           </a:xfrm>
           <a:prstGeom prst="rect">
             <a:avLst/>
@@ -4756,56 +9491,17 @@
               <a:buNone/>
             </a:pPr>
             <a:r>
-              <a:rPr lang="en-US" sz="1300" b="1" dirty="0">
-                <a:solidFill>
-                  <a:srgbClr val="FFFFFF"/>
-                </a:solidFill>
-                <a:latin typeface="Calibri" pitchFamily="34" charset="0"/>
-                <a:ea typeface="Calibri" pitchFamily="34" charset="-122"/>
-                <a:cs typeface="Calibri" pitchFamily="34" charset="-120"/>
-              </a:rPr>
-              <a:t>Questions? Reply to this email or schedule a call.</a:t>
-            </a:r>
-            <a:endParaRPr lang="en-US" sz="1300" dirty="0"/>
-          </a:p>
-        </p:txBody>
-      </p:sp>
-      <p:sp>
-        <p:nvSpPr>
-          <p:cNvPr id="11" name="Text 9"/>
-          <p:cNvSpPr/>
-          <p:nvPr/>
-        </p:nvSpPr>
-        <p:spPr>
-          <a:xfrm>
-            <a:off x="731520" y="6263640"/>
-            <a:ext cx="10698480" cy="320040"/>
-          </a:xfrm>
-          <a:prstGeom prst="rect">
-            <a:avLst/>
-          </a:prstGeom>
-          <a:noFill/>
-          <a:ln/>
-        </p:spPr>
-        <p:txBody>
-          <a:bodyPr wrap="square" rtlCol="0" anchor="ctr"/>
-          <a:lstStyle/>
-          <a:p>
-            <a:pPr indent="0" marL="0">
-              <a:buNone/>
-            </a:pPr>
-            <a:r>
-              <a:rPr lang="en-US" sz="1100" dirty="0">
-                <a:solidFill>
-                  <a:srgbClr val="FECDD3"/>
-                </a:solidFill>
-                <a:latin typeface="Calibri" pitchFamily="34" charset="0"/>
-                <a:ea typeface="Calibri" pitchFamily="34" charset="-122"/>
-                <a:cs typeface="Calibri" pitchFamily="34" charset="-120"/>
-              </a:rPr>
-              <a:t>{{agency_name}}  •  {{agency_email}}</a:t>
-            </a:r>
-            <a:endParaRPr lang="en-US" sz="1100" dirty="0"/>
+              <a:rPr lang="en-US" sz="800" dirty="0">
+                <a:solidFill>
+                  <a:srgbClr val="94A3B8"/>
+                </a:solidFill>
+                <a:latin typeface="Calibri" pitchFamily="34" charset="0"/>
+                <a:ea typeface="Calibri" pitchFamily="34" charset="-122"/>
+                <a:cs typeface="Calibri" pitchFamily="34" charset="-120"/>
+              </a:rPr>
+              <a:t>{{agency_name}}  •  Confidential  •  Page 8</a:t>
+            </a:r>
+            <a:endParaRPr lang="en-US" sz="800" dirty="0"/>
           </a:p>
         </p:txBody>
       </p:sp>
@@ -4919,37 +9615,169 @@
           <a:ln/>
         </p:spPr>
         <p:txBody>
+          <a:bodyPr wrap="square" lIns="0" tIns="0" rIns="0" bIns="0" rtlCol="0" anchor="ctr"/>
+          <a:lstStyle/>
+          <a:p>
+            <a:pPr indent="0" marL="0">
+              <a:buNone/>
+            </a:pPr>
+            <a:r>
+              <a:rPr lang="en-US" sz="2800" b="1" dirty="0">
+                <a:solidFill>
+                  <a:srgbClr val="0F172A"/>
+                </a:solidFill>
+                <a:latin typeface="Calibri" pitchFamily="34" charset="0"/>
+                <a:ea typeface="Calibri" pitchFamily="34" charset="-122"/>
+                <a:cs typeface="Calibri" pitchFamily="34" charset="-120"/>
+              </a:rPr>
+              <a:t>Meta Ads — Audience</a:t>
+            </a:r>
+            <a:endParaRPr lang="en-US" sz="2800" dirty="0"/>
+          </a:p>
+        </p:txBody>
+      </p:sp>
+      <p:sp>
+        <p:nvSpPr>
+          <p:cNvPr id="6" name="Shape 4"/>
+          <p:cNvSpPr/>
+          <p:nvPr/>
+        </p:nvSpPr>
+        <p:spPr>
+          <a:xfrm>
+            <a:off x="731520" y="1280160"/>
+            <a:ext cx="5120640" cy="2743200"/>
+          </a:xfrm>
+          <a:prstGeom prst="rect">
+            <a:avLst/>
+          </a:prstGeom>
+          <a:solidFill>
+            <a:srgbClr val="FFFFFF"/>
+          </a:solidFill>
+          <a:ln/>
+          <a:effectLst>
+            <a:outerShdw sx="100000" sy="100000" kx="0" ky="0" algn="bl" rotWithShape="0" blurRad="63500" dist="25400" dir="8100000">
+              <a:srgbClr val="000000">
+                <a:alpha val="6000"/>
+              </a:srgbClr>
+            </a:outerShdw>
+          </a:effectLst>
+        </p:spPr>
+      </p:sp>
+      <p:sp>
+        <p:nvSpPr>
+          <p:cNvPr id="7" name="Text 5"/>
+          <p:cNvSpPr/>
+          <p:nvPr/>
+        </p:nvSpPr>
+        <p:spPr>
+          <a:xfrm>
+            <a:off x="731520" y="1280160"/>
+            <a:ext cx="5120640" cy="2743200"/>
+          </a:xfrm>
+          <a:prstGeom prst="rect">
+            <a:avLst/>
+          </a:prstGeom>
+          <a:noFill/>
+          <a:ln/>
+        </p:spPr>
+        <p:txBody>
           <a:bodyPr wrap="square" rtlCol="0" anchor="ctr"/>
           <a:lstStyle/>
           <a:p>
-            <a:pPr indent="0" marL="0">
-              <a:buNone/>
-            </a:pPr>
-            <a:r>
-              <a:rPr lang="en-US" sz="2800" b="1" dirty="0">
-                <a:solidFill>
-                  <a:srgbClr val="0F172A"/>
-                </a:solidFill>
-                <a:latin typeface="Calibri" pitchFamily="34" charset="0"/>
-                <a:ea typeface="Calibri" pitchFamily="34" charset="-122"/>
-                <a:cs typeface="Calibri" pitchFamily="34" charset="-120"/>
-              </a:rPr>
-              <a:t>{{custom_section_title}}</a:t>
-            </a:r>
-            <a:endParaRPr lang="en-US" sz="2800" dirty="0"/>
-          </a:p>
-        </p:txBody>
-      </p:sp>
-      <p:sp>
-        <p:nvSpPr>
-          <p:cNvPr id="6" name="Text 4"/>
-          <p:cNvSpPr/>
-          <p:nvPr/>
-        </p:nvSpPr>
-        <p:spPr>
-          <a:xfrm>
-            <a:off x="731520" y="1280160"/>
-            <a:ext cx="10698480" cy="4754880"/>
+            <a:pPr algn="ctr" indent="0" marL="0">
+              <a:buNone/>
+            </a:pPr>
+            <a:r>
+              <a:rPr lang="en-US" sz="1000" dirty="0">
+                <a:solidFill>
+                  <a:srgbClr val="94A3B8"/>
+                </a:solidFill>
+                <a:latin typeface="Calibri" pitchFamily="34" charset="0"/>
+                <a:ea typeface="Calibri" pitchFamily="34" charset="-122"/>
+                <a:cs typeface="Calibri" pitchFamily="34" charset="-120"/>
+              </a:rPr>
+              <a:t>{{chart_demographics}}</a:t>
+            </a:r>
+            <a:endParaRPr lang="en-US" sz="1000" dirty="0"/>
+          </a:p>
+        </p:txBody>
+      </p:sp>
+      <p:sp>
+        <p:nvSpPr>
+          <p:cNvPr id="8" name="Shape 6"/>
+          <p:cNvSpPr/>
+          <p:nvPr/>
+        </p:nvSpPr>
+        <p:spPr>
+          <a:xfrm>
+            <a:off x="6217920" y="1280160"/>
+            <a:ext cx="5212080" cy="2743200"/>
+          </a:xfrm>
+          <a:prstGeom prst="rect">
+            <a:avLst/>
+          </a:prstGeom>
+          <a:solidFill>
+            <a:srgbClr val="FFFFFF"/>
+          </a:solidFill>
+          <a:ln/>
+          <a:effectLst>
+            <a:outerShdw sx="100000" sy="100000" kx="0" ky="0" algn="bl" rotWithShape="0" blurRad="63500" dist="25400" dir="8100000">
+              <a:srgbClr val="000000">
+                <a:alpha val="6000"/>
+              </a:srgbClr>
+            </a:outerShdw>
+          </a:effectLst>
+        </p:spPr>
+      </p:sp>
+      <p:sp>
+        <p:nvSpPr>
+          <p:cNvPr id="9" name="Text 7"/>
+          <p:cNvSpPr/>
+          <p:nvPr/>
+        </p:nvSpPr>
+        <p:spPr>
+          <a:xfrm>
+            <a:off x="6217920" y="1280160"/>
+            <a:ext cx="5212080" cy="2743200"/>
+          </a:xfrm>
+          <a:prstGeom prst="rect">
+            <a:avLst/>
+          </a:prstGeom>
+          <a:noFill/>
+          <a:ln/>
+        </p:spPr>
+        <p:txBody>
+          <a:bodyPr wrap="square" rtlCol="0" anchor="ctr"/>
+          <a:lstStyle/>
+          <a:p>
+            <a:pPr algn="ctr" indent="0" marL="0">
+              <a:buNone/>
+            </a:pPr>
+            <a:r>
+              <a:rPr lang="en-US" sz="1000" dirty="0">
+                <a:solidFill>
+                  <a:srgbClr val="94A3B8"/>
+                </a:solidFill>
+                <a:latin typeface="Calibri" pitchFamily="34" charset="0"/>
+                <a:ea typeface="Calibri" pitchFamily="34" charset="-122"/>
+                <a:cs typeface="Calibri" pitchFamily="34" charset="-120"/>
+              </a:rPr>
+              <a:t>{{chart_placements}}</a:t>
+            </a:r>
+            <a:endParaRPr lang="en-US" sz="1000" dirty="0"/>
+          </a:p>
+        </p:txBody>
+      </p:sp>
+      <p:sp>
+        <p:nvSpPr>
+          <p:cNvPr id="10" name="Text 8"/>
+          <p:cNvSpPr/>
+          <p:nvPr/>
+        </p:nvSpPr>
+        <p:spPr>
+          <a:xfrm>
+            <a:off x="731520" y="4297680"/>
+            <a:ext cx="10698480" cy="1920240"/>
           </a:xfrm>
           <a:prstGeom prst="rect">
             <a:avLst/>
@@ -4963,12 +9791,12 @@
           <a:p>
             <a:pPr indent="0" marL="0">
               <a:lnSpc>
-                <a:spcPct val="140000"/>
+                <a:spcPct val="135000"/>
               </a:lnSpc>
               <a:buNone/>
             </a:pPr>
             <a:r>
-              <a:rPr lang="en-US" sz="1300" dirty="0">
+              <a:rPr lang="en-US" sz="1200" dirty="0">
                 <a:solidFill>
                   <a:srgbClr val="334155"/>
                 </a:solidFill>
@@ -4976,15 +9804,15 @@
                 <a:ea typeface="Calibri" pitchFamily="34" charset="-122"/>
                 <a:cs typeface="Calibri" pitchFamily="34" charset="-120"/>
               </a:rPr>
-              <a:t>{{custom_section_text}}</a:t>
-            </a:r>
-            <a:endParaRPr lang="en-US" sz="1300" dirty="0"/>
-          </a:p>
-        </p:txBody>
-      </p:sp>
-      <p:sp>
-        <p:nvSpPr>
-          <p:cNvPr id="7" name="Text 5"/>
+              <a:t>{{ads_narrative}}</a:t>
+            </a:r>
+            <a:endParaRPr lang="en-US" sz="1200" dirty="0"/>
+          </a:p>
+        </p:txBody>
+      </p:sp>
+      <p:sp>
+        <p:nvSpPr>
+          <p:cNvPr id="11" name="Text 9"/>
           <p:cNvSpPr/>
           <p:nvPr/>
         </p:nvSpPr>

--- a/backend/templates/pptx/gradient_modern.pptx
+++ b/backend/templates/pptx/gradient_modern.pptx
@@ -2496,6 +2496,10 @@
           </a:solidFill>
           <a:ln/>
         </p:spPr>
+        <p:txBody>
+          <a:bodyPr/>
+          <a:p/>
+        </p:txBody>
       </p:sp>
       <p:sp>
         <p:nvSpPr>
@@ -2516,6 +2520,10 @@
           </a:solidFill>
           <a:ln/>
         </p:spPr>
+        <p:txBody>
+          <a:bodyPr/>
+          <a:p/>
+        </p:txBody>
       </p:sp>
       <p:sp>
         <p:nvSpPr>
@@ -2536,6 +2544,10 @@
           </a:solidFill>
           <a:ln/>
         </p:spPr>
+        <p:txBody>
+          <a:bodyPr/>
+          <a:p/>
+        </p:txBody>
       </p:sp>
       <p:sp>
         <p:nvSpPr>
@@ -2829,6 +2841,10 @@
           </a:solidFill>
           <a:ln/>
         </p:spPr>
+        <p:txBody>
+          <a:bodyPr/>
+          <a:p/>
+        </p:txBody>
       </p:sp>
       <p:sp>
         <p:nvSpPr>
@@ -2849,6 +2865,10 @@
           </a:solidFill>
           <a:ln/>
         </p:spPr>
+        <p:txBody>
+          <a:bodyPr/>
+          <a:p/>
+        </p:txBody>
       </p:sp>
       <p:sp>
         <p:nvSpPr>
@@ -2869,6 +2889,10 @@
           </a:solidFill>
           <a:ln/>
         </p:spPr>
+        <p:txBody>
+          <a:bodyPr/>
+          <a:p/>
+        </p:txBody>
       </p:sp>
     </p:spTree>
   </p:cSld>
@@ -2921,6 +2945,10 @@
           </a:solidFill>
           <a:ln/>
         </p:spPr>
+        <p:txBody>
+          <a:bodyPr/>
+          <a:p/>
+        </p:txBody>
       </p:sp>
       <p:sp>
         <p:nvSpPr>
@@ -2941,6 +2969,10 @@
           </a:solidFill>
           <a:ln/>
         </p:spPr>
+        <p:txBody>
+          <a:bodyPr/>
+          <a:p/>
+        </p:txBody>
       </p:sp>
       <p:sp>
         <p:nvSpPr>
@@ -2961,6 +2993,10 @@
           </a:solidFill>
           <a:ln/>
         </p:spPr>
+        <p:txBody>
+          <a:bodyPr/>
+          <a:p/>
+        </p:txBody>
       </p:sp>
       <p:sp>
         <p:nvSpPr>
@@ -3027,6 +3063,10 @@
             </a:outerShdw>
           </a:effectLst>
         </p:spPr>
+        <p:txBody>
+          <a:bodyPr/>
+          <a:p/>
+        </p:txBody>
       </p:sp>
       <p:sp>
         <p:nvSpPr>
@@ -3199,6 +3239,10 @@
           </a:solidFill>
           <a:ln/>
         </p:spPr>
+        <p:txBody>
+          <a:bodyPr/>
+          <a:p/>
+        </p:txBody>
       </p:sp>
       <p:sp>
         <p:nvSpPr>
@@ -3219,6 +3263,10 @@
           </a:solidFill>
           <a:ln/>
         </p:spPr>
+        <p:txBody>
+          <a:bodyPr/>
+          <a:p/>
+        </p:txBody>
       </p:sp>
       <p:sp>
         <p:nvSpPr>
@@ -3239,6 +3287,10 @@
           </a:solidFill>
           <a:ln/>
         </p:spPr>
+        <p:txBody>
+          <a:bodyPr/>
+          <a:p/>
+        </p:txBody>
       </p:sp>
       <p:sp>
         <p:nvSpPr>
@@ -3305,6 +3357,10 @@
             </a:outerShdw>
           </a:effectLst>
         </p:spPr>
+        <p:txBody>
+          <a:bodyPr/>
+          <a:p/>
+        </p:txBody>
       </p:sp>
       <p:sp>
         <p:nvSpPr>
@@ -3371,6 +3427,10 @@
             </a:outerShdw>
           </a:effectLst>
         </p:spPr>
+        <p:txBody>
+          <a:bodyPr/>
+          <a:p/>
+        </p:txBody>
       </p:sp>
       <p:sp>
         <p:nvSpPr>
@@ -3543,6 +3603,10 @@
           </a:solidFill>
           <a:ln/>
         </p:spPr>
+        <p:txBody>
+          <a:bodyPr/>
+          <a:p/>
+        </p:txBody>
       </p:sp>
       <p:sp>
         <p:nvSpPr>
@@ -3563,6 +3627,10 @@
           </a:solidFill>
           <a:ln/>
         </p:spPr>
+        <p:txBody>
+          <a:bodyPr/>
+          <a:p/>
+        </p:txBody>
       </p:sp>
       <p:sp>
         <p:nvSpPr>
@@ -3583,6 +3651,10 @@
           </a:solidFill>
           <a:ln/>
         </p:spPr>
+        <p:txBody>
+          <a:bodyPr/>
+          <a:p/>
+        </p:txBody>
       </p:sp>
       <p:sp>
         <p:nvSpPr>
@@ -3649,6 +3721,10 @@
             </a:outerShdw>
           </a:effectLst>
         </p:spPr>
+        <p:txBody>
+          <a:bodyPr/>
+          <a:p/>
+        </p:txBody>
       </p:sp>
       <p:sp>
         <p:nvSpPr>
@@ -3821,6 +3897,10 @@
           </a:solidFill>
           <a:ln/>
         </p:spPr>
+        <p:txBody>
+          <a:bodyPr/>
+          <a:p/>
+        </p:txBody>
       </p:sp>
       <p:sp>
         <p:nvSpPr>
@@ -3841,6 +3921,10 @@
           </a:solidFill>
           <a:ln/>
         </p:spPr>
+        <p:txBody>
+          <a:bodyPr/>
+          <a:p/>
+        </p:txBody>
       </p:sp>
       <p:sp>
         <p:nvSpPr>
@@ -3861,6 +3945,10 @@
           </a:solidFill>
           <a:ln/>
         </p:spPr>
+        <p:txBody>
+          <a:bodyPr/>
+          <a:p/>
+        </p:txBody>
       </p:sp>
       <p:sp>
         <p:nvSpPr>
@@ -3927,6 +4015,10 @@
             </a:outerShdw>
           </a:effectLst>
         </p:spPr>
+        <p:txBody>
+          <a:bodyPr/>
+          <a:p/>
+        </p:txBody>
       </p:sp>
       <p:sp>
         <p:nvSpPr>
@@ -3993,6 +4085,10 @@
             </a:outerShdw>
           </a:effectLst>
         </p:spPr>
+        <p:txBody>
+          <a:bodyPr/>
+          <a:p/>
+        </p:txBody>
       </p:sp>
       <p:sp>
         <p:nvSpPr>
@@ -4165,6 +4261,10 @@
           </a:solidFill>
           <a:ln/>
         </p:spPr>
+        <p:txBody>
+          <a:bodyPr/>
+          <a:p/>
+        </p:txBody>
       </p:sp>
       <p:sp>
         <p:nvSpPr>
@@ -4185,6 +4285,10 @@
           </a:solidFill>
           <a:ln/>
         </p:spPr>
+        <p:txBody>
+          <a:bodyPr/>
+          <a:p/>
+        </p:txBody>
       </p:sp>
       <p:sp>
         <p:nvSpPr>
@@ -4205,6 +4309,10 @@
           </a:solidFill>
           <a:ln/>
         </p:spPr>
+        <p:txBody>
+          <a:bodyPr/>
+          <a:p/>
+        </p:txBody>
       </p:sp>
       <p:sp>
         <p:nvSpPr>
@@ -4271,6 +4379,10 @@
             </a:outerShdw>
           </a:effectLst>
         </p:spPr>
+        <p:txBody>
+          <a:bodyPr/>
+          <a:p/>
+        </p:txBody>
       </p:sp>
       <p:sp>
         <p:nvSpPr>
@@ -4291,6 +4403,10 @@
           </a:solidFill>
           <a:ln/>
         </p:spPr>
+        <p:txBody>
+          <a:bodyPr/>
+          <a:p/>
+        </p:txBody>
       </p:sp>
       <p:sp>
         <p:nvSpPr>
@@ -4311,6 +4427,10 @@
           </a:solidFill>
           <a:ln/>
         </p:spPr>
+        <p:txBody>
+          <a:bodyPr/>
+          <a:p/>
+        </p:txBody>
       </p:sp>
       <p:sp>
         <p:nvSpPr>
@@ -4416,6 +4536,10 @@
             </a:outerShdw>
           </a:effectLst>
         </p:spPr>
+        <p:txBody>
+          <a:bodyPr/>
+          <a:p/>
+        </p:txBody>
       </p:sp>
       <p:sp>
         <p:nvSpPr>
@@ -4436,6 +4560,10 @@
           </a:solidFill>
           <a:ln/>
         </p:spPr>
+        <p:txBody>
+          <a:bodyPr/>
+          <a:p/>
+        </p:txBody>
       </p:sp>
       <p:sp>
         <p:nvSpPr>
@@ -4456,6 +4584,10 @@
           </a:solidFill>
           <a:ln/>
         </p:spPr>
+        <p:txBody>
+          <a:bodyPr/>
+          <a:p/>
+        </p:txBody>
       </p:sp>
       <p:sp>
         <p:nvSpPr>
@@ -4561,6 +4693,10 @@
             </a:outerShdw>
           </a:effectLst>
         </p:spPr>
+        <p:txBody>
+          <a:bodyPr/>
+          <a:p/>
+        </p:txBody>
       </p:sp>
       <p:sp>
         <p:nvSpPr>
@@ -4581,6 +4717,10 @@
           </a:solidFill>
           <a:ln/>
         </p:spPr>
+        <p:txBody>
+          <a:bodyPr/>
+          <a:p/>
+        </p:txBody>
       </p:sp>
       <p:sp>
         <p:nvSpPr>
@@ -4601,6 +4741,10 @@
           </a:solidFill>
           <a:ln/>
         </p:spPr>
+        <p:txBody>
+          <a:bodyPr/>
+          <a:p/>
+        </p:txBody>
       </p:sp>
       <p:sp>
         <p:nvSpPr>
@@ -4706,6 +4850,10 @@
             </a:outerShdw>
           </a:effectLst>
         </p:spPr>
+        <p:txBody>
+          <a:bodyPr/>
+          <a:p/>
+        </p:txBody>
       </p:sp>
       <p:sp>
         <p:nvSpPr>
@@ -4726,6 +4874,10 @@
           </a:solidFill>
           <a:ln/>
         </p:spPr>
+        <p:txBody>
+          <a:bodyPr/>
+          <a:p/>
+        </p:txBody>
       </p:sp>
       <p:sp>
         <p:nvSpPr>
@@ -4746,6 +4898,10 @@
           </a:solidFill>
           <a:ln/>
         </p:spPr>
+        <p:txBody>
+          <a:bodyPr/>
+          <a:p/>
+        </p:txBody>
       </p:sp>
       <p:sp>
         <p:nvSpPr>
@@ -4851,6 +5007,10 @@
             </a:outerShdw>
           </a:effectLst>
         </p:spPr>
+        <p:txBody>
+          <a:bodyPr/>
+          <a:p/>
+        </p:txBody>
       </p:sp>
       <p:sp>
         <p:nvSpPr>
@@ -4871,6 +5031,10 @@
           </a:solidFill>
           <a:ln/>
         </p:spPr>
+        <p:txBody>
+          <a:bodyPr/>
+          <a:p/>
+        </p:txBody>
       </p:sp>
       <p:sp>
         <p:nvSpPr>
@@ -4891,6 +5055,10 @@
           </a:solidFill>
           <a:ln/>
         </p:spPr>
+        <p:txBody>
+          <a:bodyPr/>
+          <a:p/>
+        </p:txBody>
       </p:sp>
       <p:sp>
         <p:nvSpPr>
@@ -4996,6 +5164,10 @@
             </a:outerShdw>
           </a:effectLst>
         </p:spPr>
+        <p:txBody>
+          <a:bodyPr/>
+          <a:p/>
+        </p:txBody>
       </p:sp>
       <p:sp>
         <p:nvSpPr>
@@ -5016,6 +5188,10 @@
           </a:solidFill>
           <a:ln/>
         </p:spPr>
+        <p:txBody>
+          <a:bodyPr/>
+          <a:p/>
+        </p:txBody>
       </p:sp>
       <p:sp>
         <p:nvSpPr>
@@ -5036,6 +5212,10 @@
           </a:solidFill>
           <a:ln/>
         </p:spPr>
+        <p:txBody>
+          <a:bodyPr/>
+          <a:p/>
+        </p:txBody>
       </p:sp>
       <p:sp>
         <p:nvSpPr>
@@ -5123,8 +5303,8 @@
         </p:nvSpPr>
         <p:spPr>
           <a:xfrm>
-            <a:off x="731520" y="3337560"/>
-            <a:ext cx="10698480" cy="2606040"/>
+            <a:off x="731520" y="3273552"/>
+            <a:ext cx="10698480" cy="3099816"/>
           </a:xfrm>
           <a:prstGeom prst="rect">
             <a:avLst/>
@@ -5141,6 +5321,10 @@
             </a:outerShdw>
           </a:effectLst>
         </p:spPr>
+        <p:txBody>
+          <a:bodyPr/>
+          <a:p/>
+        </p:txBody>
       </p:sp>
       <p:sp>
         <p:nvSpPr>
@@ -5150,8 +5334,8 @@
         </p:nvSpPr>
         <p:spPr>
           <a:xfrm>
-            <a:off x="731520" y="3337560"/>
-            <a:ext cx="10698480" cy="2606040"/>
+            <a:off x="731520" y="3273552"/>
+            <a:ext cx="10698480" cy="3099816"/>
           </a:xfrm>
           <a:prstGeom prst="rect">
             <a:avLst/>
@@ -6416,6 +6600,10 @@
           </a:solidFill>
           <a:ln/>
         </p:spPr>
+        <p:txBody>
+          <a:bodyPr/>
+          <a:p/>
+        </p:txBody>
       </p:sp>
       <p:sp>
         <p:nvSpPr>
@@ -6436,6 +6624,10 @@
           </a:solidFill>
           <a:ln/>
         </p:spPr>
+        <p:txBody>
+          <a:bodyPr/>
+          <a:p/>
+        </p:txBody>
       </p:sp>
       <p:sp>
         <p:nvSpPr>
@@ -6456,6 +6648,10 @@
           </a:solidFill>
           <a:ln/>
         </p:spPr>
+        <p:txBody>
+          <a:bodyPr/>
+          <a:p/>
+        </p:txBody>
       </p:sp>
       <p:sp>
         <p:nvSpPr>
@@ -6628,6 +6824,10 @@
           </a:solidFill>
           <a:ln/>
         </p:spPr>
+        <p:txBody>
+          <a:bodyPr/>
+          <a:p/>
+        </p:txBody>
       </p:sp>
       <p:sp>
         <p:nvSpPr>
@@ -6648,6 +6848,10 @@
           </a:solidFill>
           <a:ln/>
         </p:spPr>
+        <p:txBody>
+          <a:bodyPr/>
+          <a:p/>
+        </p:txBody>
       </p:sp>
       <p:sp>
         <p:nvSpPr>
@@ -6668,6 +6872,10 @@
           </a:solidFill>
           <a:ln/>
         </p:spPr>
+        <p:txBody>
+          <a:bodyPr/>
+          <a:p/>
+        </p:txBody>
       </p:sp>
       <p:sp>
         <p:nvSpPr>
@@ -6734,6 +6942,10 @@
             </a:outerShdw>
           </a:effectLst>
         </p:spPr>
+        <p:txBody>
+          <a:bodyPr/>
+          <a:p/>
+        </p:txBody>
       </p:sp>
       <p:sp>
         <p:nvSpPr>
@@ -6754,6 +6966,10 @@
           </a:solidFill>
           <a:ln/>
         </p:spPr>
+        <p:txBody>
+          <a:bodyPr/>
+          <a:p/>
+        </p:txBody>
       </p:sp>
       <p:sp>
         <p:nvSpPr>
@@ -6774,6 +6990,10 @@
           </a:solidFill>
           <a:ln/>
         </p:spPr>
+        <p:txBody>
+          <a:bodyPr/>
+          <a:p/>
+        </p:txBody>
       </p:sp>
       <p:sp>
         <p:nvSpPr>
@@ -6918,6 +7138,10 @@
             </a:outerShdw>
           </a:effectLst>
         </p:spPr>
+        <p:txBody>
+          <a:bodyPr/>
+          <a:p/>
+        </p:txBody>
       </p:sp>
       <p:sp>
         <p:nvSpPr>
@@ -6938,6 +7162,10 @@
           </a:solidFill>
           <a:ln/>
         </p:spPr>
+        <p:txBody>
+          <a:bodyPr/>
+          <a:p/>
+        </p:txBody>
       </p:sp>
       <p:sp>
         <p:nvSpPr>
@@ -6958,6 +7186,10 @@
           </a:solidFill>
           <a:ln/>
         </p:spPr>
+        <p:txBody>
+          <a:bodyPr/>
+          <a:p/>
+        </p:txBody>
       </p:sp>
       <p:sp>
         <p:nvSpPr>
@@ -7102,6 +7334,10 @@
             </a:outerShdw>
           </a:effectLst>
         </p:spPr>
+        <p:txBody>
+          <a:bodyPr/>
+          <a:p/>
+        </p:txBody>
       </p:sp>
       <p:sp>
         <p:nvSpPr>
@@ -7122,6 +7358,10 @@
           </a:solidFill>
           <a:ln/>
         </p:spPr>
+        <p:txBody>
+          <a:bodyPr/>
+          <a:p/>
+        </p:txBody>
       </p:sp>
       <p:sp>
         <p:nvSpPr>
@@ -7142,6 +7382,10 @@
           </a:solidFill>
           <a:ln/>
         </p:spPr>
+        <p:txBody>
+          <a:bodyPr/>
+          <a:p/>
+        </p:txBody>
       </p:sp>
       <p:sp>
         <p:nvSpPr>
@@ -7286,6 +7530,10 @@
             </a:outerShdw>
           </a:effectLst>
         </p:spPr>
+        <p:txBody>
+          <a:bodyPr/>
+          <a:p/>
+        </p:txBody>
       </p:sp>
       <p:sp>
         <p:nvSpPr>
@@ -7306,6 +7554,10 @@
           </a:solidFill>
           <a:ln/>
         </p:spPr>
+        <p:txBody>
+          <a:bodyPr/>
+          <a:p/>
+        </p:txBody>
       </p:sp>
       <p:sp>
         <p:nvSpPr>
@@ -7326,6 +7578,10 @@
           </a:solidFill>
           <a:ln/>
         </p:spPr>
+        <p:txBody>
+          <a:bodyPr/>
+          <a:p/>
+        </p:txBody>
       </p:sp>
       <p:sp>
         <p:nvSpPr>
@@ -7470,6 +7726,10 @@
             </a:outerShdw>
           </a:effectLst>
         </p:spPr>
+        <p:txBody>
+          <a:bodyPr/>
+          <a:p/>
+        </p:txBody>
       </p:sp>
       <p:sp>
         <p:nvSpPr>
@@ -7490,6 +7750,10 @@
           </a:solidFill>
           <a:ln/>
         </p:spPr>
+        <p:txBody>
+          <a:bodyPr/>
+          <a:p/>
+        </p:txBody>
       </p:sp>
       <p:sp>
         <p:nvSpPr>
@@ -7510,6 +7774,10 @@
           </a:solidFill>
           <a:ln/>
         </p:spPr>
+        <p:txBody>
+          <a:bodyPr/>
+          <a:p/>
+        </p:txBody>
       </p:sp>
       <p:sp>
         <p:nvSpPr>
@@ -7654,6 +7922,10 @@
             </a:outerShdw>
           </a:effectLst>
         </p:spPr>
+        <p:txBody>
+          <a:bodyPr/>
+          <a:p/>
+        </p:txBody>
       </p:sp>
       <p:sp>
         <p:nvSpPr>
@@ -7674,6 +7946,10 @@
           </a:solidFill>
           <a:ln/>
         </p:spPr>
+        <p:txBody>
+          <a:bodyPr/>
+          <a:p/>
+        </p:txBody>
       </p:sp>
       <p:sp>
         <p:nvSpPr>
@@ -7694,6 +7970,10 @@
           </a:solidFill>
           <a:ln/>
         </p:spPr>
+        <p:txBody>
+          <a:bodyPr/>
+          <a:p/>
+        </p:txBody>
       </p:sp>
       <p:sp>
         <p:nvSpPr>
@@ -7902,6 +8182,10 @@
           </a:solidFill>
           <a:ln/>
         </p:spPr>
+        <p:txBody>
+          <a:bodyPr/>
+          <a:p/>
+        </p:txBody>
       </p:sp>
       <p:sp>
         <p:nvSpPr>
@@ -7922,6 +8206,10 @@
           </a:solidFill>
           <a:ln/>
         </p:spPr>
+        <p:txBody>
+          <a:bodyPr/>
+          <a:p/>
+        </p:txBody>
       </p:sp>
       <p:sp>
         <p:nvSpPr>
@@ -7942,6 +8230,10 @@
           </a:solidFill>
           <a:ln/>
         </p:spPr>
+        <p:txBody>
+          <a:bodyPr/>
+          <a:p/>
+        </p:txBody>
       </p:sp>
       <p:sp>
         <p:nvSpPr>
@@ -8008,6 +8300,10 @@
             </a:outerShdw>
           </a:effectLst>
         </p:spPr>
+        <p:txBody>
+          <a:bodyPr/>
+          <a:p/>
+        </p:txBody>
       </p:sp>
       <p:sp>
         <p:nvSpPr>
@@ -8074,6 +8370,10 @@
             </a:outerShdw>
           </a:effectLst>
         </p:spPr>
+        <p:txBody>
+          <a:bodyPr/>
+          <a:p/>
+        </p:txBody>
       </p:sp>
       <p:sp>
         <p:nvSpPr>
@@ -8246,6 +8546,10 @@
           </a:solidFill>
           <a:ln/>
         </p:spPr>
+        <p:txBody>
+          <a:bodyPr/>
+          <a:p/>
+        </p:txBody>
       </p:sp>
       <p:sp>
         <p:nvSpPr>
@@ -8266,6 +8570,10 @@
           </a:solidFill>
           <a:ln/>
         </p:spPr>
+        <p:txBody>
+          <a:bodyPr/>
+          <a:p/>
+        </p:txBody>
       </p:sp>
       <p:sp>
         <p:nvSpPr>
@@ -8286,6 +8594,10 @@
           </a:solidFill>
           <a:ln/>
         </p:spPr>
+        <p:txBody>
+          <a:bodyPr/>
+          <a:p/>
+        </p:txBody>
       </p:sp>
       <p:sp>
         <p:nvSpPr>
@@ -8352,6 +8664,10 @@
             </a:outerShdw>
           </a:effectLst>
         </p:spPr>
+        <p:txBody>
+          <a:bodyPr/>
+          <a:p/>
+        </p:txBody>
       </p:sp>
       <p:sp>
         <p:nvSpPr>
@@ -8418,6 +8734,10 @@
             </a:outerShdw>
           </a:effectLst>
         </p:spPr>
+        <p:txBody>
+          <a:bodyPr/>
+          <a:p/>
+        </p:txBody>
       </p:sp>
       <p:sp>
         <p:nvSpPr>
@@ -8590,6 +8910,10 @@
           </a:solidFill>
           <a:ln/>
         </p:spPr>
+        <p:txBody>
+          <a:bodyPr/>
+          <a:p/>
+        </p:txBody>
       </p:sp>
       <p:sp>
         <p:nvSpPr>
@@ -8610,6 +8934,10 @@
           </a:solidFill>
           <a:ln/>
         </p:spPr>
+        <p:txBody>
+          <a:bodyPr/>
+          <a:p/>
+        </p:txBody>
       </p:sp>
       <p:sp>
         <p:nvSpPr>
@@ -8630,6 +8958,10 @@
           </a:solidFill>
           <a:ln/>
         </p:spPr>
+        <p:txBody>
+          <a:bodyPr/>
+          <a:p/>
+        </p:txBody>
       </p:sp>
       <p:sp>
         <p:nvSpPr>
@@ -8696,6 +9028,10 @@
             </a:outerShdw>
           </a:effectLst>
         </p:spPr>
+        <p:txBody>
+          <a:bodyPr/>
+          <a:p/>
+        </p:txBody>
       </p:sp>
       <p:sp>
         <p:nvSpPr>
@@ -8762,6 +9098,10 @@
             </a:outerShdw>
           </a:effectLst>
         </p:spPr>
+        <p:txBody>
+          <a:bodyPr/>
+          <a:p/>
+        </p:txBody>
       </p:sp>
       <p:sp>
         <p:nvSpPr>
@@ -8934,6 +9274,10 @@
           </a:solidFill>
           <a:ln/>
         </p:spPr>
+        <p:txBody>
+          <a:bodyPr/>
+          <a:p/>
+        </p:txBody>
       </p:sp>
       <p:sp>
         <p:nvSpPr>
@@ -8954,6 +9298,10 @@
           </a:solidFill>
           <a:ln/>
         </p:spPr>
+        <p:txBody>
+          <a:bodyPr/>
+          <a:p/>
+        </p:txBody>
       </p:sp>
       <p:sp>
         <p:nvSpPr>
@@ -8974,6 +9322,10 @@
           </a:solidFill>
           <a:ln/>
         </p:spPr>
+        <p:txBody>
+          <a:bodyPr/>
+          <a:p/>
+        </p:txBody>
       </p:sp>
       <p:sp>
         <p:nvSpPr>
@@ -9040,6 +9392,10 @@
             </a:outerShdw>
           </a:effectLst>
         </p:spPr>
+        <p:txBody>
+          <a:bodyPr/>
+          <a:p/>
+        </p:txBody>
       </p:sp>
       <p:sp>
         <p:nvSpPr>
@@ -9212,6 +9568,10 @@
           </a:solidFill>
           <a:ln/>
         </p:spPr>
+        <p:txBody>
+          <a:bodyPr/>
+          <a:p/>
+        </p:txBody>
       </p:sp>
       <p:sp>
         <p:nvSpPr>
@@ -9232,6 +9592,10 @@
           </a:solidFill>
           <a:ln/>
         </p:spPr>
+        <p:txBody>
+          <a:bodyPr/>
+          <a:p/>
+        </p:txBody>
       </p:sp>
       <p:sp>
         <p:nvSpPr>
@@ -9252,6 +9616,10 @@
           </a:solidFill>
           <a:ln/>
         </p:spPr>
+        <p:txBody>
+          <a:bodyPr/>
+          <a:p/>
+        </p:txBody>
       </p:sp>
       <p:sp>
         <p:nvSpPr>
@@ -9318,6 +9686,10 @@
             </a:outerShdw>
           </a:effectLst>
         </p:spPr>
+        <p:txBody>
+          <a:bodyPr/>
+          <a:p/>
+        </p:txBody>
       </p:sp>
       <p:sp>
         <p:nvSpPr>
@@ -9384,6 +9756,10 @@
             </a:outerShdw>
           </a:effectLst>
         </p:spPr>
+        <p:txBody>
+          <a:bodyPr/>
+          <a:p/>
+        </p:txBody>
       </p:sp>
       <p:sp>
         <p:nvSpPr>
@@ -9556,6 +9932,10 @@
           </a:solidFill>
           <a:ln/>
         </p:spPr>
+        <p:txBody>
+          <a:bodyPr/>
+          <a:p/>
+        </p:txBody>
       </p:sp>
       <p:sp>
         <p:nvSpPr>
@@ -9576,6 +9956,10 @@
           </a:solidFill>
           <a:ln/>
         </p:spPr>
+        <p:txBody>
+          <a:bodyPr/>
+          <a:p/>
+        </p:txBody>
       </p:sp>
       <p:sp>
         <p:nvSpPr>
@@ -9596,6 +9980,10 @@
           </a:solidFill>
           <a:ln/>
         </p:spPr>
+        <p:txBody>
+          <a:bodyPr/>
+          <a:p/>
+        </p:txBody>
       </p:sp>
       <p:sp>
         <p:nvSpPr>
@@ -9662,6 +10050,10 @@
             </a:outerShdw>
           </a:effectLst>
         </p:spPr>
+        <p:txBody>
+          <a:bodyPr/>
+          <a:p/>
+        </p:txBody>
       </p:sp>
       <p:sp>
         <p:nvSpPr>
@@ -9728,6 +10120,10 @@
             </a:outerShdw>
           </a:effectLst>
         </p:spPr>
+        <p:txBody>
+          <a:bodyPr/>
+          <a:p/>
+        </p:txBody>
       </p:sp>
       <p:sp>
         <p:nvSpPr>

--- a/backend/templates/pptx/gradient_modern.pptx
+++ b/backend/templates/pptx/gradient_modern.pptx
@@ -2496,10 +2496,6 @@
           </a:solidFill>
           <a:ln/>
         </p:spPr>
-        <p:txBody>
-          <a:bodyPr/>
-          <a:p/>
-        </p:txBody>
       </p:sp>
       <p:sp>
         <p:nvSpPr>
@@ -2520,10 +2516,6 @@
           </a:solidFill>
           <a:ln/>
         </p:spPr>
-        <p:txBody>
-          <a:bodyPr/>
-          <a:p/>
-        </p:txBody>
       </p:sp>
       <p:sp>
         <p:nvSpPr>
@@ -2544,10 +2536,6 @@
           </a:solidFill>
           <a:ln/>
         </p:spPr>
-        <p:txBody>
-          <a:bodyPr/>
-          <a:p/>
-        </p:txBody>
       </p:sp>
       <p:sp>
         <p:nvSpPr>
@@ -2841,10 +2829,6 @@
           </a:solidFill>
           <a:ln/>
         </p:spPr>
-        <p:txBody>
-          <a:bodyPr/>
-          <a:p/>
-        </p:txBody>
       </p:sp>
       <p:sp>
         <p:nvSpPr>
@@ -2865,10 +2849,6 @@
           </a:solidFill>
           <a:ln/>
         </p:spPr>
-        <p:txBody>
-          <a:bodyPr/>
-          <a:p/>
-        </p:txBody>
       </p:sp>
       <p:sp>
         <p:nvSpPr>
@@ -2889,10 +2869,6 @@
           </a:solidFill>
           <a:ln/>
         </p:spPr>
-        <p:txBody>
-          <a:bodyPr/>
-          <a:p/>
-        </p:txBody>
       </p:sp>
     </p:spTree>
   </p:cSld>
@@ -2945,10 +2921,6 @@
           </a:solidFill>
           <a:ln/>
         </p:spPr>
-        <p:txBody>
-          <a:bodyPr/>
-          <a:p/>
-        </p:txBody>
       </p:sp>
       <p:sp>
         <p:nvSpPr>
@@ -2969,10 +2941,6 @@
           </a:solidFill>
           <a:ln/>
         </p:spPr>
-        <p:txBody>
-          <a:bodyPr/>
-          <a:p/>
-        </p:txBody>
       </p:sp>
       <p:sp>
         <p:nvSpPr>
@@ -2993,10 +2961,6 @@
           </a:solidFill>
           <a:ln/>
         </p:spPr>
-        <p:txBody>
-          <a:bodyPr/>
-          <a:p/>
-        </p:txBody>
       </p:sp>
       <p:sp>
         <p:nvSpPr>
@@ -3063,10 +3027,6 @@
             </a:outerShdw>
           </a:effectLst>
         </p:spPr>
-        <p:txBody>
-          <a:bodyPr/>
-          <a:p/>
-        </p:txBody>
       </p:sp>
       <p:sp>
         <p:nvSpPr>
@@ -3239,10 +3199,6 @@
           </a:solidFill>
           <a:ln/>
         </p:spPr>
-        <p:txBody>
-          <a:bodyPr/>
-          <a:p/>
-        </p:txBody>
       </p:sp>
       <p:sp>
         <p:nvSpPr>
@@ -3263,10 +3219,6 @@
           </a:solidFill>
           <a:ln/>
         </p:spPr>
-        <p:txBody>
-          <a:bodyPr/>
-          <a:p/>
-        </p:txBody>
       </p:sp>
       <p:sp>
         <p:nvSpPr>
@@ -3287,10 +3239,6 @@
           </a:solidFill>
           <a:ln/>
         </p:spPr>
-        <p:txBody>
-          <a:bodyPr/>
-          <a:p/>
-        </p:txBody>
       </p:sp>
       <p:sp>
         <p:nvSpPr>
@@ -3357,10 +3305,6 @@
             </a:outerShdw>
           </a:effectLst>
         </p:spPr>
-        <p:txBody>
-          <a:bodyPr/>
-          <a:p/>
-        </p:txBody>
       </p:sp>
       <p:sp>
         <p:nvSpPr>
@@ -3427,10 +3371,6 @@
             </a:outerShdw>
           </a:effectLst>
         </p:spPr>
-        <p:txBody>
-          <a:bodyPr/>
-          <a:p/>
-        </p:txBody>
       </p:sp>
       <p:sp>
         <p:nvSpPr>
@@ -3603,10 +3543,6 @@
           </a:solidFill>
           <a:ln/>
         </p:spPr>
-        <p:txBody>
-          <a:bodyPr/>
-          <a:p/>
-        </p:txBody>
       </p:sp>
       <p:sp>
         <p:nvSpPr>
@@ -3627,10 +3563,6 @@
           </a:solidFill>
           <a:ln/>
         </p:spPr>
-        <p:txBody>
-          <a:bodyPr/>
-          <a:p/>
-        </p:txBody>
       </p:sp>
       <p:sp>
         <p:nvSpPr>
@@ -3651,10 +3583,6 @@
           </a:solidFill>
           <a:ln/>
         </p:spPr>
-        <p:txBody>
-          <a:bodyPr/>
-          <a:p/>
-        </p:txBody>
       </p:sp>
       <p:sp>
         <p:nvSpPr>
@@ -3721,10 +3649,6 @@
             </a:outerShdw>
           </a:effectLst>
         </p:spPr>
-        <p:txBody>
-          <a:bodyPr/>
-          <a:p/>
-        </p:txBody>
       </p:sp>
       <p:sp>
         <p:nvSpPr>
@@ -3897,10 +3821,6 @@
           </a:solidFill>
           <a:ln/>
         </p:spPr>
-        <p:txBody>
-          <a:bodyPr/>
-          <a:p/>
-        </p:txBody>
       </p:sp>
       <p:sp>
         <p:nvSpPr>
@@ -3921,10 +3841,6 @@
           </a:solidFill>
           <a:ln/>
         </p:spPr>
-        <p:txBody>
-          <a:bodyPr/>
-          <a:p/>
-        </p:txBody>
       </p:sp>
       <p:sp>
         <p:nvSpPr>
@@ -3945,10 +3861,6 @@
           </a:solidFill>
           <a:ln/>
         </p:spPr>
-        <p:txBody>
-          <a:bodyPr/>
-          <a:p/>
-        </p:txBody>
       </p:sp>
       <p:sp>
         <p:nvSpPr>
@@ -4015,10 +3927,6 @@
             </a:outerShdw>
           </a:effectLst>
         </p:spPr>
-        <p:txBody>
-          <a:bodyPr/>
-          <a:p/>
-        </p:txBody>
       </p:sp>
       <p:sp>
         <p:nvSpPr>
@@ -4085,10 +3993,6 @@
             </a:outerShdw>
           </a:effectLst>
         </p:spPr>
-        <p:txBody>
-          <a:bodyPr/>
-          <a:p/>
-        </p:txBody>
       </p:sp>
       <p:sp>
         <p:nvSpPr>
@@ -4261,10 +4165,6 @@
           </a:solidFill>
           <a:ln/>
         </p:spPr>
-        <p:txBody>
-          <a:bodyPr/>
-          <a:p/>
-        </p:txBody>
       </p:sp>
       <p:sp>
         <p:nvSpPr>
@@ -4285,10 +4185,6 @@
           </a:solidFill>
           <a:ln/>
         </p:spPr>
-        <p:txBody>
-          <a:bodyPr/>
-          <a:p/>
-        </p:txBody>
       </p:sp>
       <p:sp>
         <p:nvSpPr>
@@ -4309,10 +4205,6 @@
           </a:solidFill>
           <a:ln/>
         </p:spPr>
-        <p:txBody>
-          <a:bodyPr/>
-          <a:p/>
-        </p:txBody>
       </p:sp>
       <p:sp>
         <p:nvSpPr>
@@ -4379,10 +4271,6 @@
             </a:outerShdw>
           </a:effectLst>
         </p:spPr>
-        <p:txBody>
-          <a:bodyPr/>
-          <a:p/>
-        </p:txBody>
       </p:sp>
       <p:sp>
         <p:nvSpPr>
@@ -4403,10 +4291,6 @@
           </a:solidFill>
           <a:ln/>
         </p:spPr>
-        <p:txBody>
-          <a:bodyPr/>
-          <a:p/>
-        </p:txBody>
       </p:sp>
       <p:sp>
         <p:nvSpPr>
@@ -4427,10 +4311,6 @@
           </a:solidFill>
           <a:ln/>
         </p:spPr>
-        <p:txBody>
-          <a:bodyPr/>
-          <a:p/>
-        </p:txBody>
       </p:sp>
       <p:sp>
         <p:nvSpPr>
@@ -4536,10 +4416,6 @@
             </a:outerShdw>
           </a:effectLst>
         </p:spPr>
-        <p:txBody>
-          <a:bodyPr/>
-          <a:p/>
-        </p:txBody>
       </p:sp>
       <p:sp>
         <p:nvSpPr>
@@ -4560,10 +4436,6 @@
           </a:solidFill>
           <a:ln/>
         </p:spPr>
-        <p:txBody>
-          <a:bodyPr/>
-          <a:p/>
-        </p:txBody>
       </p:sp>
       <p:sp>
         <p:nvSpPr>
@@ -4584,10 +4456,6 @@
           </a:solidFill>
           <a:ln/>
         </p:spPr>
-        <p:txBody>
-          <a:bodyPr/>
-          <a:p/>
-        </p:txBody>
       </p:sp>
       <p:sp>
         <p:nvSpPr>
@@ -4693,10 +4561,6 @@
             </a:outerShdw>
           </a:effectLst>
         </p:spPr>
-        <p:txBody>
-          <a:bodyPr/>
-          <a:p/>
-        </p:txBody>
       </p:sp>
       <p:sp>
         <p:nvSpPr>
@@ -4717,10 +4581,6 @@
           </a:solidFill>
           <a:ln/>
         </p:spPr>
-        <p:txBody>
-          <a:bodyPr/>
-          <a:p/>
-        </p:txBody>
       </p:sp>
       <p:sp>
         <p:nvSpPr>
@@ -4741,10 +4601,6 @@
           </a:solidFill>
           <a:ln/>
         </p:spPr>
-        <p:txBody>
-          <a:bodyPr/>
-          <a:p/>
-        </p:txBody>
       </p:sp>
       <p:sp>
         <p:nvSpPr>
@@ -4850,10 +4706,6 @@
             </a:outerShdw>
           </a:effectLst>
         </p:spPr>
-        <p:txBody>
-          <a:bodyPr/>
-          <a:p/>
-        </p:txBody>
       </p:sp>
       <p:sp>
         <p:nvSpPr>
@@ -4874,10 +4726,6 @@
           </a:solidFill>
           <a:ln/>
         </p:spPr>
-        <p:txBody>
-          <a:bodyPr/>
-          <a:p/>
-        </p:txBody>
       </p:sp>
       <p:sp>
         <p:nvSpPr>
@@ -4898,10 +4746,6 @@
           </a:solidFill>
           <a:ln/>
         </p:spPr>
-        <p:txBody>
-          <a:bodyPr/>
-          <a:p/>
-        </p:txBody>
       </p:sp>
       <p:sp>
         <p:nvSpPr>
@@ -5007,10 +4851,6 @@
             </a:outerShdw>
           </a:effectLst>
         </p:spPr>
-        <p:txBody>
-          <a:bodyPr/>
-          <a:p/>
-        </p:txBody>
       </p:sp>
       <p:sp>
         <p:nvSpPr>
@@ -5031,10 +4871,6 @@
           </a:solidFill>
           <a:ln/>
         </p:spPr>
-        <p:txBody>
-          <a:bodyPr/>
-          <a:p/>
-        </p:txBody>
       </p:sp>
       <p:sp>
         <p:nvSpPr>
@@ -5055,10 +4891,6 @@
           </a:solidFill>
           <a:ln/>
         </p:spPr>
-        <p:txBody>
-          <a:bodyPr/>
-          <a:p/>
-        </p:txBody>
       </p:sp>
       <p:sp>
         <p:nvSpPr>
@@ -5164,10 +4996,6 @@
             </a:outerShdw>
           </a:effectLst>
         </p:spPr>
-        <p:txBody>
-          <a:bodyPr/>
-          <a:p/>
-        </p:txBody>
       </p:sp>
       <p:sp>
         <p:nvSpPr>
@@ -5188,10 +5016,6 @@
           </a:solidFill>
           <a:ln/>
         </p:spPr>
-        <p:txBody>
-          <a:bodyPr/>
-          <a:p/>
-        </p:txBody>
       </p:sp>
       <p:sp>
         <p:nvSpPr>
@@ -5212,10 +5036,6 @@
           </a:solidFill>
           <a:ln/>
         </p:spPr>
-        <p:txBody>
-          <a:bodyPr/>
-          <a:p/>
-        </p:txBody>
       </p:sp>
       <p:sp>
         <p:nvSpPr>
@@ -5303,8 +5123,8 @@
         </p:nvSpPr>
         <p:spPr>
           <a:xfrm>
-            <a:off x="731520" y="3273552"/>
-            <a:ext cx="10698480" cy="3099816"/>
+            <a:off x="731520" y="3337560"/>
+            <a:ext cx="10698480" cy="2606040"/>
           </a:xfrm>
           <a:prstGeom prst="rect">
             <a:avLst/>
@@ -5321,10 +5141,6 @@
             </a:outerShdw>
           </a:effectLst>
         </p:spPr>
-        <p:txBody>
-          <a:bodyPr/>
-          <a:p/>
-        </p:txBody>
       </p:sp>
       <p:sp>
         <p:nvSpPr>
@@ -5334,8 +5150,8 @@
         </p:nvSpPr>
         <p:spPr>
           <a:xfrm>
-            <a:off x="731520" y="3273552"/>
-            <a:ext cx="10698480" cy="3099816"/>
+            <a:off x="731520" y="3337560"/>
+            <a:ext cx="10698480" cy="2606040"/>
           </a:xfrm>
           <a:prstGeom prst="rect">
             <a:avLst/>
@@ -6600,10 +6416,6 @@
           </a:solidFill>
           <a:ln/>
         </p:spPr>
-        <p:txBody>
-          <a:bodyPr/>
-          <a:p/>
-        </p:txBody>
       </p:sp>
       <p:sp>
         <p:nvSpPr>
@@ -6624,10 +6436,6 @@
           </a:solidFill>
           <a:ln/>
         </p:spPr>
-        <p:txBody>
-          <a:bodyPr/>
-          <a:p/>
-        </p:txBody>
       </p:sp>
       <p:sp>
         <p:nvSpPr>
@@ -6648,10 +6456,6 @@
           </a:solidFill>
           <a:ln/>
         </p:spPr>
-        <p:txBody>
-          <a:bodyPr/>
-          <a:p/>
-        </p:txBody>
       </p:sp>
       <p:sp>
         <p:nvSpPr>
@@ -6824,10 +6628,6 @@
           </a:solidFill>
           <a:ln/>
         </p:spPr>
-        <p:txBody>
-          <a:bodyPr/>
-          <a:p/>
-        </p:txBody>
       </p:sp>
       <p:sp>
         <p:nvSpPr>
@@ -6848,10 +6648,6 @@
           </a:solidFill>
           <a:ln/>
         </p:spPr>
-        <p:txBody>
-          <a:bodyPr/>
-          <a:p/>
-        </p:txBody>
       </p:sp>
       <p:sp>
         <p:nvSpPr>
@@ -6872,10 +6668,6 @@
           </a:solidFill>
           <a:ln/>
         </p:spPr>
-        <p:txBody>
-          <a:bodyPr/>
-          <a:p/>
-        </p:txBody>
       </p:sp>
       <p:sp>
         <p:nvSpPr>
@@ -6942,10 +6734,6 @@
             </a:outerShdw>
           </a:effectLst>
         </p:spPr>
-        <p:txBody>
-          <a:bodyPr/>
-          <a:p/>
-        </p:txBody>
       </p:sp>
       <p:sp>
         <p:nvSpPr>
@@ -6966,10 +6754,6 @@
           </a:solidFill>
           <a:ln/>
         </p:spPr>
-        <p:txBody>
-          <a:bodyPr/>
-          <a:p/>
-        </p:txBody>
       </p:sp>
       <p:sp>
         <p:nvSpPr>
@@ -6990,10 +6774,6 @@
           </a:solidFill>
           <a:ln/>
         </p:spPr>
-        <p:txBody>
-          <a:bodyPr/>
-          <a:p/>
-        </p:txBody>
       </p:sp>
       <p:sp>
         <p:nvSpPr>
@@ -7138,10 +6918,6 @@
             </a:outerShdw>
           </a:effectLst>
         </p:spPr>
-        <p:txBody>
-          <a:bodyPr/>
-          <a:p/>
-        </p:txBody>
       </p:sp>
       <p:sp>
         <p:nvSpPr>
@@ -7162,10 +6938,6 @@
           </a:solidFill>
           <a:ln/>
         </p:spPr>
-        <p:txBody>
-          <a:bodyPr/>
-          <a:p/>
-        </p:txBody>
       </p:sp>
       <p:sp>
         <p:nvSpPr>
@@ -7186,10 +6958,6 @@
           </a:solidFill>
           <a:ln/>
         </p:spPr>
-        <p:txBody>
-          <a:bodyPr/>
-          <a:p/>
-        </p:txBody>
       </p:sp>
       <p:sp>
         <p:nvSpPr>
@@ -7334,10 +7102,6 @@
             </a:outerShdw>
           </a:effectLst>
         </p:spPr>
-        <p:txBody>
-          <a:bodyPr/>
-          <a:p/>
-        </p:txBody>
       </p:sp>
       <p:sp>
         <p:nvSpPr>
@@ -7358,10 +7122,6 @@
           </a:solidFill>
           <a:ln/>
         </p:spPr>
-        <p:txBody>
-          <a:bodyPr/>
-          <a:p/>
-        </p:txBody>
       </p:sp>
       <p:sp>
         <p:nvSpPr>
@@ -7382,10 +7142,6 @@
           </a:solidFill>
           <a:ln/>
         </p:spPr>
-        <p:txBody>
-          <a:bodyPr/>
-          <a:p/>
-        </p:txBody>
       </p:sp>
       <p:sp>
         <p:nvSpPr>
@@ -7530,10 +7286,6 @@
             </a:outerShdw>
           </a:effectLst>
         </p:spPr>
-        <p:txBody>
-          <a:bodyPr/>
-          <a:p/>
-        </p:txBody>
       </p:sp>
       <p:sp>
         <p:nvSpPr>
@@ -7554,10 +7306,6 @@
           </a:solidFill>
           <a:ln/>
         </p:spPr>
-        <p:txBody>
-          <a:bodyPr/>
-          <a:p/>
-        </p:txBody>
       </p:sp>
       <p:sp>
         <p:nvSpPr>
@@ -7578,10 +7326,6 @@
           </a:solidFill>
           <a:ln/>
         </p:spPr>
-        <p:txBody>
-          <a:bodyPr/>
-          <a:p/>
-        </p:txBody>
       </p:sp>
       <p:sp>
         <p:nvSpPr>
@@ -7726,10 +7470,6 @@
             </a:outerShdw>
           </a:effectLst>
         </p:spPr>
-        <p:txBody>
-          <a:bodyPr/>
-          <a:p/>
-        </p:txBody>
       </p:sp>
       <p:sp>
         <p:nvSpPr>
@@ -7750,10 +7490,6 @@
           </a:solidFill>
           <a:ln/>
         </p:spPr>
-        <p:txBody>
-          <a:bodyPr/>
-          <a:p/>
-        </p:txBody>
       </p:sp>
       <p:sp>
         <p:nvSpPr>
@@ -7774,10 +7510,6 @@
           </a:solidFill>
           <a:ln/>
         </p:spPr>
-        <p:txBody>
-          <a:bodyPr/>
-          <a:p/>
-        </p:txBody>
       </p:sp>
       <p:sp>
         <p:nvSpPr>
@@ -7922,10 +7654,6 @@
             </a:outerShdw>
           </a:effectLst>
         </p:spPr>
-        <p:txBody>
-          <a:bodyPr/>
-          <a:p/>
-        </p:txBody>
       </p:sp>
       <p:sp>
         <p:nvSpPr>
@@ -7946,10 +7674,6 @@
           </a:solidFill>
           <a:ln/>
         </p:spPr>
-        <p:txBody>
-          <a:bodyPr/>
-          <a:p/>
-        </p:txBody>
       </p:sp>
       <p:sp>
         <p:nvSpPr>
@@ -7970,10 +7694,6 @@
           </a:solidFill>
           <a:ln/>
         </p:spPr>
-        <p:txBody>
-          <a:bodyPr/>
-          <a:p/>
-        </p:txBody>
       </p:sp>
       <p:sp>
         <p:nvSpPr>
@@ -8182,10 +7902,6 @@
           </a:solidFill>
           <a:ln/>
         </p:spPr>
-        <p:txBody>
-          <a:bodyPr/>
-          <a:p/>
-        </p:txBody>
       </p:sp>
       <p:sp>
         <p:nvSpPr>
@@ -8206,10 +7922,6 @@
           </a:solidFill>
           <a:ln/>
         </p:spPr>
-        <p:txBody>
-          <a:bodyPr/>
-          <a:p/>
-        </p:txBody>
       </p:sp>
       <p:sp>
         <p:nvSpPr>
@@ -8230,10 +7942,6 @@
           </a:solidFill>
           <a:ln/>
         </p:spPr>
-        <p:txBody>
-          <a:bodyPr/>
-          <a:p/>
-        </p:txBody>
       </p:sp>
       <p:sp>
         <p:nvSpPr>
@@ -8300,10 +8008,6 @@
             </a:outerShdw>
           </a:effectLst>
         </p:spPr>
-        <p:txBody>
-          <a:bodyPr/>
-          <a:p/>
-        </p:txBody>
       </p:sp>
       <p:sp>
         <p:nvSpPr>
@@ -8370,10 +8074,6 @@
             </a:outerShdw>
           </a:effectLst>
         </p:spPr>
-        <p:txBody>
-          <a:bodyPr/>
-          <a:p/>
-        </p:txBody>
       </p:sp>
       <p:sp>
         <p:nvSpPr>
@@ -8546,10 +8246,6 @@
           </a:solidFill>
           <a:ln/>
         </p:spPr>
-        <p:txBody>
-          <a:bodyPr/>
-          <a:p/>
-        </p:txBody>
       </p:sp>
       <p:sp>
         <p:nvSpPr>
@@ -8570,10 +8266,6 @@
           </a:solidFill>
           <a:ln/>
         </p:spPr>
-        <p:txBody>
-          <a:bodyPr/>
-          <a:p/>
-        </p:txBody>
       </p:sp>
       <p:sp>
         <p:nvSpPr>
@@ -8594,10 +8286,6 @@
           </a:solidFill>
           <a:ln/>
         </p:spPr>
-        <p:txBody>
-          <a:bodyPr/>
-          <a:p/>
-        </p:txBody>
       </p:sp>
       <p:sp>
         <p:nvSpPr>
@@ -8664,10 +8352,6 @@
             </a:outerShdw>
           </a:effectLst>
         </p:spPr>
-        <p:txBody>
-          <a:bodyPr/>
-          <a:p/>
-        </p:txBody>
       </p:sp>
       <p:sp>
         <p:nvSpPr>
@@ -8734,10 +8418,6 @@
             </a:outerShdw>
           </a:effectLst>
         </p:spPr>
-        <p:txBody>
-          <a:bodyPr/>
-          <a:p/>
-        </p:txBody>
       </p:sp>
       <p:sp>
         <p:nvSpPr>
@@ -8814,7 +8494,7 @@
                 <a:ea typeface="Calibri" pitchFamily="34" charset="-122"/>
                 <a:cs typeface="Calibri" pitchFamily="34" charset="-120"/>
               </a:rPr>
-              <a:t>{{website_narrative}}</a:t>
+              <a:t>{{engagement_narrative}}</a:t>
             </a:r>
             <a:endParaRPr lang="en-US" sz="1200" dirty="0"/>
           </a:p>
@@ -8910,10 +8590,6 @@
           </a:solidFill>
           <a:ln/>
         </p:spPr>
-        <p:txBody>
-          <a:bodyPr/>
-          <a:p/>
-        </p:txBody>
       </p:sp>
       <p:sp>
         <p:nvSpPr>
@@ -8934,10 +8610,6 @@
           </a:solidFill>
           <a:ln/>
         </p:spPr>
-        <p:txBody>
-          <a:bodyPr/>
-          <a:p/>
-        </p:txBody>
       </p:sp>
       <p:sp>
         <p:nvSpPr>
@@ -8958,10 +8630,6 @@
           </a:solidFill>
           <a:ln/>
         </p:spPr>
-        <p:txBody>
-          <a:bodyPr/>
-          <a:p/>
-        </p:txBody>
       </p:sp>
       <p:sp>
         <p:nvSpPr>
@@ -9028,10 +8696,6 @@
             </a:outerShdw>
           </a:effectLst>
         </p:spPr>
-        <p:txBody>
-          <a:bodyPr/>
-          <a:p/>
-        </p:txBody>
       </p:sp>
       <p:sp>
         <p:nvSpPr>
@@ -9098,10 +8762,6 @@
             </a:outerShdw>
           </a:effectLst>
         </p:spPr>
-        <p:txBody>
-          <a:bodyPr/>
-          <a:p/>
-        </p:txBody>
       </p:sp>
       <p:sp>
         <p:nvSpPr>
@@ -9274,10 +8934,6 @@
           </a:solidFill>
           <a:ln/>
         </p:spPr>
-        <p:txBody>
-          <a:bodyPr/>
-          <a:p/>
-        </p:txBody>
       </p:sp>
       <p:sp>
         <p:nvSpPr>
@@ -9298,10 +8954,6 @@
           </a:solidFill>
           <a:ln/>
         </p:spPr>
-        <p:txBody>
-          <a:bodyPr/>
-          <a:p/>
-        </p:txBody>
       </p:sp>
       <p:sp>
         <p:nvSpPr>
@@ -9322,10 +8974,6 @@
           </a:solidFill>
           <a:ln/>
         </p:spPr>
-        <p:txBody>
-          <a:bodyPr/>
-          <a:p/>
-        </p:txBody>
       </p:sp>
       <p:sp>
         <p:nvSpPr>
@@ -9392,10 +9040,6 @@
             </a:outerShdw>
           </a:effectLst>
         </p:spPr>
-        <p:txBody>
-          <a:bodyPr/>
-          <a:p/>
-        </p:txBody>
       </p:sp>
       <p:sp>
         <p:nvSpPr>
@@ -9568,10 +9212,6 @@
           </a:solidFill>
           <a:ln/>
         </p:spPr>
-        <p:txBody>
-          <a:bodyPr/>
-          <a:p/>
-        </p:txBody>
       </p:sp>
       <p:sp>
         <p:nvSpPr>
@@ -9592,10 +9232,6 @@
           </a:solidFill>
           <a:ln/>
         </p:spPr>
-        <p:txBody>
-          <a:bodyPr/>
-          <a:p/>
-        </p:txBody>
       </p:sp>
       <p:sp>
         <p:nvSpPr>
@@ -9616,10 +9252,6 @@
           </a:solidFill>
           <a:ln/>
         </p:spPr>
-        <p:txBody>
-          <a:bodyPr/>
-          <a:p/>
-        </p:txBody>
       </p:sp>
       <p:sp>
         <p:nvSpPr>
@@ -9686,10 +9318,6 @@
             </a:outerShdw>
           </a:effectLst>
         </p:spPr>
-        <p:txBody>
-          <a:bodyPr/>
-          <a:p/>
-        </p:txBody>
       </p:sp>
       <p:sp>
         <p:nvSpPr>
@@ -9756,10 +9384,6 @@
             </a:outerShdw>
           </a:effectLst>
         </p:spPr>
-        <p:txBody>
-          <a:bodyPr/>
-          <a:p/>
-        </p:txBody>
       </p:sp>
       <p:sp>
         <p:nvSpPr>
@@ -9932,10 +9556,6 @@
           </a:solidFill>
           <a:ln/>
         </p:spPr>
-        <p:txBody>
-          <a:bodyPr/>
-          <a:p/>
-        </p:txBody>
       </p:sp>
       <p:sp>
         <p:nvSpPr>
@@ -9956,10 +9576,6 @@
           </a:solidFill>
           <a:ln/>
         </p:spPr>
-        <p:txBody>
-          <a:bodyPr/>
-          <a:p/>
-        </p:txBody>
       </p:sp>
       <p:sp>
         <p:nvSpPr>
@@ -9980,10 +9596,6 @@
           </a:solidFill>
           <a:ln/>
         </p:spPr>
-        <p:txBody>
-          <a:bodyPr/>
-          <a:p/>
-        </p:txBody>
       </p:sp>
       <p:sp>
         <p:nvSpPr>
@@ -10050,10 +9662,6 @@
             </a:outerShdw>
           </a:effectLst>
         </p:spPr>
-        <p:txBody>
-          <a:bodyPr/>
-          <a:p/>
-        </p:txBody>
       </p:sp>
       <p:sp>
         <p:nvSpPr>
@@ -10120,10 +9728,6 @@
             </a:outerShdw>
           </a:effectLst>
         </p:spPr>
-        <p:txBody>
-          <a:bodyPr/>
-          <a:p/>
-        </p:txBody>
       </p:sp>
       <p:sp>
         <p:nvSpPr>

--- a/backend/templates/pptx/gradient_modern.pptx
+++ b/backend/templates/pptx/gradient_modern.pptx
@@ -2496,6 +2496,10 @@
           </a:solidFill>
           <a:ln/>
         </p:spPr>
+        <p:txBody>
+          <a:bodyPr/>
+          <a:p/>
+        </p:txBody>
       </p:sp>
       <p:sp>
         <p:nvSpPr>
@@ -2516,6 +2520,10 @@
           </a:solidFill>
           <a:ln/>
         </p:spPr>
+        <p:txBody>
+          <a:bodyPr/>
+          <a:p/>
+        </p:txBody>
       </p:sp>
       <p:sp>
         <p:nvSpPr>
@@ -2536,6 +2544,10 @@
           </a:solidFill>
           <a:ln/>
         </p:spPr>
+        <p:txBody>
+          <a:bodyPr/>
+          <a:p/>
+        </p:txBody>
       </p:sp>
       <p:sp>
         <p:nvSpPr>
@@ -2578,240 +2590,6 @@
       </p:sp>
       <p:sp>
         <p:nvSpPr>
-          <p:cNvPr id="6" name="Text 4"/>
-          <p:cNvSpPr/>
-          <p:nvPr/>
-        </p:nvSpPr>
-        <p:spPr>
-          <a:xfrm>
-            <a:off x="731520" y="1097280"/>
-            <a:ext cx="5486400" cy="320040"/>
-          </a:xfrm>
-          <a:prstGeom prst="rect">
-            <a:avLst/>
-          </a:prstGeom>
-          <a:noFill/>
-          <a:ln/>
-        </p:spPr>
-        <p:txBody>
-          <a:bodyPr wrap="square" rtlCol="0" anchor="ctr"/>
-          <a:lstStyle/>
-          <a:p>
-            <a:pPr indent="0" marL="0">
-              <a:buNone/>
-            </a:pPr>
-            <a:r>
-              <a:rPr lang="en-US" sz="1100" dirty="0">
-                <a:solidFill>
-                  <a:srgbClr val="FECDD3"/>
-                </a:solidFill>
-                <a:latin typeface="Calibri" pitchFamily="34" charset="0"/>
-                <a:ea typeface="Calibri" pitchFamily="34" charset="-122"/>
-                <a:cs typeface="Calibri" pitchFamily="34" charset="-120"/>
-              </a:rPr>
-              <a:t>Prepared by {{agency_name}}</a:t>
-            </a:r>
-            <a:endParaRPr lang="en-US" sz="1100" dirty="0"/>
-          </a:p>
-        </p:txBody>
-      </p:sp>
-      <p:sp>
-        <p:nvSpPr>
-          <p:cNvPr id="7" name="Text 5"/>
-          <p:cNvSpPr/>
-          <p:nvPr/>
-        </p:nvSpPr>
-        <p:spPr>
-          <a:xfrm>
-            <a:off x="9418320" y="457200"/>
-            <a:ext cx="2011680" cy="914400"/>
-          </a:xfrm>
-          <a:prstGeom prst="rect">
-            <a:avLst/>
-          </a:prstGeom>
-          <a:noFill/>
-          <a:ln/>
-        </p:spPr>
-        <p:txBody>
-          <a:bodyPr wrap="square" rtlCol="0" anchor="ctr"/>
-          <a:lstStyle/>
-          <a:p>
-            <a:pPr algn="r" indent="0" marL="0">
-              <a:buNone/>
-            </a:pPr>
-            <a:r>
-              <a:rPr lang="en-US" sz="900" dirty="0">
-                <a:solidFill>
-                  <a:srgbClr val="FECDD3"/>
-                </a:solidFill>
-                <a:latin typeface="Calibri" pitchFamily="34" charset="0"/>
-                <a:ea typeface="Calibri" pitchFamily="34" charset="-122"/>
-                <a:cs typeface="Calibri" pitchFamily="34" charset="-120"/>
-              </a:rPr>
-              <a:t>{{agency_logo}}</a:t>
-            </a:r>
-            <a:endParaRPr lang="en-US" sz="900" dirty="0"/>
-          </a:p>
-        </p:txBody>
-      </p:sp>
-      <p:sp>
-        <p:nvSpPr>
-          <p:cNvPr id="8" name="Text 6"/>
-          <p:cNvSpPr/>
-          <p:nvPr/>
-        </p:nvSpPr>
-        <p:spPr>
-          <a:xfrm>
-            <a:off x="731520" y="2834640"/>
-            <a:ext cx="10698480" cy="1371600"/>
-          </a:xfrm>
-          <a:prstGeom prst="rect">
-            <a:avLst/>
-          </a:prstGeom>
-          <a:noFill/>
-          <a:ln/>
-        </p:spPr>
-        <p:txBody>
-          <a:bodyPr wrap="square" rtlCol="0" anchor="ctr"/>
-          <a:lstStyle/>
-          <a:p>
-            <a:pPr indent="0" marL="0">
-              <a:buNone/>
-            </a:pPr>
-            <a:r>
-              <a:rPr lang="en-US" sz="4200" b="1" dirty="0">
-                <a:solidFill>
-                  <a:srgbClr val="0F172A"/>
-                </a:solidFill>
-                <a:latin typeface="Calibri" pitchFamily="34" charset="0"/>
-                <a:ea typeface="Calibri" pitchFamily="34" charset="-122"/>
-                <a:cs typeface="Calibri" pitchFamily="34" charset="-120"/>
-              </a:rPr>
-              <a:t>{{client_name}}</a:t>
-            </a:r>
-            <a:endParaRPr lang="en-US" sz="4200" dirty="0"/>
-          </a:p>
-        </p:txBody>
-      </p:sp>
-      <p:sp>
-        <p:nvSpPr>
-          <p:cNvPr id="9" name="Text 7"/>
-          <p:cNvSpPr/>
-          <p:nvPr/>
-        </p:nvSpPr>
-        <p:spPr>
-          <a:xfrm>
-            <a:off x="731520" y="4297680"/>
-            <a:ext cx="7315200" cy="411480"/>
-          </a:xfrm>
-          <a:prstGeom prst="rect">
-            <a:avLst/>
-          </a:prstGeom>
-          <a:noFill/>
-          <a:ln/>
-        </p:spPr>
-        <p:txBody>
-          <a:bodyPr wrap="square" rtlCol="0" anchor="ctr"/>
-          <a:lstStyle/>
-          <a:p>
-            <a:pPr indent="0" marL="0">
-              <a:buNone/>
-            </a:pPr>
-            <a:r>
-              <a:rPr lang="en-US" sz="1600" dirty="0">
-                <a:solidFill>
-                  <a:srgbClr val="64748B"/>
-                </a:solidFill>
-                <a:latin typeface="Calibri" pitchFamily="34" charset="0"/>
-                <a:ea typeface="Calibri" pitchFamily="34" charset="-122"/>
-                <a:cs typeface="Calibri" pitchFamily="34" charset="-120"/>
-              </a:rPr>
-              <a:t>{{report_period}}</a:t>
-            </a:r>
-            <a:endParaRPr lang="en-US" sz="1600" dirty="0"/>
-          </a:p>
-        </p:txBody>
-      </p:sp>
-      <p:sp>
-        <p:nvSpPr>
-          <p:cNvPr id="10" name="Text 8"/>
-          <p:cNvSpPr/>
-          <p:nvPr/>
-        </p:nvSpPr>
-        <p:spPr>
-          <a:xfrm>
-            <a:off x="731520" y="4800600"/>
-            <a:ext cx="7315200" cy="320040"/>
-          </a:xfrm>
-          <a:prstGeom prst="rect">
-            <a:avLst/>
-          </a:prstGeom>
-          <a:noFill/>
-          <a:ln/>
-        </p:spPr>
-        <p:txBody>
-          <a:bodyPr wrap="square" rtlCol="0" anchor="ctr"/>
-          <a:lstStyle/>
-          <a:p>
-            <a:pPr indent="0" marL="0">
-              <a:buNone/>
-            </a:pPr>
-            <a:r>
-              <a:rPr lang="en-US" sz="1200" dirty="0">
-                <a:solidFill>
-                  <a:srgbClr val="94A3B8"/>
-                </a:solidFill>
-                <a:latin typeface="Calibri" pitchFamily="34" charset="0"/>
-                <a:ea typeface="Calibri" pitchFamily="34" charset="-122"/>
-                <a:cs typeface="Calibri" pitchFamily="34" charset="-120"/>
-              </a:rPr>
-              <a:t>{{report_type}}</a:t>
-            </a:r>
-            <a:endParaRPr lang="en-US" sz="1200" dirty="0"/>
-          </a:p>
-        </p:txBody>
-      </p:sp>
-      <p:sp>
-        <p:nvSpPr>
-          <p:cNvPr id="11" name="Text 9"/>
-          <p:cNvSpPr/>
-          <p:nvPr/>
-        </p:nvSpPr>
-        <p:spPr>
-          <a:xfrm>
-            <a:off x="8961120" y="4114800"/>
-            <a:ext cx="2286000" cy="1371600"/>
-          </a:xfrm>
-          <a:prstGeom prst="rect">
-            <a:avLst/>
-          </a:prstGeom>
-          <a:noFill/>
-          <a:ln/>
-        </p:spPr>
-        <p:txBody>
-          <a:bodyPr wrap="square" rtlCol="0" anchor="ctr"/>
-          <a:lstStyle/>
-          <a:p>
-            <a:pPr algn="ctr" indent="0" marL="0">
-              <a:buNone/>
-            </a:pPr>
-            <a:r>
-              <a:rPr lang="en-US" sz="900" dirty="0">
-                <a:solidFill>
-                  <a:srgbClr val="94A3B8"/>
-                </a:solidFill>
-                <a:latin typeface="Calibri" pitchFamily="34" charset="0"/>
-                <a:ea typeface="Calibri" pitchFamily="34" charset="-122"/>
-                <a:cs typeface="Calibri" pitchFamily="34" charset="-120"/>
-              </a:rPr>
-              <a:t>{{client_logo}}</a:t>
-            </a:r>
-            <a:endParaRPr lang="en-US" sz="900" dirty="0"/>
-          </a:p>
-        </p:txBody>
-      </p:sp>
-      <p:sp>
-        <p:nvSpPr>
           <p:cNvPr id="12" name="Shape 10"/>
           <p:cNvSpPr/>
           <p:nvPr/>
@@ -2829,6 +2607,10 @@
           </a:solidFill>
           <a:ln/>
         </p:spPr>
+        <p:txBody>
+          <a:bodyPr/>
+          <a:p/>
+        </p:txBody>
       </p:sp>
       <p:sp>
         <p:nvSpPr>
@@ -2849,6 +2631,10 @@
           </a:solidFill>
           <a:ln/>
         </p:spPr>
+        <p:txBody>
+          <a:bodyPr/>
+          <a:p/>
+        </p:txBody>
       </p:sp>
       <p:sp>
         <p:nvSpPr>
@@ -2869,6 +2655,10 @@
           </a:solidFill>
           <a:ln/>
         </p:spPr>
+        <p:txBody>
+          <a:bodyPr/>
+          <a:p/>
+        </p:txBody>
       </p:sp>
     </p:spTree>
   </p:cSld>
